--- a/Uj-Szem.pptx
+++ b/Uj-Szem.pptx
@@ -23,26 +23,16 @@
   <p:notesSz cx="6858000" cy="12192000"/>
   <p:embeddedFontLst>
     <p:embeddedFont>
-      <p:font typeface="Barlow" panose="00000500000000000000" pitchFamily="2" charset="-18"/>
+      <p:font typeface="Calibri" panose="020F0502020204030204" pitchFamily="34" charset="0"/>
       <p:regular r:id="rId13"/>
       <p:bold r:id="rId14"/>
       <p:italic r:id="rId15"/>
       <p:boldItalic r:id="rId16"/>
     </p:embeddedFont>
     <p:embeddedFont>
-      <p:font typeface="Barlow Bold" panose="00000800000000000000" charset="-18"/>
-      <p:regular r:id="rId17"/>
-    </p:embeddedFont>
-    <p:embeddedFont>
-      <p:font typeface="Barlow Medium" panose="00000600000000000000" pitchFamily="2" charset="-18"/>
-      <p:regular r:id="rId18"/>
-    </p:embeddedFont>
-    <p:embeddedFont>
-      <p:font typeface="Calibri" panose="020F0502020204030204" pitchFamily="34" charset="0"/>
-      <p:regular r:id="rId19"/>
-      <p:bold r:id="rId20"/>
-      <p:italic r:id="rId21"/>
-      <p:boldItalic r:id="rId22"/>
+      <p:font typeface="Segoe UI Semibold" panose="020B0702040204020203" pitchFamily="34" charset="0"/>
+      <p:bold r:id="rId17"/>
+      <p:boldItalic r:id="rId18"/>
     </p:embeddedFont>
   </p:embeddedFontLst>
   <p:defaultTextStyle>
@@ -1577,13 +1567,15 @@
                 <a:solidFill>
                   <a:srgbClr val="FFFFFF"/>
                 </a:solidFill>
-                <a:latin typeface="Barlow Medium" pitchFamily="34" charset="0"/>
+                <a:latin typeface="Segoe UI Semibold" panose="020B0702040204020203" pitchFamily="34" charset="0"/>
                 <a:ea typeface="Barlow Medium" pitchFamily="34" charset="-122"/>
                 <a:cs typeface="Barlow Medium" pitchFamily="34" charset="-120"/>
               </a:rPr>
               <a:t>Új Szem</a:t>
             </a:r>
-            <a:endParaRPr lang="en-US" sz="3650" dirty="0"/>
+            <a:endParaRPr lang="en-US" sz="3650" dirty="0">
+              <a:latin typeface="Segoe UI Semibold" panose="020B0702040204020203" pitchFamily="34" charset="0"/>
+            </a:endParaRPr>
           </a:p>
         </p:txBody>
       </p:sp>
@@ -1622,13 +1614,15 @@
                 <a:solidFill>
                   <a:srgbClr val="E5E0DF"/>
                 </a:solidFill>
-                <a:latin typeface="Barlow" pitchFamily="34" charset="0"/>
+                <a:latin typeface="Segoe UI Semibold" panose="020B0702040204020203" pitchFamily="34" charset="0"/>
                 <a:ea typeface="Barlow" pitchFamily="34" charset="-122"/>
                 <a:cs typeface="Barlow" pitchFamily="34" charset="-120"/>
               </a:rPr>
               <a:t>Hírportál</a:t>
             </a:r>
-            <a:endParaRPr lang="en-US" sz="1650" dirty="0"/>
+            <a:endParaRPr lang="en-US" sz="1650" dirty="0">
+              <a:latin typeface="Segoe UI Semibold" panose="020B0702040204020203" pitchFamily="34" charset="0"/>
+            </a:endParaRPr>
           </a:p>
           <a:p>
             <a:pPr marL="0" indent="0" algn="ctr">
@@ -1642,13 +1636,15 @@
                 <a:solidFill>
                   <a:srgbClr val="E5E0DF"/>
                 </a:solidFill>
-                <a:latin typeface="Barlow" pitchFamily="34" charset="0"/>
+                <a:latin typeface="Segoe UI Semibold" panose="020B0702040204020203" pitchFamily="34" charset="0"/>
                 <a:ea typeface="Barlow" pitchFamily="34" charset="-122"/>
                 <a:cs typeface="Barlow" pitchFamily="34" charset="-120"/>
               </a:rPr>
               <a:t>Mihályi Márton, Fábián Zoltán, Erdélyi Zsolt</a:t>
             </a:r>
-            <a:endParaRPr lang="en-US" sz="1650" dirty="0"/>
+            <a:endParaRPr lang="en-US" sz="1650" dirty="0">
+              <a:latin typeface="Segoe UI Semibold" panose="020B0702040204020203" pitchFamily="34" charset="0"/>
+            </a:endParaRPr>
           </a:p>
         </p:txBody>
       </p:sp>
@@ -1717,6 +1713,335 @@
   <p:clrMapOvr>
     <a:masterClrMapping/>
   </p:clrMapOvr>
+  <p:timing>
+    <p:tnLst>
+      <p:par>
+        <p:cTn id="1" dur="indefinite" restart="never" nodeType="tmRoot">
+          <p:childTnLst>
+            <p:seq concurrent="1" nextAc="seek">
+              <p:cTn id="2" dur="indefinite" nodeType="mainSeq">
+                <p:childTnLst>
+                  <p:par>
+                    <p:cTn id="3" fill="hold">
+                      <p:stCondLst>
+                        <p:cond delay="indefinite"/>
+                        <p:cond evt="onBegin" delay="0">
+                          <p:tn val="2"/>
+                        </p:cond>
+                      </p:stCondLst>
+                      <p:childTnLst>
+                        <p:par>
+                          <p:cTn id="4" fill="hold">
+                            <p:stCondLst>
+                              <p:cond delay="0"/>
+                            </p:stCondLst>
+                            <p:childTnLst>
+                              <p:par>
+                                <p:cTn id="5" presetID="26" presetClass="entr" presetSubtype="0" fill="hold" nodeType="afterEffect">
+                                  <p:stCondLst>
+                                    <p:cond delay="0"/>
+                                  </p:stCondLst>
+                                  <p:childTnLst>
+                                    <p:set>
+                                      <p:cBhvr>
+                                        <p:cTn id="6" dur="1" fill="hold">
+                                          <p:stCondLst>
+                                            <p:cond delay="0"/>
+                                          </p:stCondLst>
+                                        </p:cTn>
+                                        <p:tgtEl>
+                                          <p:spTgt spid="9"/>
+                                        </p:tgtEl>
+                                        <p:attrNameLst>
+                                          <p:attrName>style.visibility</p:attrName>
+                                        </p:attrNameLst>
+                                      </p:cBhvr>
+                                      <p:to>
+                                        <p:strVal val="visible"/>
+                                      </p:to>
+                                    </p:set>
+                                    <p:animEffect transition="in" filter="wipe(down)">
+                                      <p:cBhvr>
+                                        <p:cTn id="7" dur="580">
+                                          <p:stCondLst>
+                                            <p:cond delay="0"/>
+                                          </p:stCondLst>
+                                        </p:cTn>
+                                        <p:tgtEl>
+                                          <p:spTgt spid="9"/>
+                                        </p:tgtEl>
+                                      </p:cBhvr>
+                                    </p:animEffect>
+                                    <p:anim calcmode="lin" valueType="num">
+                                      <p:cBhvr>
+                                        <p:cTn id="8" dur="1822" tmFilter="0,0; 0.14,0.36; 0.43,0.73; 0.71,0.91; 1.0,1.0">
+                                          <p:stCondLst>
+                                            <p:cond delay="0"/>
+                                          </p:stCondLst>
+                                        </p:cTn>
+                                        <p:tgtEl>
+                                          <p:spTgt spid="9"/>
+                                        </p:tgtEl>
+                                        <p:attrNameLst>
+                                          <p:attrName>ppt_x</p:attrName>
+                                        </p:attrNameLst>
+                                      </p:cBhvr>
+                                      <p:tavLst>
+                                        <p:tav tm="0">
+                                          <p:val>
+                                            <p:strVal val="#ppt_x-0.25"/>
+                                          </p:val>
+                                        </p:tav>
+                                        <p:tav tm="100000">
+                                          <p:val>
+                                            <p:strVal val="#ppt_x"/>
+                                          </p:val>
+                                        </p:tav>
+                                      </p:tavLst>
+                                    </p:anim>
+                                    <p:anim calcmode="lin" valueType="num">
+                                      <p:cBhvr>
+                                        <p:cTn id="9" dur="664" tmFilter="0.0,0.0; 0.25,0.07; 0.50,0.2; 0.75,0.467; 1.0,1.0">
+                                          <p:stCondLst>
+                                            <p:cond delay="0"/>
+                                          </p:stCondLst>
+                                        </p:cTn>
+                                        <p:tgtEl>
+                                          <p:spTgt spid="9"/>
+                                        </p:tgtEl>
+                                        <p:attrNameLst>
+                                          <p:attrName>ppt_y</p:attrName>
+                                        </p:attrNameLst>
+                                      </p:cBhvr>
+                                      <p:tavLst>
+                                        <p:tav tm="0" fmla="#ppt_y-sin(pi*$)/3">
+                                          <p:val>
+                                            <p:fltVal val="0.5"/>
+                                          </p:val>
+                                        </p:tav>
+                                        <p:tav tm="100000">
+                                          <p:val>
+                                            <p:fltVal val="1"/>
+                                          </p:val>
+                                        </p:tav>
+                                      </p:tavLst>
+                                    </p:anim>
+                                    <p:anim calcmode="lin" valueType="num">
+                                      <p:cBhvr>
+                                        <p:cTn id="10" dur="664" tmFilter="0, 0; 0.125,0.2665; 0.25,0.4; 0.375,0.465; 0.5,0.5;  0.625,0.535; 0.75,0.6; 0.875,0.7335; 1,1">
+                                          <p:stCondLst>
+                                            <p:cond delay="664"/>
+                                          </p:stCondLst>
+                                        </p:cTn>
+                                        <p:tgtEl>
+                                          <p:spTgt spid="9"/>
+                                        </p:tgtEl>
+                                        <p:attrNameLst>
+                                          <p:attrName>ppt_y</p:attrName>
+                                        </p:attrNameLst>
+                                      </p:cBhvr>
+                                      <p:tavLst>
+                                        <p:tav tm="0" fmla="#ppt_y-sin(pi*$)/9">
+                                          <p:val>
+                                            <p:fltVal val="0"/>
+                                          </p:val>
+                                        </p:tav>
+                                        <p:tav tm="100000">
+                                          <p:val>
+                                            <p:fltVal val="1"/>
+                                          </p:val>
+                                        </p:tav>
+                                      </p:tavLst>
+                                    </p:anim>
+                                    <p:anim calcmode="lin" valueType="num">
+                                      <p:cBhvr>
+                                        <p:cTn id="11" dur="332" tmFilter="0, 0; 0.125,0.2665; 0.25,0.4; 0.375,0.465; 0.5,0.5;  0.625,0.535; 0.75,0.6; 0.875,0.7335; 1,1">
+                                          <p:stCondLst>
+                                            <p:cond delay="1324"/>
+                                          </p:stCondLst>
+                                        </p:cTn>
+                                        <p:tgtEl>
+                                          <p:spTgt spid="9"/>
+                                        </p:tgtEl>
+                                        <p:attrNameLst>
+                                          <p:attrName>ppt_y</p:attrName>
+                                        </p:attrNameLst>
+                                      </p:cBhvr>
+                                      <p:tavLst>
+                                        <p:tav tm="0" fmla="#ppt_y-sin(pi*$)/27">
+                                          <p:val>
+                                            <p:fltVal val="0"/>
+                                          </p:val>
+                                        </p:tav>
+                                        <p:tav tm="100000">
+                                          <p:val>
+                                            <p:fltVal val="1"/>
+                                          </p:val>
+                                        </p:tav>
+                                      </p:tavLst>
+                                    </p:anim>
+                                    <p:anim calcmode="lin" valueType="num">
+                                      <p:cBhvr>
+                                        <p:cTn id="12" dur="164" tmFilter="0, 0; 0.125,0.2665; 0.25,0.4; 0.375,0.465; 0.5,0.5;  0.625,0.535; 0.75,0.6; 0.875,0.7335; 1,1">
+                                          <p:stCondLst>
+                                            <p:cond delay="1656"/>
+                                          </p:stCondLst>
+                                        </p:cTn>
+                                        <p:tgtEl>
+                                          <p:spTgt spid="9"/>
+                                        </p:tgtEl>
+                                        <p:attrNameLst>
+                                          <p:attrName>ppt_y</p:attrName>
+                                        </p:attrNameLst>
+                                      </p:cBhvr>
+                                      <p:tavLst>
+                                        <p:tav tm="0" fmla="#ppt_y-sin(pi*$)/81">
+                                          <p:val>
+                                            <p:fltVal val="0"/>
+                                          </p:val>
+                                        </p:tav>
+                                        <p:tav tm="100000">
+                                          <p:val>
+                                            <p:fltVal val="1"/>
+                                          </p:val>
+                                        </p:tav>
+                                      </p:tavLst>
+                                    </p:anim>
+                                    <p:animScale>
+                                      <p:cBhvr>
+                                        <p:cTn id="13" dur="26">
+                                          <p:stCondLst>
+                                            <p:cond delay="650"/>
+                                          </p:stCondLst>
+                                        </p:cTn>
+                                        <p:tgtEl>
+                                          <p:spTgt spid="9"/>
+                                        </p:tgtEl>
+                                      </p:cBhvr>
+                                      <p:to x="100000" y="60000"/>
+                                    </p:animScale>
+                                    <p:animScale>
+                                      <p:cBhvr>
+                                        <p:cTn id="14" dur="166" decel="50000">
+                                          <p:stCondLst>
+                                            <p:cond delay="676"/>
+                                          </p:stCondLst>
+                                        </p:cTn>
+                                        <p:tgtEl>
+                                          <p:spTgt spid="9"/>
+                                        </p:tgtEl>
+                                      </p:cBhvr>
+                                      <p:to x="100000" y="100000"/>
+                                    </p:animScale>
+                                    <p:animScale>
+                                      <p:cBhvr>
+                                        <p:cTn id="15" dur="26">
+                                          <p:stCondLst>
+                                            <p:cond delay="1312"/>
+                                          </p:stCondLst>
+                                        </p:cTn>
+                                        <p:tgtEl>
+                                          <p:spTgt spid="9"/>
+                                        </p:tgtEl>
+                                      </p:cBhvr>
+                                      <p:to x="100000" y="80000"/>
+                                    </p:animScale>
+                                    <p:animScale>
+                                      <p:cBhvr>
+                                        <p:cTn id="16" dur="166" decel="50000">
+                                          <p:stCondLst>
+                                            <p:cond delay="1338"/>
+                                          </p:stCondLst>
+                                        </p:cTn>
+                                        <p:tgtEl>
+                                          <p:spTgt spid="9"/>
+                                        </p:tgtEl>
+                                      </p:cBhvr>
+                                      <p:to x="100000" y="100000"/>
+                                    </p:animScale>
+                                    <p:animScale>
+                                      <p:cBhvr>
+                                        <p:cTn id="17" dur="26">
+                                          <p:stCondLst>
+                                            <p:cond delay="1642"/>
+                                          </p:stCondLst>
+                                        </p:cTn>
+                                        <p:tgtEl>
+                                          <p:spTgt spid="9"/>
+                                        </p:tgtEl>
+                                      </p:cBhvr>
+                                      <p:to x="100000" y="90000"/>
+                                    </p:animScale>
+                                    <p:animScale>
+                                      <p:cBhvr>
+                                        <p:cTn id="18" dur="166" decel="50000">
+                                          <p:stCondLst>
+                                            <p:cond delay="1668"/>
+                                          </p:stCondLst>
+                                        </p:cTn>
+                                        <p:tgtEl>
+                                          <p:spTgt spid="9"/>
+                                        </p:tgtEl>
+                                      </p:cBhvr>
+                                      <p:to x="100000" y="100000"/>
+                                    </p:animScale>
+                                    <p:animScale>
+                                      <p:cBhvr>
+                                        <p:cTn id="19" dur="26">
+                                          <p:stCondLst>
+                                            <p:cond delay="1808"/>
+                                          </p:stCondLst>
+                                        </p:cTn>
+                                        <p:tgtEl>
+                                          <p:spTgt spid="9"/>
+                                        </p:tgtEl>
+                                      </p:cBhvr>
+                                      <p:to x="100000" y="95000"/>
+                                    </p:animScale>
+                                    <p:animScale>
+                                      <p:cBhvr>
+                                        <p:cTn id="20" dur="166" decel="50000">
+                                          <p:stCondLst>
+                                            <p:cond delay="1834"/>
+                                          </p:stCondLst>
+                                        </p:cTn>
+                                        <p:tgtEl>
+                                          <p:spTgt spid="9"/>
+                                        </p:tgtEl>
+                                      </p:cBhvr>
+                                      <p:to x="100000" y="100000"/>
+                                    </p:animScale>
+                                  </p:childTnLst>
+                                </p:cTn>
+                              </p:par>
+                            </p:childTnLst>
+                          </p:cTn>
+                        </p:par>
+                      </p:childTnLst>
+                    </p:cTn>
+                  </p:par>
+                </p:childTnLst>
+              </p:cTn>
+              <p:prevCondLst>
+                <p:cond evt="onPrev" delay="0">
+                  <p:tgtEl>
+                    <p:sldTgt/>
+                  </p:tgtEl>
+                </p:cond>
+              </p:prevCondLst>
+              <p:nextCondLst>
+                <p:cond evt="onNext" delay="0">
+                  <p:tgtEl>
+                    <p:sldTgt/>
+                  </p:tgtEl>
+                </p:cond>
+              </p:nextCondLst>
+            </p:seq>
+          </p:childTnLst>
+        </p:cTn>
+      </p:par>
+    </p:tnLst>
+  </p:timing>
 </p:sld>
 </file>
 
@@ -1769,13 +2094,15 @@
                 <a:solidFill>
                   <a:srgbClr val="FFFFFF"/>
                 </a:solidFill>
-                <a:latin typeface="Barlow Medium" pitchFamily="34" charset="0"/>
+                <a:latin typeface="Segoe UI Semibold" panose="020B0702040204020203" pitchFamily="34" charset="0"/>
                 <a:ea typeface="Barlow Medium" pitchFamily="34" charset="-122"/>
                 <a:cs typeface="Barlow Medium" pitchFamily="34" charset="-120"/>
               </a:rPr>
               <a:t>Köszönjük a figyelmet!</a:t>
             </a:r>
-            <a:endParaRPr lang="en-US" sz="5050" dirty="0"/>
+            <a:endParaRPr lang="en-US" sz="5050" dirty="0">
+              <a:latin typeface="Segoe UI Semibold" panose="020B0702040204020203" pitchFamily="34" charset="0"/>
+            </a:endParaRPr>
           </a:p>
         </p:txBody>
       </p:sp>
@@ -1844,6 +2171,347 @@
   <p:clrMapOvr>
     <a:masterClrMapping/>
   </p:clrMapOvr>
+  <mc:AlternateContent xmlns:mc="http://schemas.openxmlformats.org/markup-compatibility/2006">
+    <mc:Choice xmlns:p15="http://schemas.microsoft.com/office/powerpoint/2012/main" Requires="p15">
+      <p:transition xmlns:p14="http://schemas.microsoft.com/office/powerpoint/2010/main" spd="slow" p14:dur="3250">
+        <p15:prstTrans prst="origami"/>
+      </p:transition>
+    </mc:Choice>
+    <mc:Fallback>
+      <p:transition spd="slow">
+        <p:fade/>
+      </p:transition>
+    </mc:Fallback>
+  </mc:AlternateContent>
+  <p:timing>
+    <p:tnLst>
+      <p:par>
+        <p:cTn id="1" dur="indefinite" restart="never" nodeType="tmRoot">
+          <p:childTnLst>
+            <p:seq concurrent="1" nextAc="seek">
+              <p:cTn id="2" dur="indefinite" nodeType="mainSeq">
+                <p:childTnLst>
+                  <p:par>
+                    <p:cTn id="3" fill="hold">
+                      <p:stCondLst>
+                        <p:cond delay="indefinite"/>
+                        <p:cond evt="onBegin" delay="0">
+                          <p:tn val="2"/>
+                        </p:cond>
+                      </p:stCondLst>
+                      <p:childTnLst>
+                        <p:par>
+                          <p:cTn id="4" fill="hold">
+                            <p:stCondLst>
+                              <p:cond delay="0"/>
+                            </p:stCondLst>
+                            <p:childTnLst>
+                              <p:par>
+                                <p:cTn id="5" presetID="26" presetClass="entr" presetSubtype="0" fill="hold" nodeType="afterEffect">
+                                  <p:stCondLst>
+                                    <p:cond delay="0"/>
+                                  </p:stCondLst>
+                                  <p:childTnLst>
+                                    <p:set>
+                                      <p:cBhvr>
+                                        <p:cTn id="6" dur="1" fill="hold">
+                                          <p:stCondLst>
+                                            <p:cond delay="0"/>
+                                          </p:stCondLst>
+                                        </p:cTn>
+                                        <p:tgtEl>
+                                          <p:spTgt spid="5"/>
+                                        </p:tgtEl>
+                                        <p:attrNameLst>
+                                          <p:attrName>style.visibility</p:attrName>
+                                        </p:attrNameLst>
+                                      </p:cBhvr>
+                                      <p:to>
+                                        <p:strVal val="visible"/>
+                                      </p:to>
+                                    </p:set>
+                                    <p:animEffect transition="in" filter="wipe(down)">
+                                      <p:cBhvr>
+                                        <p:cTn id="7" dur="290">
+                                          <p:stCondLst>
+                                            <p:cond delay="0"/>
+                                          </p:stCondLst>
+                                        </p:cTn>
+                                        <p:tgtEl>
+                                          <p:spTgt spid="5"/>
+                                        </p:tgtEl>
+                                      </p:cBhvr>
+                                    </p:animEffect>
+                                    <p:anim calcmode="lin" valueType="num">
+                                      <p:cBhvr>
+                                        <p:cTn id="8" dur="911" tmFilter="0,0; 0.14,0.36; 0.43,0.73; 0.71,0.91; 1.0,1.0">
+                                          <p:stCondLst>
+                                            <p:cond delay="0"/>
+                                          </p:stCondLst>
+                                        </p:cTn>
+                                        <p:tgtEl>
+                                          <p:spTgt spid="5"/>
+                                        </p:tgtEl>
+                                        <p:attrNameLst>
+                                          <p:attrName>ppt_x</p:attrName>
+                                        </p:attrNameLst>
+                                      </p:cBhvr>
+                                      <p:tavLst>
+                                        <p:tav tm="0">
+                                          <p:val>
+                                            <p:strVal val="#ppt_x-0.25"/>
+                                          </p:val>
+                                        </p:tav>
+                                        <p:tav tm="100000">
+                                          <p:val>
+                                            <p:strVal val="#ppt_x"/>
+                                          </p:val>
+                                        </p:tav>
+                                      </p:tavLst>
+                                    </p:anim>
+                                    <p:anim calcmode="lin" valueType="num">
+                                      <p:cBhvr>
+                                        <p:cTn id="9" dur="332" tmFilter="0.0,0.0; 0.25,0.07; 0.50,0.2; 0.75,0.467; 1.0,1.0">
+                                          <p:stCondLst>
+                                            <p:cond delay="0"/>
+                                          </p:stCondLst>
+                                        </p:cTn>
+                                        <p:tgtEl>
+                                          <p:spTgt spid="5"/>
+                                        </p:tgtEl>
+                                        <p:attrNameLst>
+                                          <p:attrName>ppt_y</p:attrName>
+                                        </p:attrNameLst>
+                                      </p:cBhvr>
+                                      <p:tavLst>
+                                        <p:tav tm="0" fmla="#ppt_y-sin(pi*$)/3">
+                                          <p:val>
+                                            <p:fltVal val="0.5"/>
+                                          </p:val>
+                                        </p:tav>
+                                        <p:tav tm="100000">
+                                          <p:val>
+                                            <p:fltVal val="1"/>
+                                          </p:val>
+                                        </p:tav>
+                                      </p:tavLst>
+                                    </p:anim>
+                                    <p:anim calcmode="lin" valueType="num">
+                                      <p:cBhvr>
+                                        <p:cTn id="10" dur="332" tmFilter="0, 0; 0.125,0.2665; 0.25,0.4; 0.375,0.465; 0.5,0.5;  0.625,0.535; 0.75,0.6; 0.875,0.7335; 1,1">
+                                          <p:stCondLst>
+                                            <p:cond delay="332"/>
+                                          </p:stCondLst>
+                                        </p:cTn>
+                                        <p:tgtEl>
+                                          <p:spTgt spid="5"/>
+                                        </p:tgtEl>
+                                        <p:attrNameLst>
+                                          <p:attrName>ppt_y</p:attrName>
+                                        </p:attrNameLst>
+                                      </p:cBhvr>
+                                      <p:tavLst>
+                                        <p:tav tm="0" fmla="#ppt_y-sin(pi*$)/9">
+                                          <p:val>
+                                            <p:fltVal val="0"/>
+                                          </p:val>
+                                        </p:tav>
+                                        <p:tav tm="100000">
+                                          <p:val>
+                                            <p:fltVal val="1"/>
+                                          </p:val>
+                                        </p:tav>
+                                      </p:tavLst>
+                                    </p:anim>
+                                    <p:anim calcmode="lin" valueType="num">
+                                      <p:cBhvr>
+                                        <p:cTn id="11" dur="166" tmFilter="0, 0; 0.125,0.2665; 0.25,0.4; 0.375,0.465; 0.5,0.5;  0.625,0.535; 0.75,0.6; 0.875,0.7335; 1,1">
+                                          <p:stCondLst>
+                                            <p:cond delay="662"/>
+                                          </p:stCondLst>
+                                        </p:cTn>
+                                        <p:tgtEl>
+                                          <p:spTgt spid="5"/>
+                                        </p:tgtEl>
+                                        <p:attrNameLst>
+                                          <p:attrName>ppt_y</p:attrName>
+                                        </p:attrNameLst>
+                                      </p:cBhvr>
+                                      <p:tavLst>
+                                        <p:tav tm="0" fmla="#ppt_y-sin(pi*$)/27">
+                                          <p:val>
+                                            <p:fltVal val="0"/>
+                                          </p:val>
+                                        </p:tav>
+                                        <p:tav tm="100000">
+                                          <p:val>
+                                            <p:fltVal val="1"/>
+                                          </p:val>
+                                        </p:tav>
+                                      </p:tavLst>
+                                    </p:anim>
+                                    <p:anim calcmode="lin" valueType="num">
+                                      <p:cBhvr>
+                                        <p:cTn id="12" dur="82" tmFilter="0, 0; 0.125,0.2665; 0.25,0.4; 0.375,0.465; 0.5,0.5;  0.625,0.535; 0.75,0.6; 0.875,0.7335; 1,1">
+                                          <p:stCondLst>
+                                            <p:cond delay="828"/>
+                                          </p:stCondLst>
+                                        </p:cTn>
+                                        <p:tgtEl>
+                                          <p:spTgt spid="5"/>
+                                        </p:tgtEl>
+                                        <p:attrNameLst>
+                                          <p:attrName>ppt_y</p:attrName>
+                                        </p:attrNameLst>
+                                      </p:cBhvr>
+                                      <p:tavLst>
+                                        <p:tav tm="0" fmla="#ppt_y-sin(pi*$)/81">
+                                          <p:val>
+                                            <p:fltVal val="0"/>
+                                          </p:val>
+                                        </p:tav>
+                                        <p:tav tm="100000">
+                                          <p:val>
+                                            <p:fltVal val="1"/>
+                                          </p:val>
+                                        </p:tav>
+                                      </p:tavLst>
+                                    </p:anim>
+                                    <p:animScale>
+                                      <p:cBhvr>
+                                        <p:cTn id="13" dur="13">
+                                          <p:stCondLst>
+                                            <p:cond delay="325"/>
+                                          </p:stCondLst>
+                                        </p:cTn>
+                                        <p:tgtEl>
+                                          <p:spTgt spid="5"/>
+                                        </p:tgtEl>
+                                      </p:cBhvr>
+                                      <p:to x="100000" y="60000"/>
+                                    </p:animScale>
+                                    <p:animScale>
+                                      <p:cBhvr>
+                                        <p:cTn id="14" dur="83" decel="50000">
+                                          <p:stCondLst>
+                                            <p:cond delay="338"/>
+                                          </p:stCondLst>
+                                        </p:cTn>
+                                        <p:tgtEl>
+                                          <p:spTgt spid="5"/>
+                                        </p:tgtEl>
+                                      </p:cBhvr>
+                                      <p:to x="100000" y="100000"/>
+                                    </p:animScale>
+                                    <p:animScale>
+                                      <p:cBhvr>
+                                        <p:cTn id="15" dur="13">
+                                          <p:stCondLst>
+                                            <p:cond delay="656"/>
+                                          </p:stCondLst>
+                                        </p:cTn>
+                                        <p:tgtEl>
+                                          <p:spTgt spid="5"/>
+                                        </p:tgtEl>
+                                      </p:cBhvr>
+                                      <p:to x="100000" y="80000"/>
+                                    </p:animScale>
+                                    <p:animScale>
+                                      <p:cBhvr>
+                                        <p:cTn id="16" dur="83" decel="50000">
+                                          <p:stCondLst>
+                                            <p:cond delay="669"/>
+                                          </p:stCondLst>
+                                        </p:cTn>
+                                        <p:tgtEl>
+                                          <p:spTgt spid="5"/>
+                                        </p:tgtEl>
+                                      </p:cBhvr>
+                                      <p:to x="100000" y="100000"/>
+                                    </p:animScale>
+                                    <p:animScale>
+                                      <p:cBhvr>
+                                        <p:cTn id="17" dur="13">
+                                          <p:stCondLst>
+                                            <p:cond delay="821"/>
+                                          </p:stCondLst>
+                                        </p:cTn>
+                                        <p:tgtEl>
+                                          <p:spTgt spid="5"/>
+                                        </p:tgtEl>
+                                      </p:cBhvr>
+                                      <p:to x="100000" y="90000"/>
+                                    </p:animScale>
+                                    <p:animScale>
+                                      <p:cBhvr>
+                                        <p:cTn id="18" dur="83" decel="50000">
+                                          <p:stCondLst>
+                                            <p:cond delay="834"/>
+                                          </p:stCondLst>
+                                        </p:cTn>
+                                        <p:tgtEl>
+                                          <p:spTgt spid="5"/>
+                                        </p:tgtEl>
+                                      </p:cBhvr>
+                                      <p:to x="100000" y="100000"/>
+                                    </p:animScale>
+                                    <p:animScale>
+                                      <p:cBhvr>
+                                        <p:cTn id="19" dur="13">
+                                          <p:stCondLst>
+                                            <p:cond delay="904"/>
+                                          </p:stCondLst>
+                                        </p:cTn>
+                                        <p:tgtEl>
+                                          <p:spTgt spid="5"/>
+                                        </p:tgtEl>
+                                      </p:cBhvr>
+                                      <p:to x="100000" y="95000"/>
+                                    </p:animScale>
+                                    <p:animScale>
+                                      <p:cBhvr>
+                                        <p:cTn id="20" dur="83" decel="50000">
+                                          <p:stCondLst>
+                                            <p:cond delay="917"/>
+                                          </p:stCondLst>
+                                        </p:cTn>
+                                        <p:tgtEl>
+                                          <p:spTgt spid="5"/>
+                                        </p:tgtEl>
+                                      </p:cBhvr>
+                                      <p:to x="100000" y="100000"/>
+                                    </p:animScale>
+                                  </p:childTnLst>
+                                </p:cTn>
+                              </p:par>
+                            </p:childTnLst>
+                          </p:cTn>
+                        </p:par>
+                      </p:childTnLst>
+                    </p:cTn>
+                  </p:par>
+                </p:childTnLst>
+              </p:cTn>
+              <p:prevCondLst>
+                <p:cond evt="onPrev" delay="0">
+                  <p:tgtEl>
+                    <p:sldTgt/>
+                  </p:tgtEl>
+                </p:cond>
+              </p:prevCondLst>
+              <p:nextCondLst>
+                <p:cond evt="onNext" delay="0">
+                  <p:tgtEl>
+                    <p:sldTgt/>
+                  </p:tgtEl>
+                </p:cond>
+              </p:nextCondLst>
+            </p:seq>
+          </p:childTnLst>
+        </p:cTn>
+      </p:par>
+    </p:tnLst>
+  </p:timing>
 </p:sld>
 </file>
 
@@ -1896,13 +2564,15 @@
                 <a:solidFill>
                   <a:srgbClr val="FFFFFF"/>
                 </a:solidFill>
-                <a:latin typeface="Barlow Medium" pitchFamily="34" charset="0"/>
+                <a:latin typeface="Segoe UI Semibold" panose="020B0702040204020203" pitchFamily="34" charset="0"/>
                 <a:ea typeface="Barlow Medium" pitchFamily="34" charset="-122"/>
                 <a:cs typeface="Barlow Medium" pitchFamily="34" charset="-120"/>
               </a:rPr>
               <a:t>A projekt célja</a:t>
             </a:r>
-            <a:endParaRPr lang="en-US" sz="3650" dirty="0"/>
+            <a:endParaRPr lang="en-US" sz="3650" dirty="0">
+              <a:latin typeface="Segoe UI Semibold" panose="020B0702040204020203" pitchFamily="34" charset="0"/>
+            </a:endParaRPr>
           </a:p>
         </p:txBody>
       </p:sp>
@@ -1938,13 +2608,15 @@
                 <a:solidFill>
                   <a:srgbClr val="E5E0DF"/>
                 </a:solidFill>
-                <a:latin typeface="Barlow" pitchFamily="34" charset="0"/>
+                <a:latin typeface="Segoe UI Semibold" panose="020B0702040204020203" pitchFamily="34" charset="0"/>
                 <a:ea typeface="Barlow" pitchFamily="34" charset="-122"/>
                 <a:cs typeface="Barlow" pitchFamily="34" charset="-120"/>
               </a:rPr>
               <a:t>Modern online felület társadalmi, kulturális és kritikai írások publikálásához és olvasásához.</a:t>
             </a:r>
-            <a:endParaRPr lang="en-US" sz="1650" dirty="0"/>
+            <a:endParaRPr lang="en-US" sz="1650" dirty="0">
+              <a:latin typeface="Segoe UI Semibold" panose="020B0702040204020203" pitchFamily="34" charset="0"/>
+            </a:endParaRPr>
           </a:p>
         </p:txBody>
       </p:sp>
@@ -1956,8 +2628,8 @@
         </p:nvSpPr>
         <p:spPr>
           <a:xfrm>
-            <a:off x="734200" y="3638947"/>
-            <a:ext cx="10723294" cy="1154112"/>
+            <a:off x="734200" y="3638946"/>
+            <a:ext cx="10723294" cy="2069395"/>
           </a:xfrm>
           <a:prstGeom prst="rect">
             <a:avLst/>
@@ -1976,20 +2648,117 @@
                 <a:spcPct val="133000"/>
               </a:lnSpc>
               <a:buSzPct val="100000"/>
-              <a:buChar char="•"/>
+              <a:buFont typeface="Wingdings" panose="05000000000000000000" pitchFamily="2" charset="2"/>
+              <a:buChar char="q"/>
             </a:pPr>
             <a:r>
               <a:rPr lang="en-US" sz="1650" dirty="0">
                 <a:solidFill>
                   <a:srgbClr val="E5E0DF"/>
                 </a:solidFill>
-                <a:latin typeface="Barlow" pitchFamily="34" charset="0"/>
+                <a:latin typeface="Segoe UI Semibold" panose="020B0702040204020203" pitchFamily="34" charset="0"/>
                 <a:ea typeface="Barlow" pitchFamily="34" charset="-122"/>
                 <a:cs typeface="Barlow" pitchFamily="34" charset="-120"/>
               </a:rPr>
               <a:t>Böngészés kategóriák szerint</a:t>
             </a:r>
-            <a:endParaRPr lang="en-US" sz="1650" dirty="0"/>
+            <a:endParaRPr lang="en-US" sz="1650" dirty="0">
+              <a:latin typeface="Segoe UI Semibold" panose="020B0702040204020203" pitchFamily="34" charset="0"/>
+            </a:endParaRPr>
+          </a:p>
+          <a:p>
+            <a:pPr marL="335280" indent="-335280" algn="l">
+              <a:lnSpc>
+                <a:spcPct val="133000"/>
+              </a:lnSpc>
+              <a:buSzPct val="100000"/>
+              <a:buFont typeface="Wingdings" panose="05000000000000000000" pitchFamily="2" charset="2"/>
+              <a:buChar char="q"/>
+            </a:pPr>
+            <a:r>
+              <a:rPr lang="en-US" sz="1650" dirty="0">
+                <a:solidFill>
+                  <a:srgbClr val="E5E0DF"/>
+                </a:solidFill>
+                <a:latin typeface="Segoe UI Semibold" panose="020B0702040204020203" pitchFamily="34" charset="0"/>
+                <a:ea typeface="Barlow" pitchFamily="34" charset="-122"/>
+                <a:cs typeface="Barlow" pitchFamily="34" charset="-120"/>
+              </a:rPr>
+              <a:t>Szerzők követése</a:t>
+            </a:r>
+            <a:endParaRPr lang="en-US" sz="1650" dirty="0">
+              <a:latin typeface="Segoe UI Semibold" panose="020B0702040204020203" pitchFamily="34" charset="0"/>
+            </a:endParaRPr>
+          </a:p>
+          <a:p>
+            <a:pPr marL="335280" indent="-335280" algn="l">
+              <a:lnSpc>
+                <a:spcPct val="133000"/>
+              </a:lnSpc>
+              <a:buSzPct val="100000"/>
+              <a:buFont typeface="Wingdings" panose="05000000000000000000" pitchFamily="2" charset="2"/>
+              <a:buChar char="q"/>
+            </a:pPr>
+            <a:r>
+              <a:rPr lang="en-US" sz="1650" dirty="0" err="1">
+                <a:solidFill>
+                  <a:srgbClr val="E5E0DF"/>
+                </a:solidFill>
+                <a:latin typeface="Segoe UI Semibold" panose="020B0702040204020203" pitchFamily="34" charset="0"/>
+                <a:ea typeface="Barlow" pitchFamily="34" charset="-122"/>
+                <a:cs typeface="Barlow" pitchFamily="34" charset="-120"/>
+              </a:rPr>
+              <a:t>Cikkek</a:t>
+            </a:r>
+            <a:r>
+              <a:rPr lang="en-US" sz="1650" dirty="0">
+                <a:solidFill>
+                  <a:srgbClr val="E5E0DF"/>
+                </a:solidFill>
+                <a:latin typeface="Segoe UI Semibold" panose="020B0702040204020203" pitchFamily="34" charset="0"/>
+                <a:ea typeface="Barlow" pitchFamily="34" charset="-122"/>
+                <a:cs typeface="Barlow" pitchFamily="34" charset="-120"/>
+              </a:rPr>
+              <a:t> </a:t>
+            </a:r>
+            <a:r>
+              <a:rPr lang="en-US" sz="1650" dirty="0" err="1">
+                <a:solidFill>
+                  <a:srgbClr val="E5E0DF"/>
+                </a:solidFill>
+                <a:latin typeface="Segoe UI Semibold" panose="020B0702040204020203" pitchFamily="34" charset="0"/>
+                <a:ea typeface="Barlow" pitchFamily="34" charset="-122"/>
+                <a:cs typeface="Barlow" pitchFamily="34" charset="-120"/>
+              </a:rPr>
+              <a:t>könyvjelzőzése</a:t>
+            </a:r>
+            <a:endParaRPr lang="hu-HU" sz="1650" dirty="0">
+              <a:solidFill>
+                <a:srgbClr val="E5E0DF"/>
+              </a:solidFill>
+              <a:latin typeface="Segoe UI Semibold" panose="020B0702040204020203" pitchFamily="34" charset="0"/>
+              <a:ea typeface="Barlow" pitchFamily="34" charset="-122"/>
+              <a:cs typeface="Barlow" pitchFamily="34" charset="-120"/>
+            </a:endParaRPr>
+          </a:p>
+          <a:p>
+            <a:pPr marL="335280" indent="-335280" algn="l">
+              <a:lnSpc>
+                <a:spcPct val="133000"/>
+              </a:lnSpc>
+              <a:buSzPct val="100000"/>
+              <a:buFont typeface="Wingdings" panose="05000000000000000000" pitchFamily="2" charset="2"/>
+              <a:buChar char="q"/>
+            </a:pPr>
+            <a:r>
+              <a:rPr lang="hu-HU" sz="1650" dirty="0">
+                <a:solidFill>
+                  <a:srgbClr val="E5E0DF"/>
+                </a:solidFill>
+                <a:latin typeface="Segoe UI Semibold" panose="020B0702040204020203" pitchFamily="34" charset="0"/>
+              </a:rPr>
+              <a:t>Modern működésorientált dizájn</a:t>
+            </a:r>
           </a:p>
           <a:p>
             <a:pPr marL="335280" indent="-335280" algn="l">
@@ -1999,18 +2768,12 @@
               <a:buSzPct val="100000"/>
               <a:buChar char="•"/>
             </a:pPr>
-            <a:r>
-              <a:rPr lang="en-US" sz="1650" dirty="0">
-                <a:solidFill>
-                  <a:srgbClr val="E5E0DF"/>
-                </a:solidFill>
-                <a:latin typeface="Barlow" pitchFamily="34" charset="0"/>
-                <a:ea typeface="Barlow" pitchFamily="34" charset="-122"/>
-                <a:cs typeface="Barlow" pitchFamily="34" charset="-120"/>
-              </a:rPr>
-              <a:t>Szerzők követése</a:t>
-            </a:r>
-            <a:endParaRPr lang="en-US" sz="1650" dirty="0"/>
+            <a:endParaRPr lang="hu-HU" sz="1650" dirty="0">
+              <a:solidFill>
+                <a:srgbClr val="E5E0DF"/>
+              </a:solidFill>
+              <a:latin typeface="Segoe UI Semibold" panose="020B0702040204020203" pitchFamily="34" charset="0"/>
+            </a:endParaRPr>
           </a:p>
           <a:p>
             <a:pPr marL="335280" indent="-335280" algn="l">
@@ -2020,18 +2783,9 @@
               <a:buSzPct val="100000"/>
               <a:buChar char="•"/>
             </a:pPr>
-            <a:r>
-              <a:rPr lang="en-US" sz="1650" dirty="0">
-                <a:solidFill>
-                  <a:srgbClr val="E5E0DF"/>
-                </a:solidFill>
-                <a:latin typeface="Barlow" pitchFamily="34" charset="0"/>
-                <a:ea typeface="Barlow" pitchFamily="34" charset="-122"/>
-                <a:cs typeface="Barlow" pitchFamily="34" charset="-120"/>
-              </a:rPr>
-              <a:t>Cikkek könyvjelzőzése</a:t>
-            </a:r>
-            <a:endParaRPr lang="en-US" sz="1650" dirty="0"/>
+            <a:endParaRPr lang="en-US" sz="1650" dirty="0">
+              <a:latin typeface="Segoe UI Semibold" panose="020B0702040204020203" pitchFamily="34" charset="0"/>
+            </a:endParaRPr>
           </a:p>
         </p:txBody>
       </p:sp>
@@ -2100,6 +2854,133 @@
   <p:clrMapOvr>
     <a:masterClrMapping/>
   </p:clrMapOvr>
+  <mc:AlternateContent xmlns:mc="http://schemas.openxmlformats.org/markup-compatibility/2006">
+    <mc:Choice xmlns:p15="http://schemas.microsoft.com/office/powerpoint/2012/main" Requires="p15">
+      <p:transition xmlns:p14="http://schemas.microsoft.com/office/powerpoint/2010/main" spd="slow" p14:dur="2000">
+        <p15:prstTrans prst="fallOver"/>
+      </p:transition>
+    </mc:Choice>
+    <mc:Fallback>
+      <p:transition spd="slow">
+        <p:fade/>
+      </p:transition>
+    </mc:Fallback>
+  </mc:AlternateContent>
+  <p:timing>
+    <p:tnLst>
+      <p:par>
+        <p:cTn id="1" dur="indefinite" restart="never" nodeType="tmRoot">
+          <p:childTnLst>
+            <p:seq concurrent="1" nextAc="seek">
+              <p:cTn id="2" dur="indefinite" nodeType="mainSeq">
+                <p:childTnLst>
+                  <p:par>
+                    <p:cTn id="3" fill="hold">
+                      <p:stCondLst>
+                        <p:cond delay="indefinite"/>
+                        <p:cond evt="onBegin" delay="0">
+                          <p:tn val="2"/>
+                        </p:cond>
+                      </p:stCondLst>
+                      <p:childTnLst>
+                        <p:par>
+                          <p:cTn id="4" fill="hold">
+                            <p:stCondLst>
+                              <p:cond delay="0"/>
+                            </p:stCondLst>
+                            <p:childTnLst>
+                              <p:par>
+                                <p:cTn id="5" presetID="21" presetClass="entr" presetSubtype="1" fill="hold" nodeType="afterEffect">
+                                  <p:stCondLst>
+                                    <p:cond delay="0"/>
+                                  </p:stCondLst>
+                                  <p:childTnLst>
+                                    <p:set>
+                                      <p:cBhvr>
+                                        <p:cTn id="6" dur="1" fill="hold">
+                                          <p:stCondLst>
+                                            <p:cond delay="0"/>
+                                          </p:stCondLst>
+                                        </p:cTn>
+                                        <p:tgtEl>
+                                          <p:spTgt spid="7"/>
+                                        </p:tgtEl>
+                                        <p:attrNameLst>
+                                          <p:attrName>style.visibility</p:attrName>
+                                        </p:attrNameLst>
+                                      </p:cBhvr>
+                                      <p:to>
+                                        <p:strVal val="visible"/>
+                                      </p:to>
+                                    </p:set>
+                                    <p:animEffect transition="in" filter="wheel(1)">
+                                      <p:cBhvr>
+                                        <p:cTn id="7" dur="2000"/>
+                                        <p:tgtEl>
+                                          <p:spTgt spid="7"/>
+                                        </p:tgtEl>
+                                      </p:cBhvr>
+                                    </p:animEffect>
+                                  </p:childTnLst>
+                                </p:cTn>
+                              </p:par>
+                            </p:childTnLst>
+                          </p:cTn>
+                        </p:par>
+                        <p:par>
+                          <p:cTn id="8" fill="hold">
+                            <p:stCondLst>
+                              <p:cond delay="2000"/>
+                            </p:stCondLst>
+                            <p:childTnLst>
+                              <p:par>
+                                <p:cTn id="9" presetID="8" presetClass="emph" presetSubtype="0" fill="hold" nodeType="afterEffect">
+                                  <p:stCondLst>
+                                    <p:cond delay="0"/>
+                                  </p:stCondLst>
+                                  <p:childTnLst>
+                                    <p:animRot by="21600000">
+                                      <p:cBhvr>
+                                        <p:cTn id="10" dur="2000" fill="hold"/>
+                                        <p:tgtEl>
+                                          <p:spTgt spid="7"/>
+                                        </p:tgtEl>
+                                        <p:attrNameLst>
+                                          <p:attrName>r</p:attrName>
+                                        </p:attrNameLst>
+                                      </p:cBhvr>
+                                    </p:animRot>
+                                  </p:childTnLst>
+                                </p:cTn>
+                              </p:par>
+                            </p:childTnLst>
+                          </p:cTn>
+                        </p:par>
+                      </p:childTnLst>
+                    </p:cTn>
+                  </p:par>
+                </p:childTnLst>
+              </p:cTn>
+              <p:prevCondLst>
+                <p:cond evt="onPrev" delay="0">
+                  <p:tgtEl>
+                    <p:sldTgt/>
+                  </p:tgtEl>
+                </p:cond>
+              </p:prevCondLst>
+              <p:nextCondLst>
+                <p:cond evt="onNext" delay="0">
+                  <p:tgtEl>
+                    <p:sldTgt/>
+                  </p:tgtEl>
+                </p:cond>
+              </p:nextCondLst>
+            </p:seq>
+          </p:childTnLst>
+        </p:cTn>
+      </p:par>
+    </p:tnLst>
+  </p:timing>
 </p:sld>
 </file>
 
@@ -2152,13 +3033,15 @@
                 <a:solidFill>
                   <a:srgbClr val="FFFFFF"/>
                 </a:solidFill>
-                <a:latin typeface="Barlow Medium" pitchFamily="34" charset="0"/>
+                <a:latin typeface="Segoe UI Semibold" panose="020B0702040204020203" pitchFamily="34" charset="0"/>
                 <a:ea typeface="Barlow Medium" pitchFamily="34" charset="-122"/>
                 <a:cs typeface="Barlow Medium" pitchFamily="34" charset="-120"/>
               </a:rPr>
               <a:t>Célközönség</a:t>
             </a:r>
-            <a:endParaRPr lang="en-US" sz="3650" dirty="0"/>
+            <a:endParaRPr lang="en-US" sz="3650" dirty="0">
+              <a:latin typeface="Segoe UI Semibold" panose="020B0702040204020203" pitchFamily="34" charset="0"/>
+            </a:endParaRPr>
           </a:p>
         </p:txBody>
       </p:sp>
@@ -2221,13 +3104,15 @@
                 <a:solidFill>
                   <a:srgbClr val="E5E0DF"/>
                 </a:solidFill>
-                <a:latin typeface="Barlow Medium" pitchFamily="34" charset="0"/>
+                <a:latin typeface="Segoe UI Semibold" panose="020B0702040204020203" pitchFamily="34" charset="0"/>
                 <a:ea typeface="Barlow Medium" pitchFamily="34" charset="-122"/>
                 <a:cs typeface="Barlow Medium" pitchFamily="34" charset="-120"/>
               </a:rPr>
               <a:t>Olvasók</a:t>
             </a:r>
-            <a:endParaRPr lang="en-US" sz="1800" dirty="0"/>
+            <a:endParaRPr lang="en-US" sz="1800" dirty="0">
+              <a:latin typeface="Segoe UI Semibold" panose="020B0702040204020203" pitchFamily="34" charset="0"/>
+            </a:endParaRPr>
           </a:p>
         </p:txBody>
       </p:sp>
@@ -2265,13 +3150,15 @@
                 <a:solidFill>
                   <a:srgbClr val="E5E0DF"/>
                 </a:solidFill>
-                <a:latin typeface="Barlow" pitchFamily="34" charset="0"/>
+                <a:latin typeface="Segoe UI Semibold" panose="020B0702040204020203" pitchFamily="34" charset="0"/>
                 <a:ea typeface="Barlow" pitchFamily="34" charset="-122"/>
                 <a:cs typeface="Barlow" pitchFamily="34" charset="-120"/>
               </a:rPr>
               <a:t>Kultúra, film, filozófia és társadalomelméleti témák iránt érdeklődők</a:t>
             </a:r>
-            <a:endParaRPr lang="en-US" sz="1650" dirty="0"/>
+            <a:endParaRPr lang="en-US" sz="1650" dirty="0">
+              <a:latin typeface="Segoe UI Semibold" panose="020B0702040204020203" pitchFamily="34" charset="0"/>
+            </a:endParaRPr>
           </a:p>
         </p:txBody>
       </p:sp>
@@ -2283,7 +3170,7 @@
         </p:nvSpPr>
         <p:spPr>
           <a:xfrm>
-            <a:off x="4378513" y="2995414"/>
+            <a:off x="7432432" y="2995414"/>
             <a:ext cx="3434570" cy="1869380"/>
           </a:xfrm>
           <a:prstGeom prst="roundRect">
@@ -2310,7 +3197,7 @@
         </p:nvSpPr>
         <p:spPr>
           <a:xfrm>
-            <a:off x="4600956" y="3217863"/>
+            <a:off x="7654875" y="3279331"/>
             <a:ext cx="2989684" cy="291405"/>
           </a:xfrm>
           <a:prstGeom prst="rect">
@@ -2330,17 +3217,17 @@
               <a:buNone/>
             </a:pPr>
             <a:r>
-              <a:rPr lang="en-US" sz="1800" dirty="0">
+              <a:rPr lang="hu-HU" dirty="0">
                 <a:solidFill>
                   <a:srgbClr val="E5E0DF"/>
                 </a:solidFill>
-                <a:latin typeface="Barlow Medium" pitchFamily="34" charset="0"/>
-                <a:ea typeface="Barlow Medium" pitchFamily="34" charset="-122"/>
-                <a:cs typeface="Barlow Medium" pitchFamily="34" charset="-120"/>
+                <a:latin typeface="Segoe UI Semibold" panose="020B0702040204020203" pitchFamily="34" charset="0"/>
               </a:rPr>
               <a:t>Szerzők</a:t>
             </a:r>
-            <a:endParaRPr lang="en-US" sz="1800" dirty="0"/>
+            <a:endParaRPr lang="en-US" sz="1800" dirty="0">
+              <a:latin typeface="Segoe UI Semibold" panose="020B0702040204020203" pitchFamily="34" charset="0"/>
+            </a:endParaRPr>
           </a:p>
         </p:txBody>
       </p:sp>
@@ -2352,7 +3239,7 @@
         </p:nvSpPr>
         <p:spPr>
           <a:xfrm>
-            <a:off x="4600956" y="3635077"/>
+            <a:off x="7654875" y="3696545"/>
             <a:ext cx="2989684" cy="671513"/>
           </a:xfrm>
           <a:prstGeom prst="rect">
@@ -2378,124 +3265,15 @@
                 <a:solidFill>
                   <a:srgbClr val="E5E0DF"/>
                 </a:solidFill>
-                <a:latin typeface="Barlow" pitchFamily="34" charset="0"/>
+                <a:latin typeface="Segoe UI Semibold" panose="020B0702040204020203" pitchFamily="34" charset="0"/>
                 <a:ea typeface="Barlow" pitchFamily="34" charset="-122"/>
                 <a:cs typeface="Barlow" pitchFamily="34" charset="-120"/>
               </a:rPr>
               <a:t>Publikációs lehetőséget kereső alkotók</a:t>
             </a:r>
-            <a:endParaRPr lang="en-US" sz="1650" dirty="0"/>
-          </a:p>
-        </p:txBody>
-      </p:sp>
-      <p:sp>
-        <p:nvSpPr>
-          <p:cNvPr id="9" name="Shape 7"/>
-          <p:cNvSpPr/>
-          <p:nvPr/>
-        </p:nvSpPr>
-        <p:spPr>
-          <a:xfrm>
-            <a:off x="8022826" y="2995414"/>
-            <a:ext cx="3434669" cy="1869380"/>
-          </a:xfrm>
-          <a:prstGeom prst="roundRect">
-            <a:avLst>
-              <a:gd name="adj" fmla="val 4714"/>
-            </a:avLst>
-          </a:prstGeom>
-          <a:solidFill>
-            <a:srgbClr val="790709"/>
-          </a:solidFill>
-          <a:ln w="12700">
-            <a:solidFill>
-              <a:srgbClr val="922022"/>
-            </a:solidFill>
-            <a:prstDash val="solid"/>
-          </a:ln>
-        </p:spPr>
-      </p:sp>
-      <p:sp>
-        <p:nvSpPr>
-          <p:cNvPr id="10" name="Text 8"/>
-          <p:cNvSpPr/>
-          <p:nvPr/>
-        </p:nvSpPr>
-        <p:spPr>
-          <a:xfrm>
-            <a:off x="8245269" y="3217863"/>
-            <a:ext cx="2989783" cy="291405"/>
-          </a:xfrm>
-          <a:prstGeom prst="rect">
-            <a:avLst/>
-          </a:prstGeom>
-          <a:noFill/>
-          <a:ln/>
-        </p:spPr>
-        <p:txBody>
-          <a:bodyPr wrap="none" lIns="0" tIns="0" rIns="0" bIns="0" rtlCol="0" anchor="t"/>
-          <a:lstStyle/>
-          <a:p>
-            <a:pPr marL="0" indent="0" algn="l">
-              <a:lnSpc>
-                <a:spcPct val="104000"/>
-              </a:lnSpc>
-              <a:buNone/>
-            </a:pPr>
-            <a:r>
-              <a:rPr lang="en-US" sz="1800" dirty="0">
-                <a:solidFill>
-                  <a:srgbClr val="E5E0DF"/>
-                </a:solidFill>
-                <a:latin typeface="Barlow Medium" pitchFamily="34" charset="0"/>
-                <a:ea typeface="Barlow Medium" pitchFamily="34" charset="-122"/>
-                <a:cs typeface="Barlow Medium" pitchFamily="34" charset="-120"/>
-              </a:rPr>
-              <a:t>Szerkesztők</a:t>
-            </a:r>
-            <a:endParaRPr lang="en-US" sz="1800" dirty="0"/>
-          </a:p>
-        </p:txBody>
-      </p:sp>
-      <p:sp>
-        <p:nvSpPr>
-          <p:cNvPr id="11" name="Text 9"/>
-          <p:cNvSpPr/>
-          <p:nvPr/>
-        </p:nvSpPr>
-        <p:spPr>
-          <a:xfrm>
-            <a:off x="8245269" y="3635077"/>
-            <a:ext cx="2989783" cy="335756"/>
-          </a:xfrm>
-          <a:prstGeom prst="rect">
-            <a:avLst/>
-          </a:prstGeom>
-          <a:noFill/>
-          <a:ln/>
-        </p:spPr>
-        <p:txBody>
-          <a:bodyPr wrap="none" lIns="0" tIns="0" rIns="0" bIns="0" rtlCol="0" anchor="t"/>
-          <a:lstStyle/>
-          <a:p>
-            <a:pPr marL="0" indent="0" algn="l">
-              <a:lnSpc>
-                <a:spcPct val="133000"/>
-              </a:lnSpc>
-              <a:buNone/>
-            </a:pPr>
-            <a:r>
-              <a:rPr lang="en-US" sz="1650" dirty="0">
-                <a:solidFill>
-                  <a:srgbClr val="E5E0DF"/>
-                </a:solidFill>
-                <a:latin typeface="Barlow" pitchFamily="34" charset="0"/>
-                <a:ea typeface="Barlow" pitchFamily="34" charset="-122"/>
-                <a:cs typeface="Barlow" pitchFamily="34" charset="-120"/>
-              </a:rPr>
-              <a:t>Tartalom kurálása és kezelése</a:t>
-            </a:r>
-            <a:endParaRPr lang="en-US" sz="1650" dirty="0"/>
+            <a:endParaRPr lang="en-US" sz="1650" dirty="0">
+              <a:latin typeface="Segoe UI Semibold" panose="020B0702040204020203" pitchFamily="34" charset="0"/>
+            </a:endParaRPr>
           </a:p>
         </p:txBody>
       </p:sp>
@@ -2564,6 +3342,181 @@
   <p:clrMapOvr>
     <a:masterClrMapping/>
   </p:clrMapOvr>
+  <mc:AlternateContent xmlns:mc="http://schemas.openxmlformats.org/markup-compatibility/2006">
+    <mc:Choice xmlns:p15="http://schemas.microsoft.com/office/powerpoint/2012/main" Requires="p15">
+      <p:transition xmlns:p14="http://schemas.microsoft.com/office/powerpoint/2010/main" spd="slow" p14:dur="2000">
+        <p15:prstTrans prst="fallOver"/>
+      </p:transition>
+    </mc:Choice>
+    <mc:Fallback>
+      <p:transition spd="slow">
+        <p:fade/>
+      </p:transition>
+    </mc:Fallback>
+  </mc:AlternateContent>
+  <p:timing>
+    <p:tnLst>
+      <p:par>
+        <p:cTn id="1" dur="indefinite" restart="never" nodeType="tmRoot">
+          <p:childTnLst>
+            <p:seq concurrent="1" nextAc="seek">
+              <p:cTn id="2" dur="indefinite" nodeType="mainSeq">
+                <p:childTnLst>
+                  <p:par>
+                    <p:cTn id="3" fill="hold">
+                      <p:stCondLst>
+                        <p:cond delay="indefinite"/>
+                        <p:cond evt="onBegin" delay="0">
+                          <p:tn val="2"/>
+                        </p:cond>
+                      </p:stCondLst>
+                      <p:childTnLst>
+                        <p:par>
+                          <p:cTn id="4" fill="hold">
+                            <p:stCondLst>
+                              <p:cond delay="0"/>
+                            </p:stCondLst>
+                            <p:childTnLst>
+                              <p:par>
+                                <p:cTn id="5" presetID="42" presetClass="entr" presetSubtype="0" fill="hold" nodeType="afterEffect">
+                                  <p:stCondLst>
+                                    <p:cond delay="0"/>
+                                  </p:stCondLst>
+                                  <p:childTnLst>
+                                    <p:set>
+                                      <p:cBhvr>
+                                        <p:cTn id="6" dur="1" fill="hold">
+                                          <p:stCondLst>
+                                            <p:cond delay="0"/>
+                                          </p:stCondLst>
+                                        </p:cTn>
+                                        <p:tgtEl>
+                                          <p:spTgt spid="14"/>
+                                        </p:tgtEl>
+                                        <p:attrNameLst>
+                                          <p:attrName>style.visibility</p:attrName>
+                                        </p:attrNameLst>
+                                      </p:cBhvr>
+                                      <p:to>
+                                        <p:strVal val="visible"/>
+                                      </p:to>
+                                    </p:set>
+                                    <p:animEffect transition="in" filter="fade">
+                                      <p:cBhvr>
+                                        <p:cTn id="7" dur="1000"/>
+                                        <p:tgtEl>
+                                          <p:spTgt spid="14"/>
+                                        </p:tgtEl>
+                                      </p:cBhvr>
+                                    </p:animEffect>
+                                    <p:anim calcmode="lin" valueType="num">
+                                      <p:cBhvr>
+                                        <p:cTn id="8" dur="1000" fill="hold"/>
+                                        <p:tgtEl>
+                                          <p:spTgt spid="14"/>
+                                        </p:tgtEl>
+                                        <p:attrNameLst>
+                                          <p:attrName>ppt_x</p:attrName>
+                                        </p:attrNameLst>
+                                      </p:cBhvr>
+                                      <p:tavLst>
+                                        <p:tav tm="0">
+                                          <p:val>
+                                            <p:strVal val="#ppt_x"/>
+                                          </p:val>
+                                        </p:tav>
+                                        <p:tav tm="100000">
+                                          <p:val>
+                                            <p:strVal val="#ppt_x"/>
+                                          </p:val>
+                                        </p:tav>
+                                      </p:tavLst>
+                                    </p:anim>
+                                    <p:anim calcmode="lin" valueType="num">
+                                      <p:cBhvr>
+                                        <p:cTn id="9" dur="1000" fill="hold"/>
+                                        <p:tgtEl>
+                                          <p:spTgt spid="14"/>
+                                        </p:tgtEl>
+                                        <p:attrNameLst>
+                                          <p:attrName>ppt_y</p:attrName>
+                                        </p:attrNameLst>
+                                      </p:cBhvr>
+                                      <p:tavLst>
+                                        <p:tav tm="0">
+                                          <p:val>
+                                            <p:strVal val="#ppt_y+.1"/>
+                                          </p:val>
+                                        </p:tav>
+                                        <p:tav tm="100000">
+                                          <p:val>
+                                            <p:strVal val="#ppt_y"/>
+                                          </p:val>
+                                        </p:tav>
+                                      </p:tavLst>
+                                    </p:anim>
+                                  </p:childTnLst>
+                                </p:cTn>
+                              </p:par>
+                            </p:childTnLst>
+                          </p:cTn>
+                        </p:par>
+                        <p:par>
+                          <p:cTn id="10" fill="hold">
+                            <p:stCondLst>
+                              <p:cond delay="1000"/>
+                            </p:stCondLst>
+                            <p:childTnLst>
+                              <p:par>
+                                <p:cTn id="11" presetID="50" presetClass="path" presetSubtype="0" accel="50000" decel="50000" fill="hold" nodeType="afterEffect">
+                                  <p:stCondLst>
+                                    <p:cond delay="0"/>
+                                  </p:stCondLst>
+                                  <p:childTnLst>
+                                    <p:animMotion origin="layout" path="M -2.08333E-6 -4.81481E-6 L -0.22969 -4.81481E-6 C -0.33268 -4.81481E-6 -0.45924 0.13172 -0.45924 0.23866 L -0.45924 0.47755 " pathEditMode="relative" rAng="0" ptsTypes="AAAA">
+                                      <p:cBhvr>
+                                        <p:cTn id="12" dur="500" fill="hold"/>
+                                        <p:tgtEl>
+                                          <p:spTgt spid="14"/>
+                                        </p:tgtEl>
+                                        <p:attrNameLst>
+                                          <p:attrName>ppt_x</p:attrName>
+                                          <p:attrName>ppt_y</p:attrName>
+                                        </p:attrNameLst>
+                                      </p:cBhvr>
+                                      <p:rCtr x="-22969" y="23866"/>
+                                    </p:animMotion>
+                                  </p:childTnLst>
+                                </p:cTn>
+                              </p:par>
+                            </p:childTnLst>
+                          </p:cTn>
+                        </p:par>
+                      </p:childTnLst>
+                    </p:cTn>
+                  </p:par>
+                </p:childTnLst>
+              </p:cTn>
+              <p:prevCondLst>
+                <p:cond evt="onPrev" delay="0">
+                  <p:tgtEl>
+                    <p:sldTgt/>
+                  </p:tgtEl>
+                </p:cond>
+              </p:prevCondLst>
+              <p:nextCondLst>
+                <p:cond evt="onNext" delay="0">
+                  <p:tgtEl>
+                    <p:sldTgt/>
+                  </p:tgtEl>
+                </p:cond>
+              </p:nextCondLst>
+            </p:seq>
+          </p:childTnLst>
+        </p:cTn>
+      </p:par>
+    </p:tnLst>
+  </p:timing>
 </p:sld>
 </file>
 
@@ -2616,13 +3569,15 @@
                 <a:solidFill>
                   <a:srgbClr val="FFFFFF"/>
                 </a:solidFill>
-                <a:latin typeface="Barlow Medium" pitchFamily="34" charset="0"/>
+                <a:latin typeface="Segoe UI Semibold" panose="020B0702040204020203" pitchFamily="34" charset="0"/>
                 <a:ea typeface="Barlow Medium" pitchFamily="34" charset="-122"/>
                 <a:cs typeface="Barlow Medium" pitchFamily="34" charset="-120"/>
               </a:rPr>
               <a:t>Fő funkciók</a:t>
             </a:r>
-            <a:endParaRPr lang="en-US" sz="3650" dirty="0"/>
+            <a:endParaRPr lang="en-US" sz="3650" dirty="0">
+              <a:latin typeface="Segoe UI Semibold" panose="020B0702040204020203" pitchFamily="34" charset="0"/>
+            </a:endParaRPr>
           </a:p>
         </p:txBody>
       </p:sp>
@@ -2658,13 +3613,15 @@
                 <a:solidFill>
                   <a:srgbClr val="E5E0DF"/>
                 </a:solidFill>
-                <a:latin typeface="Barlow" pitchFamily="34" charset="0"/>
+                <a:latin typeface="Segoe UI Semibold" panose="020B0702040204020203" pitchFamily="34" charset="0"/>
                 <a:ea typeface="Barlow" pitchFamily="34" charset="-122"/>
                 <a:cs typeface="Barlow" pitchFamily="34" charset="-120"/>
               </a:rPr>
               <a:t>01</a:t>
             </a:r>
-            <a:endParaRPr lang="en-US" sz="1650" dirty="0"/>
+            <a:endParaRPr lang="en-US" sz="1650" dirty="0">
+              <a:latin typeface="Segoe UI Semibold" panose="020B0702040204020203" pitchFamily="34" charset="0"/>
+            </a:endParaRPr>
           </a:p>
         </p:txBody>
       </p:sp>
@@ -2720,13 +3677,15 @@
                 <a:solidFill>
                   <a:srgbClr val="E5E0DF"/>
                 </a:solidFill>
-                <a:latin typeface="Barlow Medium" pitchFamily="34" charset="0"/>
+                <a:latin typeface="Segoe UI Semibold" panose="020B0702040204020203" pitchFamily="34" charset="0"/>
                 <a:ea typeface="Barlow Medium" pitchFamily="34" charset="-122"/>
                 <a:cs typeface="Barlow Medium" pitchFamily="34" charset="-120"/>
               </a:rPr>
               <a:t>Főoldal</a:t>
             </a:r>
-            <a:endParaRPr lang="en-US" sz="1800" dirty="0"/>
+            <a:endParaRPr lang="en-US" sz="1800" dirty="0">
+              <a:latin typeface="Segoe UI Semibold" panose="020B0702040204020203" pitchFamily="34" charset="0"/>
+            </a:endParaRPr>
           </a:p>
         </p:txBody>
       </p:sp>
@@ -2738,8 +3697,8 @@
         </p:nvSpPr>
         <p:spPr>
           <a:xfrm>
-            <a:off x="734200" y="3332262"/>
-            <a:ext cx="3434570" cy="335756"/>
+            <a:off x="734200" y="3281427"/>
+            <a:ext cx="3434570" cy="633908"/>
           </a:xfrm>
           <a:prstGeom prst="rect">
             <a:avLst/>
@@ -2758,17 +3717,72 @@
               <a:buNone/>
             </a:pPr>
             <a:r>
+              <a:rPr lang="en-US" sz="1650" dirty="0" err="1">
+                <a:solidFill>
+                  <a:srgbClr val="E5E0DF"/>
+                </a:solidFill>
+                <a:latin typeface="Segoe UI Semibold" panose="020B0702040204020203" pitchFamily="34" charset="0"/>
+                <a:ea typeface="Barlow" pitchFamily="34" charset="-122"/>
+                <a:cs typeface="Barlow" pitchFamily="34" charset="-120"/>
+              </a:rPr>
+              <a:t>Legújabb</a:t>
+            </a:r>
+            <a:r>
               <a:rPr lang="en-US" sz="1650" dirty="0">
                 <a:solidFill>
                   <a:srgbClr val="E5E0DF"/>
                 </a:solidFill>
-                <a:latin typeface="Barlow" pitchFamily="34" charset="0"/>
+                <a:latin typeface="Segoe UI Semibold" panose="020B0702040204020203" pitchFamily="34" charset="0"/>
                 <a:ea typeface="Barlow" pitchFamily="34" charset="-122"/>
                 <a:cs typeface="Barlow" pitchFamily="34" charset="-120"/>
               </a:rPr>
-              <a:t>Legújabb publikációk</a:t>
+              <a:t> </a:t>
             </a:r>
-            <a:endParaRPr lang="en-US" sz="1650" dirty="0"/>
+            <a:r>
+              <a:rPr lang="en-US" sz="1650" dirty="0" err="1">
+                <a:solidFill>
+                  <a:srgbClr val="E5E0DF"/>
+                </a:solidFill>
+                <a:latin typeface="Segoe UI Semibold" panose="020B0702040204020203" pitchFamily="34" charset="0"/>
+                <a:ea typeface="Barlow" pitchFamily="34" charset="-122"/>
+                <a:cs typeface="Barlow" pitchFamily="34" charset="-120"/>
+              </a:rPr>
+              <a:t>publikációk</a:t>
+            </a:r>
+            <a:endParaRPr lang="hu-HU" sz="1650" dirty="0">
+              <a:solidFill>
+                <a:srgbClr val="E5E0DF"/>
+              </a:solidFill>
+              <a:latin typeface="Segoe UI Semibold" panose="020B0702040204020203" pitchFamily="34" charset="0"/>
+              <a:ea typeface="Barlow" pitchFamily="34" charset="-122"/>
+              <a:cs typeface="Barlow" pitchFamily="34" charset="-120"/>
+            </a:endParaRPr>
+          </a:p>
+          <a:p>
+            <a:pPr>
+              <a:lnSpc>
+                <a:spcPct val="133000"/>
+              </a:lnSpc>
+            </a:pPr>
+            <a:r>
+              <a:rPr lang="hu-HU" sz="1650" dirty="0">
+                <a:solidFill>
+                  <a:srgbClr val="E5E0DF"/>
+                </a:solidFill>
+                <a:latin typeface="Segoe UI Semibold" panose="020B0702040204020203" pitchFamily="34" charset="0"/>
+                <a:ea typeface="Barlow" pitchFamily="34" charset="-122"/>
+                <a:cs typeface="Barlow" pitchFamily="34" charset="-120"/>
+              </a:rPr>
+              <a:t>Alapvető menüpontok</a:t>
+            </a:r>
+            <a:endParaRPr lang="en-US" sz="1650" dirty="0">
+              <a:solidFill>
+                <a:srgbClr val="E5E0DF"/>
+              </a:solidFill>
+              <a:latin typeface="Segoe UI Semibold" panose="020B0702040204020203" pitchFamily="34" charset="0"/>
+              <a:ea typeface="Barlow" pitchFamily="34" charset="-122"/>
+              <a:cs typeface="Barlow" pitchFamily="34" charset="-120"/>
+            </a:endParaRPr>
           </a:p>
         </p:txBody>
       </p:sp>
@@ -2804,13 +3818,15 @@
                 <a:solidFill>
                   <a:srgbClr val="E5E0DF"/>
                 </a:solidFill>
-                <a:latin typeface="Barlow" pitchFamily="34" charset="0"/>
+                <a:latin typeface="Segoe UI Semibold" panose="020B0702040204020203" pitchFamily="34" charset="0"/>
                 <a:ea typeface="Barlow" pitchFamily="34" charset="-122"/>
                 <a:cs typeface="Barlow" pitchFamily="34" charset="-120"/>
               </a:rPr>
               <a:t>02</a:t>
             </a:r>
-            <a:endParaRPr lang="en-US" sz="1650" dirty="0"/>
+            <a:endParaRPr lang="en-US" sz="1650" dirty="0">
+              <a:latin typeface="Segoe UI Semibold" panose="020B0702040204020203" pitchFamily="34" charset="0"/>
+            </a:endParaRPr>
           </a:p>
         </p:txBody>
       </p:sp>
@@ -2866,13 +3882,15 @@
                 <a:solidFill>
                   <a:srgbClr val="E5E0DF"/>
                 </a:solidFill>
-                <a:latin typeface="Barlow Medium" pitchFamily="34" charset="0"/>
+                <a:latin typeface="Segoe UI Semibold" panose="020B0702040204020203" pitchFamily="34" charset="0"/>
                 <a:ea typeface="Barlow Medium" pitchFamily="34" charset="-122"/>
                 <a:cs typeface="Barlow Medium" pitchFamily="34" charset="-120"/>
               </a:rPr>
               <a:t>Böngészés</a:t>
             </a:r>
-            <a:endParaRPr lang="en-US" sz="1800" dirty="0"/>
+            <a:endParaRPr lang="en-US" sz="1800" dirty="0">
+              <a:latin typeface="Segoe UI Semibold" panose="020B0702040204020203" pitchFamily="34" charset="0"/>
+            </a:endParaRPr>
           </a:p>
         </p:txBody>
       </p:sp>
@@ -2908,13 +3926,15 @@
                 <a:solidFill>
                   <a:srgbClr val="E5E0DF"/>
                 </a:solidFill>
-                <a:latin typeface="Barlow" pitchFamily="34" charset="0"/>
+                <a:latin typeface="Segoe UI Semibold" panose="020B0702040204020203" pitchFamily="34" charset="0"/>
                 <a:ea typeface="Barlow" pitchFamily="34" charset="-122"/>
                 <a:cs typeface="Barlow" pitchFamily="34" charset="-120"/>
               </a:rPr>
               <a:t>Kategória alapú navigáció</a:t>
             </a:r>
-            <a:endParaRPr lang="en-US" sz="1650" dirty="0"/>
+            <a:endParaRPr lang="en-US" sz="1650" dirty="0">
+              <a:latin typeface="Segoe UI Semibold" panose="020B0702040204020203" pitchFamily="34" charset="0"/>
+            </a:endParaRPr>
           </a:p>
         </p:txBody>
       </p:sp>
@@ -2950,13 +3970,15 @@
                 <a:solidFill>
                   <a:srgbClr val="E5E0DF"/>
                 </a:solidFill>
-                <a:latin typeface="Barlow" pitchFamily="34" charset="0"/>
+                <a:latin typeface="Segoe UI Semibold" panose="020B0702040204020203" pitchFamily="34" charset="0"/>
                 <a:ea typeface="Barlow" pitchFamily="34" charset="-122"/>
                 <a:cs typeface="Barlow" pitchFamily="34" charset="-120"/>
               </a:rPr>
               <a:t>03</a:t>
             </a:r>
-            <a:endParaRPr lang="en-US" sz="1650" dirty="0"/>
+            <a:endParaRPr lang="en-US" sz="1650" dirty="0">
+              <a:latin typeface="Segoe UI Semibold" panose="020B0702040204020203" pitchFamily="34" charset="0"/>
+            </a:endParaRPr>
           </a:p>
         </p:txBody>
       </p:sp>
@@ -3012,13 +4034,15 @@
                 <a:solidFill>
                   <a:srgbClr val="E5E0DF"/>
                 </a:solidFill>
-                <a:latin typeface="Barlow Medium" pitchFamily="34" charset="0"/>
+                <a:latin typeface="Segoe UI Semibold" panose="020B0702040204020203" pitchFamily="34" charset="0"/>
                 <a:ea typeface="Barlow Medium" pitchFamily="34" charset="-122"/>
                 <a:cs typeface="Barlow Medium" pitchFamily="34" charset="-120"/>
               </a:rPr>
               <a:t>Profilok</a:t>
             </a:r>
-            <a:endParaRPr lang="en-US" sz="1800" dirty="0"/>
+            <a:endParaRPr lang="en-US" sz="1800" dirty="0">
+              <a:latin typeface="Segoe UI Semibold" panose="020B0702040204020203" pitchFamily="34" charset="0"/>
+            </a:endParaRPr>
           </a:p>
         </p:txBody>
       </p:sp>
@@ -3054,13 +4078,15 @@
                 <a:solidFill>
                   <a:srgbClr val="E5E0DF"/>
                 </a:solidFill>
-                <a:latin typeface="Barlow" pitchFamily="34" charset="0"/>
+                <a:latin typeface="Segoe UI Semibold" panose="020B0702040204020203" pitchFamily="34" charset="0"/>
                 <a:ea typeface="Barlow" pitchFamily="34" charset="-122"/>
                 <a:cs typeface="Barlow" pitchFamily="34" charset="-120"/>
               </a:rPr>
               <a:t>Szerzői és felhasználói oldalak</a:t>
             </a:r>
-            <a:endParaRPr lang="en-US" sz="1650" dirty="0"/>
+            <a:endParaRPr lang="en-US" sz="1650" dirty="0">
+              <a:latin typeface="Segoe UI Semibold" panose="020B0702040204020203" pitchFamily="34" charset="0"/>
+            </a:endParaRPr>
           </a:p>
         </p:txBody>
       </p:sp>
@@ -3096,13 +4122,15 @@
                 <a:solidFill>
                   <a:srgbClr val="E5E0DF"/>
                 </a:solidFill>
-                <a:latin typeface="Barlow" pitchFamily="34" charset="0"/>
+                <a:latin typeface="Segoe UI Semibold" panose="020B0702040204020203" pitchFamily="34" charset="0"/>
                 <a:ea typeface="Barlow" pitchFamily="34" charset="-122"/>
                 <a:cs typeface="Barlow" pitchFamily="34" charset="-120"/>
               </a:rPr>
               <a:t>04</a:t>
             </a:r>
-            <a:endParaRPr lang="en-US" sz="1650" dirty="0"/>
+            <a:endParaRPr lang="en-US" sz="1650" dirty="0">
+              <a:latin typeface="Segoe UI Semibold" panose="020B0702040204020203" pitchFamily="34" charset="0"/>
+            </a:endParaRPr>
           </a:p>
         </p:txBody>
       </p:sp>
@@ -3158,13 +4186,15 @@
                 <a:solidFill>
                   <a:srgbClr val="E5E0DF"/>
                 </a:solidFill>
-                <a:latin typeface="Barlow Medium" pitchFamily="34" charset="0"/>
+                <a:latin typeface="Segoe UI Semibold" panose="020B0702040204020203" pitchFamily="34" charset="0"/>
                 <a:ea typeface="Barlow Medium" pitchFamily="34" charset="-122"/>
                 <a:cs typeface="Barlow Medium" pitchFamily="34" charset="-120"/>
               </a:rPr>
               <a:t>Könyvjelzők</a:t>
             </a:r>
-            <a:endParaRPr lang="en-US" sz="1800" dirty="0"/>
+            <a:endParaRPr lang="en-US" sz="1800" dirty="0">
+              <a:latin typeface="Segoe UI Semibold" panose="020B0702040204020203" pitchFamily="34" charset="0"/>
+            </a:endParaRPr>
           </a:p>
         </p:txBody>
       </p:sp>
@@ -3200,13 +4230,15 @@
                 <a:solidFill>
                   <a:srgbClr val="E5E0DF"/>
                 </a:solidFill>
-                <a:latin typeface="Barlow" pitchFamily="34" charset="0"/>
+                <a:latin typeface="Segoe UI Semibold" panose="020B0702040204020203" pitchFamily="34" charset="0"/>
                 <a:ea typeface="Barlow" pitchFamily="34" charset="-122"/>
                 <a:cs typeface="Barlow" pitchFamily="34" charset="-120"/>
               </a:rPr>
               <a:t>Mentés és szerzőkövetés</a:t>
             </a:r>
-            <a:endParaRPr lang="en-US" sz="1650" dirty="0"/>
+            <a:endParaRPr lang="en-US" sz="1650" dirty="0">
+              <a:latin typeface="Segoe UI Semibold" panose="020B0702040204020203" pitchFamily="34" charset="0"/>
+            </a:endParaRPr>
           </a:p>
         </p:txBody>
       </p:sp>
@@ -3242,13 +4274,15 @@
                 <a:solidFill>
                   <a:srgbClr val="E5E0DF"/>
                 </a:solidFill>
-                <a:latin typeface="Barlow" pitchFamily="34" charset="0"/>
+                <a:latin typeface="Segoe UI Semibold" panose="020B0702040204020203" pitchFamily="34" charset="0"/>
                 <a:ea typeface="Barlow" pitchFamily="34" charset="-122"/>
                 <a:cs typeface="Barlow" pitchFamily="34" charset="-120"/>
               </a:rPr>
               <a:t>05</a:t>
             </a:r>
-            <a:endParaRPr lang="en-US" sz="1650" dirty="0"/>
+            <a:endParaRPr lang="en-US" sz="1650" dirty="0">
+              <a:latin typeface="Segoe UI Semibold" panose="020B0702040204020203" pitchFamily="34" charset="0"/>
+            </a:endParaRPr>
           </a:p>
         </p:txBody>
       </p:sp>
@@ -3304,13 +4338,26 @@
                 <a:solidFill>
                   <a:srgbClr val="E5E0DF"/>
                 </a:solidFill>
-                <a:latin typeface="Barlow Medium" pitchFamily="34" charset="0"/>
+                <a:latin typeface="Segoe UI Semibold" panose="020B0702040204020203" pitchFamily="34" charset="0"/>
                 <a:ea typeface="Barlow Medium" pitchFamily="34" charset="-122"/>
                 <a:cs typeface="Barlow Medium" pitchFamily="34" charset="-120"/>
               </a:rPr>
               <a:t>Admin</a:t>
             </a:r>
-            <a:endParaRPr lang="en-US" sz="1800" dirty="0"/>
+            <a:r>
+              <a:rPr lang="hu-HU" sz="1800" dirty="0">
+                <a:solidFill>
+                  <a:srgbClr val="E5E0DF"/>
+                </a:solidFill>
+                <a:latin typeface="Segoe UI Semibold" panose="020B0702040204020203" pitchFamily="34" charset="0"/>
+                <a:ea typeface="Barlow Medium" pitchFamily="34" charset="-122"/>
+                <a:cs typeface="Barlow Medium" pitchFamily="34" charset="-120"/>
+              </a:rPr>
+              <a:t> (Szerkesztők)</a:t>
+            </a:r>
+            <a:endParaRPr lang="en-US" sz="1800" dirty="0">
+              <a:latin typeface="Segoe UI Semibold" panose="020B0702040204020203" pitchFamily="34" charset="0"/>
+            </a:endParaRPr>
           </a:p>
         </p:txBody>
       </p:sp>
@@ -3346,13 +4393,15 @@
                 <a:solidFill>
                   <a:srgbClr val="E5E0DF"/>
                 </a:solidFill>
-                <a:latin typeface="Barlow" pitchFamily="34" charset="0"/>
+                <a:latin typeface="Segoe UI Semibold" panose="020B0702040204020203" pitchFamily="34" charset="0"/>
                 <a:ea typeface="Barlow" pitchFamily="34" charset="-122"/>
                 <a:cs typeface="Barlow" pitchFamily="34" charset="-120"/>
               </a:rPr>
               <a:t>Cikkfeltöltés és tartalomkezelés</a:t>
             </a:r>
-            <a:endParaRPr lang="en-US" sz="1650" dirty="0"/>
+            <a:endParaRPr lang="en-US" sz="1650" dirty="0">
+              <a:latin typeface="Segoe UI Semibold" panose="020B0702040204020203" pitchFamily="34" charset="0"/>
+            </a:endParaRPr>
           </a:p>
         </p:txBody>
       </p:sp>
@@ -3421,6 +4470,376 @@
   <p:clrMapOvr>
     <a:masterClrMapping/>
   </p:clrMapOvr>
+  <mc:AlternateContent xmlns:mc="http://schemas.openxmlformats.org/markup-compatibility/2006">
+    <mc:Choice xmlns:p15="http://schemas.microsoft.com/office/powerpoint/2012/main" Requires="p15">
+      <p:transition xmlns:p14="http://schemas.microsoft.com/office/powerpoint/2010/main" spd="slow" p14:dur="2000">
+        <p15:prstTrans prst="fallOver"/>
+      </p:transition>
+    </mc:Choice>
+    <mc:Fallback>
+      <p:transition spd="slow">
+        <p:fade/>
+      </p:transition>
+    </mc:Fallback>
+  </mc:AlternateContent>
+  <p:timing>
+    <p:tnLst>
+      <p:par>
+        <p:cTn id="1" dur="indefinite" restart="never" nodeType="tmRoot">
+          <p:childTnLst>
+            <p:seq concurrent="1" nextAc="seek">
+              <p:cTn id="2" dur="indefinite" nodeType="mainSeq">
+                <p:childTnLst>
+                  <p:par>
+                    <p:cTn id="3" fill="hold">
+                      <p:stCondLst>
+                        <p:cond delay="indefinite"/>
+                        <p:cond evt="onBegin" delay="0">
+                          <p:tn val="2"/>
+                        </p:cond>
+                      </p:stCondLst>
+                      <p:childTnLst>
+                        <p:par>
+                          <p:cTn id="4" fill="hold">
+                            <p:stCondLst>
+                              <p:cond delay="0"/>
+                            </p:stCondLst>
+                            <p:childTnLst>
+                              <p:par>
+                                <p:cTn id="5" presetID="26" presetClass="entr" presetSubtype="0" fill="hold" nodeType="afterEffect">
+                                  <p:stCondLst>
+                                    <p:cond delay="0"/>
+                                  </p:stCondLst>
+                                  <p:childTnLst>
+                                    <p:set>
+                                      <p:cBhvr>
+                                        <p:cTn id="6" dur="1" fill="hold">
+                                          <p:stCondLst>
+                                            <p:cond delay="0"/>
+                                          </p:stCondLst>
+                                        </p:cTn>
+                                        <p:tgtEl>
+                                          <p:spTgt spid="27"/>
+                                        </p:tgtEl>
+                                        <p:attrNameLst>
+                                          <p:attrName>style.visibility</p:attrName>
+                                        </p:attrNameLst>
+                                      </p:cBhvr>
+                                      <p:to>
+                                        <p:strVal val="visible"/>
+                                      </p:to>
+                                    </p:set>
+                                    <p:animEffect transition="in" filter="wipe(down)">
+                                      <p:cBhvr>
+                                        <p:cTn id="7" dur="58">
+                                          <p:stCondLst>
+                                            <p:cond delay="0"/>
+                                          </p:stCondLst>
+                                        </p:cTn>
+                                        <p:tgtEl>
+                                          <p:spTgt spid="27"/>
+                                        </p:tgtEl>
+                                      </p:cBhvr>
+                                    </p:animEffect>
+                                    <p:anim calcmode="lin" valueType="num">
+                                      <p:cBhvr>
+                                        <p:cTn id="8" dur="182" tmFilter="0,0; 0.14,0.36; 0.43,0.73; 0.71,0.91; 1.0,1.0">
+                                          <p:stCondLst>
+                                            <p:cond delay="0"/>
+                                          </p:stCondLst>
+                                        </p:cTn>
+                                        <p:tgtEl>
+                                          <p:spTgt spid="27"/>
+                                        </p:tgtEl>
+                                        <p:attrNameLst>
+                                          <p:attrName>ppt_x</p:attrName>
+                                        </p:attrNameLst>
+                                      </p:cBhvr>
+                                      <p:tavLst>
+                                        <p:tav tm="0">
+                                          <p:val>
+                                            <p:strVal val="#ppt_x-0.25"/>
+                                          </p:val>
+                                        </p:tav>
+                                        <p:tav tm="100000">
+                                          <p:val>
+                                            <p:strVal val="#ppt_x"/>
+                                          </p:val>
+                                        </p:tav>
+                                      </p:tavLst>
+                                    </p:anim>
+                                    <p:anim calcmode="lin" valueType="num">
+                                      <p:cBhvr>
+                                        <p:cTn id="9" dur="66" tmFilter="0.0,0.0; 0.25,0.07; 0.50,0.2; 0.75,0.467; 1.0,1.0">
+                                          <p:stCondLst>
+                                            <p:cond delay="0"/>
+                                          </p:stCondLst>
+                                        </p:cTn>
+                                        <p:tgtEl>
+                                          <p:spTgt spid="27"/>
+                                        </p:tgtEl>
+                                        <p:attrNameLst>
+                                          <p:attrName>ppt_y</p:attrName>
+                                        </p:attrNameLst>
+                                      </p:cBhvr>
+                                      <p:tavLst>
+                                        <p:tav tm="0" fmla="#ppt_y-sin(pi*$)/3">
+                                          <p:val>
+                                            <p:fltVal val="0.5"/>
+                                          </p:val>
+                                        </p:tav>
+                                        <p:tav tm="100000">
+                                          <p:val>
+                                            <p:fltVal val="1"/>
+                                          </p:val>
+                                        </p:tav>
+                                      </p:tavLst>
+                                    </p:anim>
+                                    <p:anim calcmode="lin" valueType="num">
+                                      <p:cBhvr>
+                                        <p:cTn id="10" dur="66" tmFilter="0, 0; 0.125,0.2665; 0.25,0.4; 0.375,0.465; 0.5,0.5;  0.625,0.535; 0.75,0.6; 0.875,0.7335; 1,1">
+                                          <p:stCondLst>
+                                            <p:cond delay="66"/>
+                                          </p:stCondLst>
+                                        </p:cTn>
+                                        <p:tgtEl>
+                                          <p:spTgt spid="27"/>
+                                        </p:tgtEl>
+                                        <p:attrNameLst>
+                                          <p:attrName>ppt_y</p:attrName>
+                                        </p:attrNameLst>
+                                      </p:cBhvr>
+                                      <p:tavLst>
+                                        <p:tav tm="0" fmla="#ppt_y-sin(pi*$)/9">
+                                          <p:val>
+                                            <p:fltVal val="0"/>
+                                          </p:val>
+                                        </p:tav>
+                                        <p:tav tm="100000">
+                                          <p:val>
+                                            <p:fltVal val="1"/>
+                                          </p:val>
+                                        </p:tav>
+                                      </p:tavLst>
+                                    </p:anim>
+                                    <p:anim calcmode="lin" valueType="num">
+                                      <p:cBhvr>
+                                        <p:cTn id="11" dur="33" tmFilter="0, 0; 0.125,0.2665; 0.25,0.4; 0.375,0.465; 0.5,0.5;  0.625,0.535; 0.75,0.6; 0.875,0.7335; 1,1">
+                                          <p:stCondLst>
+                                            <p:cond delay="132"/>
+                                          </p:stCondLst>
+                                        </p:cTn>
+                                        <p:tgtEl>
+                                          <p:spTgt spid="27"/>
+                                        </p:tgtEl>
+                                        <p:attrNameLst>
+                                          <p:attrName>ppt_y</p:attrName>
+                                        </p:attrNameLst>
+                                      </p:cBhvr>
+                                      <p:tavLst>
+                                        <p:tav tm="0" fmla="#ppt_y-sin(pi*$)/27">
+                                          <p:val>
+                                            <p:fltVal val="0"/>
+                                          </p:val>
+                                        </p:tav>
+                                        <p:tav tm="100000">
+                                          <p:val>
+                                            <p:fltVal val="1"/>
+                                          </p:val>
+                                        </p:tav>
+                                      </p:tavLst>
+                                    </p:anim>
+                                    <p:anim calcmode="lin" valueType="num">
+                                      <p:cBhvr>
+                                        <p:cTn id="12" dur="16" tmFilter="0, 0; 0.125,0.2665; 0.25,0.4; 0.375,0.465; 0.5,0.5;  0.625,0.535; 0.75,0.6; 0.875,0.7335; 1,1">
+                                          <p:stCondLst>
+                                            <p:cond delay="166"/>
+                                          </p:stCondLst>
+                                        </p:cTn>
+                                        <p:tgtEl>
+                                          <p:spTgt spid="27"/>
+                                        </p:tgtEl>
+                                        <p:attrNameLst>
+                                          <p:attrName>ppt_y</p:attrName>
+                                        </p:attrNameLst>
+                                      </p:cBhvr>
+                                      <p:tavLst>
+                                        <p:tav tm="0" fmla="#ppt_y-sin(pi*$)/81">
+                                          <p:val>
+                                            <p:fltVal val="0"/>
+                                          </p:val>
+                                        </p:tav>
+                                        <p:tav tm="100000">
+                                          <p:val>
+                                            <p:fltVal val="1"/>
+                                          </p:val>
+                                        </p:tav>
+                                      </p:tavLst>
+                                    </p:anim>
+                                    <p:animScale>
+                                      <p:cBhvr>
+                                        <p:cTn id="13" dur="3">
+                                          <p:stCondLst>
+                                            <p:cond delay="65"/>
+                                          </p:stCondLst>
+                                        </p:cTn>
+                                        <p:tgtEl>
+                                          <p:spTgt spid="27"/>
+                                        </p:tgtEl>
+                                      </p:cBhvr>
+                                      <p:to x="100000" y="60000"/>
+                                    </p:animScale>
+                                    <p:animScale>
+                                      <p:cBhvr>
+                                        <p:cTn id="14" dur="17" decel="50000">
+                                          <p:stCondLst>
+                                            <p:cond delay="68"/>
+                                          </p:stCondLst>
+                                        </p:cTn>
+                                        <p:tgtEl>
+                                          <p:spTgt spid="27"/>
+                                        </p:tgtEl>
+                                      </p:cBhvr>
+                                      <p:to x="100000" y="100000"/>
+                                    </p:animScale>
+                                    <p:animScale>
+                                      <p:cBhvr>
+                                        <p:cTn id="15" dur="3">
+                                          <p:stCondLst>
+                                            <p:cond delay="131"/>
+                                          </p:stCondLst>
+                                        </p:cTn>
+                                        <p:tgtEl>
+                                          <p:spTgt spid="27"/>
+                                        </p:tgtEl>
+                                      </p:cBhvr>
+                                      <p:to x="100000" y="80000"/>
+                                    </p:animScale>
+                                    <p:animScale>
+                                      <p:cBhvr>
+                                        <p:cTn id="16" dur="17" decel="50000">
+                                          <p:stCondLst>
+                                            <p:cond delay="134"/>
+                                          </p:stCondLst>
+                                        </p:cTn>
+                                        <p:tgtEl>
+                                          <p:spTgt spid="27"/>
+                                        </p:tgtEl>
+                                      </p:cBhvr>
+                                      <p:to x="100000" y="100000"/>
+                                    </p:animScale>
+                                    <p:animScale>
+                                      <p:cBhvr>
+                                        <p:cTn id="17" dur="3">
+                                          <p:stCondLst>
+                                            <p:cond delay="164"/>
+                                          </p:stCondLst>
+                                        </p:cTn>
+                                        <p:tgtEl>
+                                          <p:spTgt spid="27"/>
+                                        </p:tgtEl>
+                                      </p:cBhvr>
+                                      <p:to x="100000" y="90000"/>
+                                    </p:animScale>
+                                    <p:animScale>
+                                      <p:cBhvr>
+                                        <p:cTn id="18" dur="17" decel="50000">
+                                          <p:stCondLst>
+                                            <p:cond delay="167"/>
+                                          </p:stCondLst>
+                                        </p:cTn>
+                                        <p:tgtEl>
+                                          <p:spTgt spid="27"/>
+                                        </p:tgtEl>
+                                      </p:cBhvr>
+                                      <p:to x="100000" y="100000"/>
+                                    </p:animScale>
+                                    <p:animScale>
+                                      <p:cBhvr>
+                                        <p:cTn id="19" dur="3">
+                                          <p:stCondLst>
+                                            <p:cond delay="181"/>
+                                          </p:stCondLst>
+                                        </p:cTn>
+                                        <p:tgtEl>
+                                          <p:spTgt spid="27"/>
+                                        </p:tgtEl>
+                                      </p:cBhvr>
+                                      <p:to x="100000" y="95000"/>
+                                    </p:animScale>
+                                    <p:animScale>
+                                      <p:cBhvr>
+                                        <p:cTn id="20" dur="17" decel="50000">
+                                          <p:stCondLst>
+                                            <p:cond delay="183"/>
+                                          </p:stCondLst>
+                                        </p:cTn>
+                                        <p:tgtEl>
+                                          <p:spTgt spid="27"/>
+                                        </p:tgtEl>
+                                      </p:cBhvr>
+                                      <p:to x="100000" y="100000"/>
+                                    </p:animScale>
+                                  </p:childTnLst>
+                                </p:cTn>
+                              </p:par>
+                            </p:childTnLst>
+                          </p:cTn>
+                        </p:par>
+                        <p:par>
+                          <p:cTn id="21" fill="hold">
+                            <p:stCondLst>
+                              <p:cond delay="200"/>
+                            </p:stCondLst>
+                            <p:childTnLst>
+                              <p:par>
+                                <p:cTn id="22" presetID="8" presetClass="emph" presetSubtype="0" fill="hold" nodeType="afterEffect">
+                                  <p:stCondLst>
+                                    <p:cond delay="0"/>
+                                  </p:stCondLst>
+                                  <p:childTnLst>
+                                    <p:animRot by="64800000">
+                                      <p:cBhvr>
+                                        <p:cTn id="23" dur="500" fill="hold"/>
+                                        <p:tgtEl>
+                                          <p:spTgt spid="27"/>
+                                        </p:tgtEl>
+                                        <p:attrNameLst>
+                                          <p:attrName>r</p:attrName>
+                                        </p:attrNameLst>
+                                      </p:cBhvr>
+                                    </p:animRot>
+                                  </p:childTnLst>
+                                </p:cTn>
+                              </p:par>
+                            </p:childTnLst>
+                          </p:cTn>
+                        </p:par>
+                      </p:childTnLst>
+                    </p:cTn>
+                  </p:par>
+                </p:childTnLst>
+              </p:cTn>
+              <p:prevCondLst>
+                <p:cond evt="onPrev" delay="0">
+                  <p:tgtEl>
+                    <p:sldTgt/>
+                  </p:tgtEl>
+                </p:cond>
+              </p:prevCondLst>
+              <p:nextCondLst>
+                <p:cond evt="onNext" delay="0">
+                  <p:tgtEl>
+                    <p:sldTgt/>
+                  </p:tgtEl>
+                </p:cond>
+              </p:nextCondLst>
+            </p:seq>
+          </p:childTnLst>
+        </p:cTn>
+      </p:par>
+    </p:tnLst>
+  </p:timing>
 </p:sld>
 </file>
 
@@ -3473,13 +4892,15 @@
                 <a:solidFill>
                   <a:srgbClr val="FFFFFF"/>
                 </a:solidFill>
-                <a:latin typeface="Barlow Medium" pitchFamily="34" charset="0"/>
+                <a:latin typeface="Segoe UI Semibold" panose="020B0702040204020203" pitchFamily="34" charset="0"/>
                 <a:ea typeface="Barlow Medium" pitchFamily="34" charset="-122"/>
                 <a:cs typeface="Barlow Medium" pitchFamily="34" charset="-120"/>
               </a:rPr>
               <a:t>Felhasználói szerepkörök</a:t>
             </a:r>
-            <a:endParaRPr lang="en-US" sz="3650" dirty="0"/>
+            <a:endParaRPr lang="en-US" sz="3650" dirty="0">
+              <a:latin typeface="Segoe UI Semibold" panose="020B0702040204020203" pitchFamily="34" charset="0"/>
+            </a:endParaRPr>
           </a:p>
         </p:txBody>
       </p:sp>
@@ -3511,14 +4932,15 @@
                 <a:spcPct val="133000"/>
               </a:lnSpc>
               <a:buSzPct val="100000"/>
-              <a:buChar char="•"/>
+              <a:buFont typeface="Wingdings" panose="05000000000000000000" pitchFamily="2" charset="2"/>
+              <a:buChar char="q"/>
             </a:pPr>
             <a:r>
               <a:rPr lang="en-US" sz="1650" b="1" dirty="0">
                 <a:solidFill>
                   <a:srgbClr val="E5E0DF"/>
                 </a:solidFill>
-                <a:latin typeface="Barlow Bold" pitchFamily="34" charset="0"/>
+                <a:latin typeface="Segoe UI Semibold" panose="020B0702040204020203" pitchFamily="34" charset="0"/>
                 <a:ea typeface="Barlow Bold" pitchFamily="34" charset="-122"/>
                 <a:cs typeface="Barlow Bold" pitchFamily="34" charset="-120"/>
               </a:rPr>
@@ -3529,13 +4951,15 @@
                 <a:solidFill>
                   <a:srgbClr val="E5E0DF"/>
                 </a:solidFill>
-                <a:latin typeface="Barlow" pitchFamily="34" charset="0"/>
+                <a:latin typeface="Segoe UI Semibold" panose="020B0702040204020203" pitchFamily="34" charset="0"/>
                 <a:ea typeface="Barlow" pitchFamily="34" charset="-122"/>
                 <a:cs typeface="Barlow" pitchFamily="34" charset="-120"/>
               </a:rPr>
               <a:t> cikkek böngészése és mentése</a:t>
             </a:r>
-            <a:endParaRPr lang="en-US" sz="1650" dirty="0"/>
+            <a:endParaRPr lang="en-US" sz="1650" dirty="0">
+              <a:latin typeface="Segoe UI Semibold" panose="020B0702040204020203" pitchFamily="34" charset="0"/>
+            </a:endParaRPr>
           </a:p>
           <a:p>
             <a:pPr marL="335280" indent="-335280" algn="l">
@@ -3543,14 +4967,15 @@
                 <a:spcPct val="133000"/>
               </a:lnSpc>
               <a:buSzPct val="100000"/>
-              <a:buChar char="•"/>
+              <a:buFont typeface="Wingdings" panose="05000000000000000000" pitchFamily="2" charset="2"/>
+              <a:buChar char="q"/>
             </a:pPr>
             <a:r>
               <a:rPr lang="en-US" sz="1650" b="1" dirty="0">
                 <a:solidFill>
                   <a:srgbClr val="E5E0DF"/>
                 </a:solidFill>
-                <a:latin typeface="Barlow Bold" pitchFamily="34" charset="0"/>
+                <a:latin typeface="Segoe UI Semibold" panose="020B0702040204020203" pitchFamily="34" charset="0"/>
                 <a:ea typeface="Barlow Bold" pitchFamily="34" charset="-122"/>
                 <a:cs typeface="Barlow Bold" pitchFamily="34" charset="-120"/>
               </a:rPr>
@@ -3561,13 +4986,15 @@
                 <a:solidFill>
                   <a:srgbClr val="E5E0DF"/>
                 </a:solidFill>
-                <a:latin typeface="Barlow" pitchFamily="34" charset="0"/>
+                <a:latin typeface="Segoe UI Semibold" panose="020B0702040204020203" pitchFamily="34" charset="0"/>
                 <a:ea typeface="Barlow" pitchFamily="34" charset="-122"/>
                 <a:cs typeface="Barlow" pitchFamily="34" charset="-120"/>
               </a:rPr>
               <a:t> saját cikkek publikálása</a:t>
             </a:r>
-            <a:endParaRPr lang="en-US" sz="1650" dirty="0"/>
+            <a:endParaRPr lang="en-US" sz="1650" dirty="0">
+              <a:latin typeface="Segoe UI Semibold" panose="020B0702040204020203" pitchFamily="34" charset="0"/>
+            </a:endParaRPr>
           </a:p>
           <a:p>
             <a:pPr marL="335280" indent="-335280" algn="l">
@@ -3575,14 +5002,15 @@
                 <a:spcPct val="133000"/>
               </a:lnSpc>
               <a:buSzPct val="100000"/>
-              <a:buChar char="•"/>
+              <a:buFont typeface="Wingdings" panose="05000000000000000000" pitchFamily="2" charset="2"/>
+              <a:buChar char="q"/>
             </a:pPr>
             <a:r>
               <a:rPr lang="en-US" sz="1650" b="1" dirty="0">
                 <a:solidFill>
                   <a:srgbClr val="E5E0DF"/>
                 </a:solidFill>
-                <a:latin typeface="Barlow Bold" pitchFamily="34" charset="0"/>
+                <a:latin typeface="Segoe UI Semibold" panose="020B0702040204020203" pitchFamily="34" charset="0"/>
                 <a:ea typeface="Barlow Bold" pitchFamily="34" charset="-122"/>
                 <a:cs typeface="Barlow Bold" pitchFamily="34" charset="-120"/>
               </a:rPr>
@@ -3593,13 +5021,92 @@
                 <a:solidFill>
                   <a:srgbClr val="E5E0DF"/>
                 </a:solidFill>
-                <a:latin typeface="Barlow" pitchFamily="34" charset="0"/>
+                <a:latin typeface="Segoe UI Semibold" panose="020B0702040204020203" pitchFamily="34" charset="0"/>
                 <a:ea typeface="Barlow" pitchFamily="34" charset="-122"/>
                 <a:cs typeface="Barlow" pitchFamily="34" charset="-120"/>
               </a:rPr>
-              <a:t> felhasználók, kategóriák és tartalom kezelése</a:t>
+              <a:t> felhasználók, kategóriák </a:t>
             </a:r>
-            <a:endParaRPr lang="en-US" sz="1650" dirty="0"/>
+            <a:r>
+              <a:rPr lang="en-US" sz="1650" dirty="0" err="1">
+                <a:solidFill>
+                  <a:srgbClr val="E5E0DF"/>
+                </a:solidFill>
+                <a:latin typeface="Segoe UI Semibold" panose="020B0702040204020203" pitchFamily="34" charset="0"/>
+                <a:ea typeface="Barlow" pitchFamily="34" charset="-122"/>
+                <a:cs typeface="Barlow" pitchFamily="34" charset="-120"/>
+              </a:rPr>
+              <a:t>és</a:t>
+            </a:r>
+            <a:r>
+              <a:rPr lang="en-US" sz="1650" dirty="0">
+                <a:solidFill>
+                  <a:srgbClr val="E5E0DF"/>
+                </a:solidFill>
+                <a:latin typeface="Segoe UI Semibold" panose="020B0702040204020203" pitchFamily="34" charset="0"/>
+                <a:ea typeface="Barlow" pitchFamily="34" charset="-122"/>
+                <a:cs typeface="Barlow" pitchFamily="34" charset="-120"/>
+              </a:rPr>
+              <a:t> </a:t>
+            </a:r>
+            <a:r>
+              <a:rPr lang="en-US" sz="1650" dirty="0" err="1">
+                <a:solidFill>
+                  <a:srgbClr val="E5E0DF"/>
+                </a:solidFill>
+                <a:latin typeface="Segoe UI Semibold" panose="020B0702040204020203" pitchFamily="34" charset="0"/>
+                <a:ea typeface="Barlow" pitchFamily="34" charset="-122"/>
+                <a:cs typeface="Barlow" pitchFamily="34" charset="-120"/>
+              </a:rPr>
+              <a:t>tartal</a:t>
+            </a:r>
+            <a:r>
+              <a:rPr lang="hu-HU" sz="1650" dirty="0" err="1">
+                <a:solidFill>
+                  <a:srgbClr val="E5E0DF"/>
+                </a:solidFill>
+                <a:latin typeface="Segoe UI Semibold" panose="020B0702040204020203" pitchFamily="34" charset="0"/>
+                <a:ea typeface="Barlow" pitchFamily="34" charset="-122"/>
+                <a:cs typeface="Barlow" pitchFamily="34" charset="-120"/>
+              </a:rPr>
+              <a:t>mak</a:t>
+            </a:r>
+            <a:r>
+              <a:rPr lang="en-US" sz="1650" dirty="0">
+                <a:solidFill>
+                  <a:srgbClr val="E5E0DF"/>
+                </a:solidFill>
+                <a:latin typeface="Segoe UI Semibold" panose="020B0702040204020203" pitchFamily="34" charset="0"/>
+                <a:ea typeface="Barlow" pitchFamily="34" charset="-122"/>
+                <a:cs typeface="Barlow" pitchFamily="34" charset="-120"/>
+              </a:rPr>
+              <a:t> </a:t>
+            </a:r>
+            <a:r>
+              <a:rPr lang="en-US" sz="1650" dirty="0" err="1">
+                <a:solidFill>
+                  <a:srgbClr val="E5E0DF"/>
+                </a:solidFill>
+                <a:latin typeface="Segoe UI Semibold" panose="020B0702040204020203" pitchFamily="34" charset="0"/>
+                <a:ea typeface="Barlow" pitchFamily="34" charset="-122"/>
+                <a:cs typeface="Barlow" pitchFamily="34" charset="-120"/>
+              </a:rPr>
+              <a:t>kezelése</a:t>
+            </a:r>
+            <a:r>
+              <a:rPr lang="hu-HU" sz="1650" dirty="0">
+                <a:solidFill>
+                  <a:srgbClr val="E5E0DF"/>
+                </a:solidFill>
+                <a:latin typeface="Segoe UI Semibold" panose="020B0702040204020203" pitchFamily="34" charset="0"/>
+                <a:ea typeface="Barlow" pitchFamily="34" charset="-122"/>
+                <a:cs typeface="Barlow" pitchFamily="34" charset="-120"/>
+              </a:rPr>
+              <a:t>, az oldal karbantartása.</a:t>
+            </a:r>
+            <a:endParaRPr lang="en-US" sz="1650" dirty="0">
+              <a:latin typeface="Segoe UI Semibold" panose="020B0702040204020203" pitchFamily="34" charset="0"/>
+            </a:endParaRPr>
           </a:p>
         </p:txBody>
       </p:sp>
@@ -3655,7 +5162,7 @@
         </p:blipFill>
         <p:spPr>
           <a:xfrm>
-            <a:off x="10987795" y="318613"/>
+            <a:off x="11074555" y="318613"/>
             <a:ext cx="765877" cy="765877"/>
           </a:xfrm>
           <a:prstGeom prst="rect">
@@ -3668,6 +5175,169 @@
   <p:clrMapOvr>
     <a:masterClrMapping/>
   </p:clrMapOvr>
+  <mc:AlternateContent xmlns:mc="http://schemas.openxmlformats.org/markup-compatibility/2006">
+    <mc:Choice xmlns:p15="http://schemas.microsoft.com/office/powerpoint/2012/main" Requires="p15">
+      <p:transition xmlns:p14="http://schemas.microsoft.com/office/powerpoint/2010/main" spd="slow" p14:dur="2000">
+        <p15:prstTrans prst="fallOver"/>
+      </p:transition>
+    </mc:Choice>
+    <mc:Fallback>
+      <p:transition spd="slow">
+        <p:fade/>
+      </p:transition>
+    </mc:Fallback>
+  </mc:AlternateContent>
+  <p:timing>
+    <p:tnLst>
+      <p:par>
+        <p:cTn id="1" dur="indefinite" restart="never" nodeType="tmRoot">
+          <p:childTnLst>
+            <p:seq concurrent="1" nextAc="seek">
+              <p:cTn id="2" dur="indefinite" nodeType="mainSeq">
+                <p:childTnLst>
+                  <p:par>
+                    <p:cTn id="3" fill="hold">
+                      <p:stCondLst>
+                        <p:cond delay="indefinite"/>
+                        <p:cond evt="onBegin" delay="0">
+                          <p:tn val="2"/>
+                        </p:cond>
+                      </p:stCondLst>
+                      <p:childTnLst>
+                        <p:par>
+                          <p:cTn id="4" fill="hold">
+                            <p:stCondLst>
+                              <p:cond delay="0"/>
+                            </p:stCondLst>
+                            <p:childTnLst>
+                              <p:par>
+                                <p:cTn id="5" presetID="2" presetClass="entr" presetSubtype="4" fill="hold" nodeType="afterEffect">
+                                  <p:stCondLst>
+                                    <p:cond delay="0"/>
+                                  </p:stCondLst>
+                                  <p:childTnLst>
+                                    <p:set>
+                                      <p:cBhvr>
+                                        <p:cTn id="6" dur="1" fill="hold">
+                                          <p:stCondLst>
+                                            <p:cond delay="0"/>
+                                          </p:stCondLst>
+                                        </p:cTn>
+                                        <p:tgtEl>
+                                          <p:spTgt spid="6"/>
+                                        </p:tgtEl>
+                                        <p:attrNameLst>
+                                          <p:attrName>style.visibility</p:attrName>
+                                        </p:attrNameLst>
+                                      </p:cBhvr>
+                                      <p:to>
+                                        <p:strVal val="visible"/>
+                                      </p:to>
+                                    </p:set>
+                                    <p:anim calcmode="lin" valueType="num">
+                                      <p:cBhvr additive="base">
+                                        <p:cTn id="7" dur="20000" fill="hold"/>
+                                        <p:tgtEl>
+                                          <p:spTgt spid="6"/>
+                                        </p:tgtEl>
+                                        <p:attrNameLst>
+                                          <p:attrName>ppt_x</p:attrName>
+                                        </p:attrNameLst>
+                                      </p:cBhvr>
+                                      <p:tavLst>
+                                        <p:tav tm="0">
+                                          <p:val>
+                                            <p:strVal val="#ppt_x"/>
+                                          </p:val>
+                                        </p:tav>
+                                        <p:tav tm="100000">
+                                          <p:val>
+                                            <p:strVal val="#ppt_x"/>
+                                          </p:val>
+                                        </p:tav>
+                                      </p:tavLst>
+                                    </p:anim>
+                                    <p:anim calcmode="lin" valueType="num">
+                                      <p:cBhvr additive="base">
+                                        <p:cTn id="8" dur="20000" fill="hold"/>
+                                        <p:tgtEl>
+                                          <p:spTgt spid="6"/>
+                                        </p:tgtEl>
+                                        <p:attrNameLst>
+                                          <p:attrName>ppt_y</p:attrName>
+                                        </p:attrNameLst>
+                                      </p:cBhvr>
+                                      <p:tavLst>
+                                        <p:tav tm="0">
+                                          <p:val>
+                                            <p:strVal val="1+#ppt_h/2"/>
+                                          </p:val>
+                                        </p:tav>
+                                        <p:tav tm="100000">
+                                          <p:val>
+                                            <p:strVal val="#ppt_y"/>
+                                          </p:val>
+                                        </p:tav>
+                                      </p:tavLst>
+                                    </p:anim>
+                                  </p:childTnLst>
+                                </p:cTn>
+                              </p:par>
+                            </p:childTnLst>
+                          </p:cTn>
+                        </p:par>
+                        <p:par>
+                          <p:cTn id="9" fill="hold">
+                            <p:stCondLst>
+                              <p:cond delay="20000"/>
+                            </p:stCondLst>
+                            <p:childTnLst>
+                              <p:par>
+                                <p:cTn id="10" presetID="6" presetClass="emph" presetSubtype="0" fill="hold" nodeType="afterEffect">
+                                  <p:stCondLst>
+                                    <p:cond delay="0"/>
+                                  </p:stCondLst>
+                                  <p:childTnLst>
+                                    <p:animScale>
+                                      <p:cBhvr>
+                                        <p:cTn id="11" dur="3000" fill="hold"/>
+                                        <p:tgtEl>
+                                          <p:spTgt spid="6"/>
+                                        </p:tgtEl>
+                                      </p:cBhvr>
+                                      <p:by x="150000" y="150000"/>
+                                    </p:animScale>
+                                  </p:childTnLst>
+                                </p:cTn>
+                              </p:par>
+                            </p:childTnLst>
+                          </p:cTn>
+                        </p:par>
+                      </p:childTnLst>
+                    </p:cTn>
+                  </p:par>
+                </p:childTnLst>
+              </p:cTn>
+              <p:prevCondLst>
+                <p:cond evt="onPrev" delay="0">
+                  <p:tgtEl>
+                    <p:sldTgt/>
+                  </p:tgtEl>
+                </p:cond>
+              </p:prevCondLst>
+              <p:nextCondLst>
+                <p:cond evt="onNext" delay="0">
+                  <p:tgtEl>
+                    <p:sldTgt/>
+                  </p:tgtEl>
+                </p:cond>
+              </p:nextCondLst>
+            </p:seq>
+          </p:childTnLst>
+        </p:cTn>
+      </p:par>
+    </p:tnLst>
+  </p:timing>
 </p:sld>
 </file>
 
@@ -3720,13 +5390,15 @@
                 <a:solidFill>
                   <a:srgbClr val="FFFFFF"/>
                 </a:solidFill>
-                <a:latin typeface="Barlow Medium" pitchFamily="34" charset="0"/>
+                <a:latin typeface="Segoe UI Semibold" panose="020B0702040204020203" pitchFamily="34" charset="0"/>
                 <a:ea typeface="Barlow Medium" pitchFamily="34" charset="-122"/>
                 <a:cs typeface="Barlow Medium" pitchFamily="34" charset="-120"/>
               </a:rPr>
               <a:t>Oldalstruktúra</a:t>
             </a:r>
-            <a:endParaRPr lang="en-US" sz="3650" dirty="0"/>
+            <a:endParaRPr lang="en-US" sz="3650" dirty="0">
+              <a:latin typeface="Segoe UI Semibold" panose="020B0702040204020203" pitchFamily="34" charset="0"/>
+            </a:endParaRPr>
           </a:p>
         </p:txBody>
       </p:sp>
@@ -3791,13 +5463,15 @@
                 <a:solidFill>
                   <a:srgbClr val="E5E0DF"/>
                 </a:solidFill>
-                <a:latin typeface="Barlow Medium" pitchFamily="34" charset="0"/>
+                <a:latin typeface="Segoe UI Semibold" panose="020B0702040204020203" pitchFamily="34" charset="0"/>
                 <a:ea typeface="Barlow Medium" pitchFamily="34" charset="-122"/>
                 <a:cs typeface="Barlow Medium" pitchFamily="34" charset="-120"/>
               </a:rPr>
               <a:t>Főoldal</a:t>
             </a:r>
-            <a:endParaRPr lang="en-US" sz="1800" dirty="0"/>
+            <a:endParaRPr lang="en-US" sz="1800" dirty="0">
+              <a:latin typeface="Segoe UI Semibold" panose="020B0702040204020203" pitchFamily="34" charset="0"/>
+            </a:endParaRPr>
           </a:p>
         </p:txBody>
       </p:sp>
@@ -3862,13 +5536,15 @@
                 <a:solidFill>
                   <a:srgbClr val="E5E0DF"/>
                 </a:solidFill>
-                <a:latin typeface="Barlow Medium" pitchFamily="34" charset="0"/>
+                <a:latin typeface="Segoe UI Semibold" panose="020B0702040204020203" pitchFamily="34" charset="0"/>
                 <a:ea typeface="Barlow Medium" pitchFamily="34" charset="-122"/>
                 <a:cs typeface="Barlow Medium" pitchFamily="34" charset="-120"/>
               </a:rPr>
               <a:t>Kategóriaoldalak</a:t>
             </a:r>
-            <a:endParaRPr lang="en-US" sz="1800" dirty="0"/>
+            <a:endParaRPr lang="en-US" sz="1800" dirty="0">
+              <a:latin typeface="Segoe UI Semibold" panose="020B0702040204020203" pitchFamily="34" charset="0"/>
+            </a:endParaRPr>
           </a:p>
         </p:txBody>
       </p:sp>
@@ -3933,13 +5609,15 @@
                 <a:solidFill>
                   <a:srgbClr val="E5E0DF"/>
                 </a:solidFill>
-                <a:latin typeface="Barlow Medium" pitchFamily="34" charset="0"/>
+                <a:latin typeface="Segoe UI Semibold" panose="020B0702040204020203" pitchFamily="34" charset="0"/>
                 <a:ea typeface="Barlow Medium" pitchFamily="34" charset="-122"/>
                 <a:cs typeface="Barlow Medium" pitchFamily="34" charset="-120"/>
               </a:rPr>
               <a:t>Cikk oldal</a:t>
             </a:r>
-            <a:endParaRPr lang="en-US" sz="1800" dirty="0"/>
+            <a:endParaRPr lang="en-US" sz="1800" dirty="0">
+              <a:latin typeface="Segoe UI Semibold" panose="020B0702040204020203" pitchFamily="34" charset="0"/>
+            </a:endParaRPr>
           </a:p>
         </p:txBody>
       </p:sp>
@@ -4004,13 +5682,15 @@
                 <a:solidFill>
                   <a:srgbClr val="E5E0DF"/>
                 </a:solidFill>
-                <a:latin typeface="Barlow Medium" pitchFamily="34" charset="0"/>
+                <a:latin typeface="Segoe UI Semibold" panose="020B0702040204020203" pitchFamily="34" charset="0"/>
                 <a:ea typeface="Barlow Medium" pitchFamily="34" charset="-122"/>
                 <a:cs typeface="Barlow Medium" pitchFamily="34" charset="-120"/>
               </a:rPr>
               <a:t>Profilok</a:t>
             </a:r>
-            <a:endParaRPr lang="en-US" sz="1800" dirty="0"/>
+            <a:endParaRPr lang="en-US" sz="1800" dirty="0">
+              <a:latin typeface="Segoe UI Semibold" panose="020B0702040204020203" pitchFamily="34" charset="0"/>
+            </a:endParaRPr>
           </a:p>
         </p:txBody>
       </p:sp>
@@ -4075,13 +5755,15 @@
                 <a:solidFill>
                   <a:srgbClr val="E5E0DF"/>
                 </a:solidFill>
-                <a:latin typeface="Barlow Medium" pitchFamily="34" charset="0"/>
+                <a:latin typeface="Segoe UI Semibold" panose="020B0702040204020203" pitchFamily="34" charset="0"/>
                 <a:ea typeface="Barlow Medium" pitchFamily="34" charset="-122"/>
                 <a:cs typeface="Barlow Medium" pitchFamily="34" charset="-120"/>
               </a:rPr>
               <a:t>Admin felület</a:t>
             </a:r>
-            <a:endParaRPr lang="en-US" sz="1800" dirty="0"/>
+            <a:endParaRPr lang="en-US" sz="1800" dirty="0">
+              <a:latin typeface="Segoe UI Semibold" panose="020B0702040204020203" pitchFamily="34" charset="0"/>
+            </a:endParaRPr>
           </a:p>
         </p:txBody>
       </p:sp>
@@ -4146,22 +5828,24 @@
                 <a:solidFill>
                   <a:srgbClr val="E5E0DF"/>
                 </a:solidFill>
-                <a:latin typeface="Barlow Medium" pitchFamily="34" charset="0"/>
+                <a:latin typeface="Segoe UI Semibold" panose="020B0702040204020203" pitchFamily="34" charset="0"/>
                 <a:ea typeface="Barlow Medium" pitchFamily="34" charset="-122"/>
                 <a:cs typeface="Barlow Medium" pitchFamily="34" charset="-120"/>
               </a:rPr>
               <a:t>Impresszum &amp; Támogatás</a:t>
             </a:r>
-            <a:endParaRPr lang="en-US" sz="1800" dirty="0"/>
+            <a:endParaRPr lang="en-US" sz="1800" dirty="0">
+              <a:latin typeface="Segoe UI Semibold" panose="020B0702040204020203" pitchFamily="34" charset="0"/>
+            </a:endParaRPr>
           </a:p>
         </p:txBody>
       </p:sp>
       <p:pic>
         <p:nvPicPr>
-          <p:cNvPr id="15" name="Kép 14">
+          <p:cNvPr id="16" name="Kép 15">
             <a:extLst>
               <a:ext uri="{FF2B5EF4-FFF2-40B4-BE49-F238E27FC236}">
-                <a16:creationId xmlns:a16="http://schemas.microsoft.com/office/drawing/2014/main" id="{FDF54DE7-2084-44A6-A26F-8E701A8A4B7F}"/>
+                <a16:creationId xmlns:a16="http://schemas.microsoft.com/office/drawing/2014/main" id="{9C612B9A-25E6-4B8B-BFD4-284FADFED01D}"/>
               </a:ext>
             </a:extLst>
           </p:cNvPr>
@@ -4178,8 +5862,8 @@
         </p:blipFill>
         <p:spPr>
           <a:xfrm>
-            <a:off x="10987795" y="318613"/>
-            <a:ext cx="765877" cy="765877"/>
+            <a:off x="10609581" y="6343578"/>
+            <a:ext cx="1514686" cy="514422"/>
           </a:xfrm>
           <a:prstGeom prst="rect">
             <a:avLst/>
@@ -4188,10 +5872,10 @@
       </p:pic>
       <p:pic>
         <p:nvPicPr>
-          <p:cNvPr id="16" name="Kép 15">
+          <p:cNvPr id="15" name="Kép 14">
             <a:extLst>
               <a:ext uri="{FF2B5EF4-FFF2-40B4-BE49-F238E27FC236}">
-                <a16:creationId xmlns:a16="http://schemas.microsoft.com/office/drawing/2014/main" id="{9C612B9A-25E6-4B8B-BFD4-284FADFED01D}"/>
+                <a16:creationId xmlns:a16="http://schemas.microsoft.com/office/drawing/2014/main" id="{FDF54DE7-2084-44A6-A26F-8E701A8A4B7F}"/>
               </a:ext>
             </a:extLst>
           </p:cNvPr>
@@ -4208,8 +5892,8 @@
         </p:blipFill>
         <p:spPr>
           <a:xfrm>
-            <a:off x="10609581" y="6343578"/>
-            <a:ext cx="1514686" cy="514422"/>
+            <a:off x="10987795" y="318613"/>
+            <a:ext cx="765877" cy="765877"/>
           </a:xfrm>
           <a:prstGeom prst="rect">
             <a:avLst/>
@@ -4221,6 +5905,215 @@
   <p:clrMapOvr>
     <a:masterClrMapping/>
   </p:clrMapOvr>
+  <mc:AlternateContent xmlns:mc="http://schemas.openxmlformats.org/markup-compatibility/2006">
+    <mc:Choice xmlns:p15="http://schemas.microsoft.com/office/powerpoint/2012/main" Requires="p15">
+      <p:transition xmlns:p14="http://schemas.microsoft.com/office/powerpoint/2010/main" spd="slow" p14:dur="2000">
+        <p15:prstTrans prst="fallOver"/>
+      </p:transition>
+    </mc:Choice>
+    <mc:Fallback>
+      <p:transition spd="slow">
+        <p:fade/>
+      </p:transition>
+    </mc:Fallback>
+  </mc:AlternateContent>
+  <p:timing>
+    <p:tnLst>
+      <p:par>
+        <p:cTn id="1" dur="indefinite" restart="never" nodeType="tmRoot">
+          <p:childTnLst>
+            <p:seq concurrent="1" nextAc="seek">
+              <p:cTn id="2" dur="indefinite" nodeType="mainSeq">
+                <p:childTnLst>
+                  <p:par>
+                    <p:cTn id="3" fill="hold">
+                      <p:stCondLst>
+                        <p:cond delay="indefinite"/>
+                        <p:cond evt="onBegin" delay="0">
+                          <p:tn val="2"/>
+                        </p:cond>
+                      </p:stCondLst>
+                      <p:childTnLst>
+                        <p:par>
+                          <p:cTn id="4" fill="hold">
+                            <p:stCondLst>
+                              <p:cond delay="0"/>
+                            </p:stCondLst>
+                            <p:childTnLst>
+                              <p:par>
+                                <p:cTn id="5" presetID="42" presetClass="path" presetSubtype="0" accel="50000" decel="50000" fill="hold" nodeType="afterEffect">
+                                  <p:stCondLst>
+                                    <p:cond delay="0"/>
+                                  </p:stCondLst>
+                                  <p:childTnLst>
+                                    <p:animMotion origin="layout" path="M -2.08333E-6 -4.81481E-6 L 0.12982 0.00764 " pathEditMode="relative" rAng="0" ptsTypes="AA">
+                                      <p:cBhvr>
+                                        <p:cTn id="6" dur="2000" fill="hold"/>
+                                        <p:tgtEl>
+                                          <p:spTgt spid="15"/>
+                                        </p:tgtEl>
+                                        <p:attrNameLst>
+                                          <p:attrName>ppt_x</p:attrName>
+                                          <p:attrName>ppt_y</p:attrName>
+                                        </p:attrNameLst>
+                                      </p:cBhvr>
+                                      <p:rCtr x="6484" y="370"/>
+                                    </p:animMotion>
+                                  </p:childTnLst>
+                                </p:cTn>
+                              </p:par>
+                            </p:childTnLst>
+                          </p:cTn>
+                        </p:par>
+                        <p:par>
+                          <p:cTn id="7" fill="hold">
+                            <p:stCondLst>
+                              <p:cond delay="2000"/>
+                            </p:stCondLst>
+                            <p:childTnLst>
+                              <p:par>
+                                <p:cTn id="8" presetID="42" presetClass="path" presetSubtype="0" accel="50000" decel="50000" fill="hold" nodeType="afterEffect">
+                                  <p:stCondLst>
+                                    <p:cond delay="0"/>
+                                  </p:stCondLst>
+                                  <p:childTnLst>
+                                    <p:animMotion origin="layout" path="M 0.12982 0.00764 L 0.12474 0.97223 " pathEditMode="relative" rAng="0" ptsTypes="AA">
+                                      <p:cBhvr>
+                                        <p:cTn id="9" dur="100" fill="hold"/>
+                                        <p:tgtEl>
+                                          <p:spTgt spid="15"/>
+                                        </p:tgtEl>
+                                        <p:attrNameLst>
+                                          <p:attrName>ppt_x</p:attrName>
+                                          <p:attrName>ppt_y</p:attrName>
+                                        </p:attrNameLst>
+                                      </p:cBhvr>
+                                      <p:rCtr x="-260" y="48218"/>
+                                    </p:animMotion>
+                                  </p:childTnLst>
+                                </p:cTn>
+                              </p:par>
+                            </p:childTnLst>
+                          </p:cTn>
+                        </p:par>
+                        <p:par>
+                          <p:cTn id="10" fill="hold">
+                            <p:stCondLst>
+                              <p:cond delay="2100"/>
+                            </p:stCondLst>
+                            <p:childTnLst>
+                              <p:par>
+                                <p:cTn id="11" presetID="37" presetClass="path" presetSubtype="0" accel="50000" decel="50000" fill="hold" nodeType="afterEffect">
+                                  <p:stCondLst>
+                                    <p:cond delay="0"/>
+                                  </p:stCondLst>
+                                  <p:childTnLst>
+                                    <p:animMotion origin="layout" path="M 0.12474 0.97223 L 0.01758 0.83936 C -0.00469 0.8095 -0.03828 0.79352 -0.07344 0.79352 C -0.1138 0.79352 -0.14531 0.8095 -0.16758 0.83936 L -0.27578 0.97223 " pathEditMode="relative" rAng="0" ptsTypes="AAAAA">
+                                      <p:cBhvr>
+                                        <p:cTn id="12" dur="2000" fill="hold"/>
+                                        <p:tgtEl>
+                                          <p:spTgt spid="15"/>
+                                        </p:tgtEl>
+                                        <p:attrNameLst>
+                                          <p:attrName>ppt_x</p:attrName>
+                                          <p:attrName>ppt_y</p:attrName>
+                                        </p:attrNameLst>
+                                      </p:cBhvr>
+                                      <p:rCtr x="-20026" y="-8935"/>
+                                    </p:animMotion>
+                                  </p:childTnLst>
+                                </p:cTn>
+                              </p:par>
+                            </p:childTnLst>
+                          </p:cTn>
+                        </p:par>
+                        <p:par>
+                          <p:cTn id="13" fill="hold">
+                            <p:stCondLst>
+                              <p:cond delay="4100"/>
+                            </p:stCondLst>
+                            <p:childTnLst>
+                              <p:par>
+                                <p:cTn id="14" presetID="42" presetClass="path" presetSubtype="0" accel="50000" decel="50000" fill="hold" nodeType="afterEffect">
+                                  <p:stCondLst>
+                                    <p:cond delay="0"/>
+                                  </p:stCondLst>
+                                  <p:childTnLst>
+                                    <p:animMotion origin="layout" path="M -0.29909 1.03172 L -0.29765 0.82269 " pathEditMode="relative" rAng="0" ptsTypes="AA">
+                                      <p:cBhvr>
+                                        <p:cTn id="15" dur="2000" fill="hold"/>
+                                        <p:tgtEl>
+                                          <p:spTgt spid="15"/>
+                                        </p:tgtEl>
+                                        <p:attrNameLst>
+                                          <p:attrName>ppt_x</p:attrName>
+                                          <p:attrName>ppt_y</p:attrName>
+                                        </p:attrNameLst>
+                                      </p:cBhvr>
+                                      <p:rCtr x="65" y="-10463"/>
+                                    </p:animMotion>
+                                  </p:childTnLst>
+                                </p:cTn>
+                              </p:par>
+                            </p:childTnLst>
+                          </p:cTn>
+                        </p:par>
+                        <p:par>
+                          <p:cTn id="16" fill="hold">
+                            <p:stCondLst>
+                              <p:cond delay="6100"/>
+                            </p:stCondLst>
+                            <p:childTnLst>
+                              <p:par>
+                                <p:cTn id="17" presetID="42" presetClass="path" presetSubtype="0" accel="50000" decel="50000" fill="hold" nodeType="afterEffect">
+                                  <p:stCondLst>
+                                    <p:cond delay="0"/>
+                                  </p:stCondLst>
+                                  <p:childTnLst>
+                                    <p:animMotion origin="layout" path="M -0.29765 0.82269 L -0.97187 0.82269 " pathEditMode="relative" rAng="0" ptsTypes="AA">
+                                      <p:cBhvr>
+                                        <p:cTn id="18" dur="500" fill="hold"/>
+                                        <p:tgtEl>
+                                          <p:spTgt spid="15"/>
+                                        </p:tgtEl>
+                                        <p:attrNameLst>
+                                          <p:attrName>ppt_x</p:attrName>
+                                          <p:attrName>ppt_y</p:attrName>
+                                        </p:attrNameLst>
+                                      </p:cBhvr>
+                                      <p:rCtr x="-33711" y="0"/>
+                                    </p:animMotion>
+                                  </p:childTnLst>
+                                </p:cTn>
+                              </p:par>
+                            </p:childTnLst>
+                          </p:cTn>
+                        </p:par>
+                      </p:childTnLst>
+                    </p:cTn>
+                  </p:par>
+                </p:childTnLst>
+              </p:cTn>
+              <p:prevCondLst>
+                <p:cond evt="onPrev" delay="0">
+                  <p:tgtEl>
+                    <p:sldTgt/>
+                  </p:tgtEl>
+                </p:cond>
+              </p:prevCondLst>
+              <p:nextCondLst>
+                <p:cond evt="onNext" delay="0">
+                  <p:tgtEl>
+                    <p:sldTgt/>
+                  </p:tgtEl>
+                </p:cond>
+              </p:nextCondLst>
+            </p:seq>
+          </p:childTnLst>
+        </p:cTn>
+      </p:par>
+    </p:tnLst>
+  </p:timing>
 </p:sld>
 </file>
 
@@ -4273,13 +6166,15 @@
                 <a:solidFill>
                   <a:srgbClr val="FFFFFF"/>
                 </a:solidFill>
-                <a:latin typeface="Barlow Medium" pitchFamily="34" charset="0"/>
+                <a:latin typeface="Segoe UI Semibold" panose="020B0702040204020203" pitchFamily="34" charset="0"/>
                 <a:ea typeface="Barlow Medium" pitchFamily="34" charset="-122"/>
                 <a:cs typeface="Barlow Medium" pitchFamily="34" charset="-120"/>
               </a:rPr>
               <a:t>Adatbázis</a:t>
             </a:r>
-            <a:endParaRPr lang="en-US" sz="3650" dirty="0"/>
+            <a:endParaRPr lang="en-US" sz="3650" dirty="0">
+              <a:latin typeface="Segoe UI Semibold" panose="020B0702040204020203" pitchFamily="34" charset="0"/>
+            </a:endParaRPr>
           </a:p>
         </p:txBody>
       </p:sp>
@@ -4292,7 +6187,7 @@
         <p:spPr>
           <a:xfrm>
             <a:off x="734200" y="3353098"/>
-            <a:ext cx="10723294" cy="1154112"/>
+            <a:ext cx="4983019" cy="2497286"/>
           </a:xfrm>
           <a:prstGeom prst="rect">
             <a:avLst/>
@@ -4311,20 +6206,23 @@
                 <a:spcPct val="133000"/>
               </a:lnSpc>
               <a:buSzPct val="100000"/>
-              <a:buChar char="•"/>
+              <a:buFont typeface="Wingdings" panose="05000000000000000000" pitchFamily="2" charset="2"/>
+              <a:buChar char="q"/>
             </a:pPr>
             <a:r>
               <a:rPr lang="en-US" sz="1650" dirty="0">
                 <a:solidFill>
                   <a:srgbClr val="E5E0DF"/>
                 </a:solidFill>
-                <a:latin typeface="Barlow" pitchFamily="34" charset="0"/>
+                <a:latin typeface="Segoe UI Semibold" panose="020B0702040204020203" pitchFamily="34" charset="0"/>
                 <a:ea typeface="Barlow" pitchFamily="34" charset="-122"/>
                 <a:cs typeface="Barlow" pitchFamily="34" charset="-120"/>
               </a:rPr>
               <a:t>Felhasználók, szerzők, cikkek</a:t>
             </a:r>
-            <a:endParaRPr lang="en-US" sz="1650" dirty="0"/>
+            <a:endParaRPr lang="en-US" sz="1650" dirty="0">
+              <a:latin typeface="Segoe UI Semibold" panose="020B0702040204020203" pitchFamily="34" charset="0"/>
+            </a:endParaRPr>
           </a:p>
           <a:p>
             <a:pPr marL="335280" indent="-335280" algn="l">
@@ -4332,20 +6230,23 @@
                 <a:spcPct val="133000"/>
               </a:lnSpc>
               <a:buSzPct val="100000"/>
-              <a:buChar char="•"/>
+              <a:buFont typeface="Wingdings" panose="05000000000000000000" pitchFamily="2" charset="2"/>
+              <a:buChar char="q"/>
             </a:pPr>
             <a:r>
               <a:rPr lang="en-US" sz="1650" dirty="0">
                 <a:solidFill>
                   <a:srgbClr val="E5E0DF"/>
                 </a:solidFill>
-                <a:latin typeface="Barlow" pitchFamily="34" charset="0"/>
+                <a:latin typeface="Segoe UI Semibold" panose="020B0702040204020203" pitchFamily="34" charset="0"/>
                 <a:ea typeface="Barlow" pitchFamily="34" charset="-122"/>
                 <a:cs typeface="Barlow" pitchFamily="34" charset="-120"/>
               </a:rPr>
               <a:t>Kategóriák, könyvjelzők, követések</a:t>
             </a:r>
-            <a:endParaRPr lang="en-US" sz="1650" dirty="0"/>
+            <a:endParaRPr lang="en-US" sz="1650" dirty="0">
+              <a:latin typeface="Segoe UI Semibold" panose="020B0702040204020203" pitchFamily="34" charset="0"/>
+            </a:endParaRPr>
           </a:p>
           <a:p>
             <a:pPr marL="335280" indent="-335280" algn="l">
@@ -4353,20 +6254,137 @@
                 <a:spcPct val="133000"/>
               </a:lnSpc>
               <a:buSzPct val="100000"/>
-              <a:buChar char="•"/>
+              <a:buFont typeface="Wingdings" panose="05000000000000000000" pitchFamily="2" charset="2"/>
+              <a:buChar char="q"/>
             </a:pPr>
             <a:r>
               <a:rPr lang="en-US" sz="1650" dirty="0">
                 <a:solidFill>
                   <a:srgbClr val="E5E0DF"/>
                 </a:solidFill>
-                <a:latin typeface="Barlow" pitchFamily="34" charset="0"/>
+                <a:latin typeface="Segoe UI Semibold" panose="020B0702040204020203" pitchFamily="34" charset="0"/>
                 <a:ea typeface="Barlow" pitchFamily="34" charset="-122"/>
                 <a:cs typeface="Barlow" pitchFamily="34" charset="-120"/>
               </a:rPr>
-              <a:t>Programok és események</a:t>
+              <a:t>Programok </a:t>
             </a:r>
-            <a:endParaRPr lang="en-US" sz="1650" dirty="0"/>
+            <a:r>
+              <a:rPr lang="en-US" sz="1650" dirty="0" err="1">
+                <a:solidFill>
+                  <a:srgbClr val="E5E0DF"/>
+                </a:solidFill>
+                <a:latin typeface="Segoe UI Semibold" panose="020B0702040204020203" pitchFamily="34" charset="0"/>
+                <a:ea typeface="Barlow" pitchFamily="34" charset="-122"/>
+                <a:cs typeface="Barlow" pitchFamily="34" charset="-120"/>
+              </a:rPr>
+              <a:t>és</a:t>
+            </a:r>
+            <a:r>
+              <a:rPr lang="en-US" sz="1650" dirty="0">
+                <a:solidFill>
+                  <a:srgbClr val="E5E0DF"/>
+                </a:solidFill>
+                <a:latin typeface="Segoe UI Semibold" panose="020B0702040204020203" pitchFamily="34" charset="0"/>
+                <a:ea typeface="Barlow" pitchFamily="34" charset="-122"/>
+                <a:cs typeface="Barlow" pitchFamily="34" charset="-120"/>
+              </a:rPr>
+              <a:t> </a:t>
+            </a:r>
+            <a:r>
+              <a:rPr lang="en-US" sz="1650" dirty="0" err="1">
+                <a:solidFill>
+                  <a:srgbClr val="E5E0DF"/>
+                </a:solidFill>
+                <a:latin typeface="Segoe UI Semibold" panose="020B0702040204020203" pitchFamily="34" charset="0"/>
+                <a:ea typeface="Barlow" pitchFamily="34" charset="-122"/>
+                <a:cs typeface="Barlow" pitchFamily="34" charset="-120"/>
+              </a:rPr>
+              <a:t>események</a:t>
+            </a:r>
+            <a:endParaRPr lang="hu-HU" sz="1650" dirty="0">
+              <a:solidFill>
+                <a:srgbClr val="E5E0DF"/>
+              </a:solidFill>
+              <a:latin typeface="Segoe UI Semibold" panose="020B0702040204020203" pitchFamily="34" charset="0"/>
+              <a:ea typeface="Barlow" pitchFamily="34" charset="-122"/>
+              <a:cs typeface="Barlow" pitchFamily="34" charset="-120"/>
+            </a:endParaRPr>
+          </a:p>
+          <a:p>
+            <a:pPr marL="335280" indent="-335280" algn="l">
+              <a:lnSpc>
+                <a:spcPct val="133000"/>
+              </a:lnSpc>
+              <a:buSzPct val="100000"/>
+              <a:buFont typeface="Wingdings" panose="05000000000000000000" pitchFamily="2" charset="2"/>
+              <a:buChar char="q"/>
+            </a:pPr>
+            <a:endParaRPr lang="hu-HU" sz="1650" dirty="0">
+              <a:solidFill>
+                <a:srgbClr val="E5E0DF"/>
+              </a:solidFill>
+              <a:latin typeface="Segoe UI Semibold" panose="020B0702040204020203" pitchFamily="34" charset="0"/>
+            </a:endParaRPr>
+          </a:p>
+          <a:p>
+            <a:pPr marL="335280" indent="-335280" algn="l">
+              <a:lnSpc>
+                <a:spcPct val="133000"/>
+              </a:lnSpc>
+              <a:buSzPct val="100000"/>
+              <a:buFont typeface="Wingdings" panose="05000000000000000000" pitchFamily="2" charset="2"/>
+              <a:buChar char="q"/>
+            </a:pPr>
+            <a:r>
+              <a:rPr lang="hu-HU" sz="1650" dirty="0">
+                <a:solidFill>
+                  <a:srgbClr val="E5E0DF"/>
+                </a:solidFill>
+                <a:latin typeface="Segoe UI Semibold" panose="020B0702040204020203" pitchFamily="34" charset="0"/>
+              </a:rPr>
+              <a:t>Egyelőre ideiglenes a nagy része</a:t>
+            </a:r>
+          </a:p>
+          <a:p>
+            <a:pPr marL="335280" indent="-335280" algn="l">
+              <a:lnSpc>
+                <a:spcPct val="133000"/>
+              </a:lnSpc>
+              <a:buSzPct val="100000"/>
+              <a:buFont typeface="Wingdings" panose="05000000000000000000" pitchFamily="2" charset="2"/>
+              <a:buChar char="q"/>
+            </a:pPr>
+            <a:r>
+              <a:rPr lang="hu-HU" sz="1650" dirty="0">
+                <a:solidFill>
+                  <a:srgbClr val="E5E0DF"/>
+                </a:solidFill>
+                <a:latin typeface="Segoe UI Semibold" panose="020B0702040204020203" pitchFamily="34" charset="0"/>
+              </a:rPr>
+              <a:t>Struktúra megvan</a:t>
+            </a:r>
+          </a:p>
+          <a:p>
+            <a:pPr marL="335280" indent="-335280" algn="l">
+              <a:lnSpc>
+                <a:spcPct val="133000"/>
+              </a:lnSpc>
+              <a:buSzPct val="100000"/>
+              <a:buFont typeface="Wingdings" panose="05000000000000000000" pitchFamily="2" charset="2"/>
+              <a:buChar char="q"/>
+            </a:pPr>
+            <a:r>
+              <a:rPr lang="hu-HU" sz="1650" dirty="0">
+                <a:solidFill>
+                  <a:srgbClr val="E5E0DF"/>
+                </a:solidFill>
+                <a:latin typeface="Segoe UI Semibold" panose="020B0702040204020203" pitchFamily="34" charset="0"/>
+              </a:rPr>
+              <a:t>Adatok gyűjtése</a:t>
+            </a:r>
+            <a:endParaRPr lang="en-US" sz="1650" dirty="0">
+              <a:latin typeface="Segoe UI Semibold" panose="020B0702040204020203" pitchFamily="34" charset="0"/>
+            </a:endParaRPr>
           </a:p>
         </p:txBody>
       </p:sp>
@@ -4435,6 +6453,641 @@
   <p:clrMapOvr>
     <a:masterClrMapping/>
   </p:clrMapOvr>
+  <mc:AlternateContent xmlns:mc="http://schemas.openxmlformats.org/markup-compatibility/2006">
+    <mc:Choice xmlns:p15="http://schemas.microsoft.com/office/powerpoint/2012/main" Requires="p15">
+      <p:transition xmlns:p14="http://schemas.microsoft.com/office/powerpoint/2010/main" spd="slow" p14:dur="2000">
+        <p15:prstTrans prst="fallOver"/>
+      </p:transition>
+    </mc:Choice>
+    <mc:Fallback>
+      <p:transition spd="slow">
+        <p:fade/>
+      </p:transition>
+    </mc:Fallback>
+  </mc:AlternateContent>
+  <p:timing>
+    <p:tnLst>
+      <p:par>
+        <p:cTn id="1" dur="indefinite" restart="never" nodeType="tmRoot">
+          <p:childTnLst>
+            <p:seq concurrent="1" nextAc="seek">
+              <p:cTn id="2" dur="indefinite" nodeType="mainSeq">
+                <p:childTnLst>
+                  <p:par>
+                    <p:cTn id="3" fill="hold">
+                      <p:stCondLst>
+                        <p:cond delay="indefinite"/>
+                        <p:cond evt="onBegin" delay="0">
+                          <p:tn val="2"/>
+                        </p:cond>
+                      </p:stCondLst>
+                      <p:childTnLst>
+                        <p:par>
+                          <p:cTn id="4" fill="hold">
+                            <p:stCondLst>
+                              <p:cond delay="0"/>
+                            </p:stCondLst>
+                            <p:childTnLst>
+                              <p:par>
+                                <p:cTn id="5" presetID="0" presetClass="path" presetSubtype="0" accel="50000" decel="50000" fill="hold" nodeType="afterEffect">
+                                  <p:stCondLst>
+                                    <p:cond delay="0"/>
+                                  </p:stCondLst>
+                                  <p:childTnLst>
+                                    <p:animMotion origin="layout" path="M 0.00235 0.00116 L 0.00235 0.00116 C -0.00312 0.0007 -0.00846 0.00047 -0.0138 -0.00023 C -0.01719 -0.00069 -0.02461 -0.00439 -0.02682 -0.00532 C -0.02982 -0.00671 -0.03268 -0.0081 -0.03554 -0.00925 C -0.03776 -0.01018 -0.03997 -0.01087 -0.04219 -0.0118 C -0.04479 -0.01296 -0.04739 -0.01481 -0.05013 -0.01574 C -0.05429 -0.01736 -0.05846 -0.01828 -0.0625 -0.01967 C -0.07708 -0.02916 -0.06445 -0.02199 -0.0763 -0.02615 C -0.07956 -0.02708 -0.08255 -0.02939 -0.08581 -0.03009 C -0.10351 -0.03379 -0.11549 -0.03472 -0.13164 -0.03634 C -0.14622 -0.03611 -0.16081 -0.03611 -0.17539 -0.03518 C -0.17929 -0.03495 -0.1832 -0.03333 -0.18698 -0.03263 L -0.20013 -0.03009 C -0.20794 -0.02824 -0.21575 -0.02708 -0.22344 -0.02476 C -0.23554 -0.02152 -0.2457 -0.01759 -0.2569 -0.00925 C -0.2612 -0.00601 -0.26888 0.00209 -0.27291 0.00764 C -0.28698 0.02593 -0.28698 0.02709 -0.30065 0.04908 C -0.30299 0.05278 -0.31614 0.07362 -0.31732 0.07616 C -0.33789 0.11713 -0.31054 0.06181 -0.3276 0.09815 C -0.32969 0.10255 -0.33229 0.10649 -0.33411 0.11112 C -0.33594 0.11551 -0.33685 0.12084 -0.33854 0.12524 C -0.35013 0.15741 -0.34349 0.13704 -0.35456 0.16297 C -0.35833 0.17176 -0.36185 0.18102 -0.36549 0.19005 C -0.36719 0.19445 -0.36901 0.19838 -0.37057 0.20301 C -0.372 0.20741 -0.37317 0.21181 -0.37487 0.21598 C -0.3832 0.23612 -0.38958 0.24445 -0.39674 0.26783 C -0.39987 0.27801 -0.40299 0.28843 -0.40625 0.29885 C -0.4069 0.30093 -0.40794 0.30278 -0.40846 0.30533 C -0.40859 0.30649 -0.40885 0.30788 -0.40911 0.30926 C -0.41028 0.31436 -0.41172 0.31945 -0.41276 0.32477 C -0.4164 0.34375 -0.41367 0.32871 -0.4164 0.34676 C -0.41849 0.36042 -0.41745 0.3507 -0.41862 0.36343 C -0.41888 0.37223 -0.41914 0.38079 -0.41927 0.38936 C -0.41966 0.40116 -0.41966 0.41274 -0.42005 0.42431 C -0.42044 0.43635 -0.42018 0.43403 -0.42148 0.44121 C -0.42174 0.44468 -0.42187 0.44815 -0.42226 0.45163 C -0.42278 0.45649 -0.42487 0.46413 -0.42591 0.46829 C -0.42773 0.49445 -0.42604 0.46829 -0.42734 0.52153 C -0.42747 0.52755 -0.42786 0.53357 -0.42799 0.53959 C -0.42786 0.55417 -0.42799 0.56899 -0.42734 0.58357 C -0.42669 0.59584 -0.42018 0.62107 -0.41862 0.62894 C -0.41758 0.63357 -0.41679 0.63843 -0.41562 0.64306 C -0.41419 0.64931 -0.41237 0.65533 -0.41054 0.66135 C -0.40664 0.67477 -0.40182 0.6882 -0.39674 0.7 C -0.39453 0.70533 -0.39245 0.71065 -0.39023 0.71551 C -0.38737 0.72176 -0.38424 0.72755 -0.38151 0.7338 C -0.37969 0.7375 -0.37812 0.74167 -0.3763 0.74538 C -0.37344 0.75163 -0.36875 0.76088 -0.36549 0.76598 C -0.36341 0.76945 -0.3612 0.77246 -0.35885 0.77524 C -0.35247 0.78241 -0.34505 0.78565 -0.33776 0.78936 C -0.33489 0.79098 -0.3319 0.79167 -0.32903 0.79329 C -0.3125 0.80209 -0.31836 0.80163 -0.29987 0.80741 C -0.29583 0.8088 -0.29166 0.80903 -0.2875 0.81019 C -0.28268 0.81135 -0.27786 0.81297 -0.27291 0.81389 C -0.26354 0.81598 -0.24036 0.81644 -0.23581 0.81667 C -0.23086 0.8176 -0.21706 0.82084 -0.21185 0.82038 C -0.20013 0.81945 -0.18854 0.8169 -0.17682 0.81528 C -0.17096 0.81204 -0.16341 0.80834 -0.15794 0.80371 C -0.14752 0.79468 -0.14297 0.78635 -0.13242 0.77524 C -0.12995 0.77246 -0.12747 0.77038 -0.12513 0.76737 C -0.11172 0.7507 -0.12383 0.76389 -0.11133 0.74538 C -0.10781 0.74028 -0.1039 0.73635 -0.10039 0.73102 C -0.09492 0.72292 -0.08971 0.71389 -0.08437 0.70533 C -0.08073 0.69954 -0.07643 0.69514 -0.07344 0.68843 C -0.06393 0.66621 -0.06054 0.65996 -0.05312 0.63658 C -0.05 0.62686 -0.04427 0.60695 -0.04427 0.60695 C -0.04388 0.60255 -0.04323 0.59838 -0.04284 0.59399 C -0.04075 0.56945 -0.04466 0.57987 -0.03698 0.53959 C -0.03581 0.53311 -0.03476 0.52663 -0.03346 0.52014 C -0.03203 0.51389 -0.03021 0.50834 -0.02903 0.50209 C -0.02617 0.48658 -0.0263 0.4794 -0.02461 0.46459 C -0.02396 0.45834 -0.02317 0.45232 -0.02252 0.4463 C -0.022 0.43635 -0.02122 0.42107 -0.02096 0.41135 C -0.0207 0.39676 -0.0207 0.38195 -0.02031 0.36737 C -0.02018 0.36528 -0.01979 0.3632 -0.01953 0.36088 C -0.01927 0.35741 -0.01914 0.35394 -0.01888 0.35047 C -0.01849 0.347 -0.01784 0.34375 -0.01732 0.34028 C -0.01706 0.33797 -0.01692 0.33588 -0.01666 0.3338 C -0.01653 0.33288 -0.01601 0.32431 -0.01523 0.322 C -0.01458 0.32061 -0.01302 0.31829 -0.01302 0.31829 L -0.01302 0.31829 C -0.01328 0.30394 -0.01328 0.28982 -0.0138 0.27547 C -0.01419 0.2595 -0.01471 0.24352 -0.01588 0.22755 C -0.01614 0.22454 -0.01614 0.22153 -0.01666 0.21852 C -0.01862 0.20811 -0.0181 0.21528 -0.02031 0.2095 C -0.02083 0.20788 -0.02122 0.20602 -0.02174 0.2044 C -0.02304 0.20024 -0.02539 0.19352 -0.02682 0.19005 C -0.02969 0.18311 -0.0332 0.17686 -0.03554 0.16945 C -0.03685 0.16551 -0.03776 0.16135 -0.03919 0.15764 C -0.0444 0.14468 -0.05221 0.12917 -0.05885 0.11899 C -0.06224 0.11366 -0.06549 0.10811 -0.06914 0.10325 C -0.07409 0.09653 -0.0789 0.08936 -0.08437 0.08403 C -0.08984 0.07848 -0.09583 0.07454 -0.10182 0.07107 C -0.11133 0.06551 -0.12122 0.06482 -0.13099 0.0632 C -0.14557 0.06505 -0.16015 0.06551 -0.17461 0.06829 C -0.19388 0.07223 -0.22969 0.10186 -0.23945 0.10857 C -0.24622 0.11297 -0.25364 0.11505 -0.25989 0.12153 C -0.28424 0.14653 -0.28893 0.14792 -0.30859 0.17848 C -0.31901 0.19445 -0.32539 0.21922 -0.3319 0.23936 C -0.33724 0.25556 -0.34245 0.27223 -0.34791 0.28843 C -0.35182 0.3 -0.35742 0.30973 -0.36028 0.322 C -0.37174 0.36945 -0.36692 0.34584 -0.37487 0.39329 C -0.37604 0.41042 -0.37942 0.45602 -0.37929 0.47477 C -0.37916 0.48658 -0.37838 0.49838 -0.37708 0.50973 C -0.37578 0.5213 -0.37396 0.53264 -0.37122 0.54352 C -0.36575 0.56551 -0.35716 0.59607 -0.34726 0.61598 C -0.33802 0.63403 -0.3289 0.65255 -0.31888 0.66899 C -0.31419 0.67663 -0.30846 0.68797 -0.30208 0.69237 C -0.29987 0.69375 -0.26849 0.71181 -0.25911 0.71551 C -0.25377 0.71783 -0.24844 0.71852 -0.2431 0.72084 C -0.19245 0.7419 -0.2664 0.71667 -0.19648 0.73889 C -0.1806 0.73681 -0.16588 0.73889 -0.1513 0.72593 C -0.147 0.722 -0.14323 0.71621 -0.13971 0.71042 C -0.11575 0.67107 -0.12578 0.68496 -0.10846 0.64306 C -0.10377 0.63195 -0.09804 0.62223 -0.09388 0.61065 C -0.08906 0.59769 -0.08515 0.58357 -0.08151 0.56945 C -0.05573 0.47153 -0.0612 0.50116 -0.05156 0.42825 C -0.05065 0.37408 -0.04935 0.37524 -0.05742 0.30788 C -0.05859 0.29792 -0.06159 0.28866 -0.06393 0.2794 C -0.06523 0.27454 -0.06666 0.26968 -0.06836 0.26505 C -0.07213 0.2551 -0.0776 0.24538 -0.08294 0.23797 C -0.08685 0.23241 -0.09075 0.22639 -0.09531 0.22246 C -0.10104 0.2176 -0.10729 0.21459 -0.11354 0.21204 C -0.13164 0.20463 -0.14961 0.19375 -0.1681 0.1926 L -0.18919 0.19144 C -0.21081 0.20325 -0.21549 0.20325 -0.23515 0.225 C -0.24088 0.23125 -0.24609 0.23913 -0.25117 0.247 C -0.2612 0.26274 -0.27044 0.28172 -0.27812 0.30139 C -0.28203 0.31158 -0.29414 0.34538 -0.29844 0.36227 C -0.30091 0.37153 -0.30286 0.38125 -0.30495 0.39075 C -0.30625 0.40371 -0.30833 0.41644 -0.30859 0.42963 C -0.30885 0.43982 -0.30234 0.46019 -0.30065 0.46713 C -0.29935 0.47269 -0.29831 0.47848 -0.297 0.4838 C -0.29388 0.49653 -0.2888 0.51181 -0.28463 0.52269 C -0.2819 0.52987 -0.27916 0.53727 -0.27591 0.54352 C -0.27422 0.54653 -0.26836 0.54908 -0.2664 0.55 C -0.25221 0.55649 -0.25755 0.5544 -0.2431 0.55764 C -0.23659 0.5551 -0.22942 0.55533 -0.22344 0.55 C -0.21862 0.54538 -0.21497 0.53704 -0.21185 0.52917 C -0.20625 0.51575 -0.2026 0.50811 -0.1987 0.49167 C -0.19622 0.48172 -0.19479 0.47107 -0.19284 0.46065 C -0.19153 0.44491 -0.19036 0.43588 -0.19062 0.41922 C -0.19101 0.39931 -0.18854 0.39977 -0.19284 0.39977 " pathEditMode="relative" ptsTypes="AAAAAAAAAAAAAAAAAAAAAAAAAAAAAAAAAAAAAAAAAAAAAAAAAAAAAAAAAAAAAAAAAAAAAAAAAAAAAAAAAAAAAAAAAAAAAAAAAAAAAAAAAAAAAAAAAAAAAAAAAAAAAAAAAAAAAAAAAAAAAAAA">
+                                      <p:cBhvr>
+                                        <p:cTn id="6" dur="5000" fill="hold"/>
+                                        <p:tgtEl>
+                                          <p:spTgt spid="6"/>
+                                        </p:tgtEl>
+                                        <p:attrNameLst>
+                                          <p:attrName>ppt_x</p:attrName>
+                                          <p:attrName>ppt_y</p:attrName>
+                                        </p:attrNameLst>
+                                      </p:cBhvr>
+                                    </p:animMotion>
+                                  </p:childTnLst>
+                                </p:cTn>
+                              </p:par>
+                              <p:par>
+                                <p:cTn id="7" presetID="8" presetClass="emph" presetSubtype="0" fill="hold" nodeType="withEffect">
+                                  <p:stCondLst>
+                                    <p:cond delay="0"/>
+                                  </p:stCondLst>
+                                  <p:childTnLst>
+                                    <p:animRot by="240000000">
+                                      <p:cBhvr>
+                                        <p:cTn id="8" dur="5000" fill="hold"/>
+                                        <p:tgtEl>
+                                          <p:spTgt spid="6"/>
+                                        </p:tgtEl>
+                                        <p:attrNameLst>
+                                          <p:attrName>r</p:attrName>
+                                        </p:attrNameLst>
+                                      </p:cBhvr>
+                                    </p:animRot>
+                                  </p:childTnLst>
+                                </p:cTn>
+                              </p:par>
+                            </p:childTnLst>
+                          </p:cTn>
+                        </p:par>
+                        <p:par>
+                          <p:cTn id="9" fill="hold">
+                            <p:stCondLst>
+                              <p:cond delay="5000"/>
+                            </p:stCondLst>
+                            <p:childTnLst>
+                              <p:par>
+                                <p:cTn id="10" presetID="26" presetClass="exit" presetSubtype="0" fill="hold" nodeType="afterEffect">
+                                  <p:stCondLst>
+                                    <p:cond delay="0"/>
+                                  </p:stCondLst>
+                                  <p:childTnLst>
+                                    <p:animEffect transition="out" filter="wipe(down)">
+                                      <p:cBhvr>
+                                        <p:cTn id="11" dur="180" accel="50000">
+                                          <p:stCondLst>
+                                            <p:cond delay="1820"/>
+                                          </p:stCondLst>
+                                        </p:cTn>
+                                        <p:tgtEl>
+                                          <p:spTgt spid="6"/>
+                                        </p:tgtEl>
+                                      </p:cBhvr>
+                                    </p:animEffect>
+                                    <p:anim calcmode="lin" valueType="num">
+                                      <p:cBhvr>
+                                        <p:cTn id="12" dur="1822" tmFilter="0,0; 0.14,0.31; 0.43,0.73; 0.71,0.91; 1.0,1.0">
+                                          <p:stCondLst>
+                                            <p:cond delay="0"/>
+                                          </p:stCondLst>
+                                        </p:cTn>
+                                        <p:tgtEl>
+                                          <p:spTgt spid="6"/>
+                                        </p:tgtEl>
+                                        <p:attrNameLst>
+                                          <p:attrName>ppt_x</p:attrName>
+                                        </p:attrNameLst>
+                                      </p:cBhvr>
+                                      <p:tavLst>
+                                        <p:tav tm="0">
+                                          <p:val>
+                                            <p:strVal val="ppt_x"/>
+                                          </p:val>
+                                        </p:tav>
+                                        <p:tav tm="100000">
+                                          <p:val>
+                                            <p:strVal val="#ppt_x+0.25"/>
+                                          </p:val>
+                                        </p:tav>
+                                      </p:tavLst>
+                                    </p:anim>
+                                    <p:anim calcmode="lin" valueType="num">
+                                      <p:cBhvr>
+                                        <p:cTn id="13" dur="178">
+                                          <p:stCondLst>
+                                            <p:cond delay="1822"/>
+                                          </p:stCondLst>
+                                        </p:cTn>
+                                        <p:tgtEl>
+                                          <p:spTgt spid="6"/>
+                                        </p:tgtEl>
+                                        <p:attrNameLst>
+                                          <p:attrName>ppt_x</p:attrName>
+                                        </p:attrNameLst>
+                                      </p:cBhvr>
+                                      <p:tavLst>
+                                        <p:tav tm="0">
+                                          <p:val>
+                                            <p:strVal val="ppt_x"/>
+                                          </p:val>
+                                        </p:tav>
+                                        <p:tav tm="100000">
+                                          <p:val>
+                                            <p:strVal val="ppt_x"/>
+                                          </p:val>
+                                        </p:tav>
+                                      </p:tavLst>
+                                    </p:anim>
+                                    <p:anim calcmode="lin" valueType="num">
+                                      <p:cBhvr>
+                                        <p:cTn id="14" dur="664" tmFilter="0.0,0.0;0.25,0.07;0.50,0.2;0.75,0.467;1.0,1.0">
+                                          <p:stCondLst>
+                                            <p:cond delay="0"/>
+                                          </p:stCondLst>
+                                        </p:cTn>
+                                        <p:tgtEl>
+                                          <p:spTgt spid="6"/>
+                                        </p:tgtEl>
+                                        <p:attrNameLst>
+                                          <p:attrName>ppt_y</p:attrName>
+                                        </p:attrNameLst>
+                                      </p:cBhvr>
+                                      <p:tavLst>
+                                        <p:tav tm="0">
+                                          <p:val>
+                                            <p:strVal val="ppt_y"/>
+                                          </p:val>
+                                        </p:tav>
+                                        <p:tav tm="5000">
+                                          <p:val>
+                                            <p:strVal val="ppt_y+0.026"/>
+                                          </p:val>
+                                        </p:tav>
+                                        <p:tav tm="10000">
+                                          <p:val>
+                                            <p:strVal val="ppt_y+0.052"/>
+                                          </p:val>
+                                        </p:tav>
+                                        <p:tav tm="15000">
+                                          <p:val>
+                                            <p:strVal val="ppt_y+0.078"/>
+                                          </p:val>
+                                        </p:tav>
+                                        <p:tav tm="20000">
+                                          <p:val>
+                                            <p:strVal val="ppt_y+0.103"/>
+                                          </p:val>
+                                        </p:tav>
+                                        <p:tav tm="30000">
+                                          <p:val>
+                                            <p:strVal val="ppt_y+0.151"/>
+                                          </p:val>
+                                        </p:tav>
+                                        <p:tav tm="40000">
+                                          <p:val>
+                                            <p:strVal val="ppt_y+0.196"/>
+                                          </p:val>
+                                        </p:tav>
+                                        <p:tav tm="50000">
+                                          <p:val>
+                                            <p:strVal val="ppt_y+0.236"/>
+                                          </p:val>
+                                        </p:tav>
+                                        <p:tav tm="60000">
+                                          <p:val>
+                                            <p:strVal val="ppt_y+0.270"/>
+                                          </p:val>
+                                        </p:tav>
+                                        <p:tav tm="70000">
+                                          <p:val>
+                                            <p:strVal val="ppt_y+0.297"/>
+                                          </p:val>
+                                        </p:tav>
+                                        <p:tav tm="80000">
+                                          <p:val>
+                                            <p:strVal val="ppt_y+0.317"/>
+                                          </p:val>
+                                        </p:tav>
+                                        <p:tav tm="90000">
+                                          <p:val>
+                                            <p:strVal val="ppt_y+0.329"/>
+                                          </p:val>
+                                        </p:tav>
+                                        <p:tav tm="100000">
+                                          <p:val>
+                                            <p:strVal val="ppt_y+0.333"/>
+                                          </p:val>
+                                        </p:tav>
+                                      </p:tavLst>
+                                    </p:anim>
+                                    <p:anim calcmode="lin" valueType="num">
+                                      <p:cBhvr>
+                                        <p:cTn id="15" dur="664" tmFilter="0, 0; 0.125,0.2665; 0.25,0.4; 0.375,0.465; 0.5,0.5;  0.625,0.535; 0.75,0.6; 0.875,0.7335; 1,1">
+                                          <p:stCondLst>
+                                            <p:cond delay="664"/>
+                                          </p:stCondLst>
+                                        </p:cTn>
+                                        <p:tgtEl>
+                                          <p:spTgt spid="6"/>
+                                        </p:tgtEl>
+                                        <p:attrNameLst>
+                                          <p:attrName>ppt_y</p:attrName>
+                                        </p:attrNameLst>
+                                      </p:cBhvr>
+                                      <p:tavLst>
+                                        <p:tav tm="0">
+                                          <p:val>
+                                            <p:strVal val="ppt_y"/>
+                                          </p:val>
+                                        </p:tav>
+                                        <p:tav tm="10000">
+                                          <p:val>
+                                            <p:strVal val="ppt_y-0.034"/>
+                                          </p:val>
+                                        </p:tav>
+                                        <p:tav tm="20000">
+                                          <p:val>
+                                            <p:strVal val="ppt_y-0.065"/>
+                                          </p:val>
+                                        </p:tav>
+                                        <p:tav tm="30000">
+                                          <p:val>
+                                            <p:strVal val="ppt_y-0.090"/>
+                                          </p:val>
+                                        </p:tav>
+                                        <p:tav tm="40000">
+                                          <p:val>
+                                            <p:strVal val="ppt_y-0.106"/>
+                                          </p:val>
+                                        </p:tav>
+                                        <p:tav tm="50000">
+                                          <p:val>
+                                            <p:strVal val="ppt_y-0.111"/>
+                                          </p:val>
+                                        </p:tav>
+                                        <p:tav tm="60000">
+                                          <p:val>
+                                            <p:strVal val="ppt_y-0.106"/>
+                                          </p:val>
+                                        </p:tav>
+                                        <p:tav tm="70000">
+                                          <p:val>
+                                            <p:strVal val="ppt_y-0.090"/>
+                                          </p:val>
+                                        </p:tav>
+                                        <p:tav tm="80000">
+                                          <p:val>
+                                            <p:strVal val="ppt_y-0.065"/>
+                                          </p:val>
+                                        </p:tav>
+                                        <p:tav tm="90000">
+                                          <p:val>
+                                            <p:strVal val="ppt_y-0.034"/>
+                                          </p:val>
+                                        </p:tav>
+                                        <p:tav tm="100000">
+                                          <p:val>
+                                            <p:strVal val="ppt_y"/>
+                                          </p:val>
+                                        </p:tav>
+                                      </p:tavLst>
+                                    </p:anim>
+                                    <p:anim calcmode="lin" valueType="num">
+                                      <p:cBhvr>
+                                        <p:cTn id="16" dur="332" tmFilter="0, 0; 0.125,0.2665; 0.25,0.4; 0.375,0.465; 0.5,0.5;  0.625,0.535; 0.75,0.6; 0.875,0.7335; 1,1">
+                                          <p:stCondLst>
+                                            <p:cond delay="1324"/>
+                                          </p:stCondLst>
+                                        </p:cTn>
+                                        <p:tgtEl>
+                                          <p:spTgt spid="6"/>
+                                        </p:tgtEl>
+                                        <p:attrNameLst>
+                                          <p:attrName>ppt_y</p:attrName>
+                                        </p:attrNameLst>
+                                      </p:cBhvr>
+                                      <p:tavLst>
+                                        <p:tav tm="0">
+                                          <p:val>
+                                            <p:strVal val="ppt_y"/>
+                                          </p:val>
+                                        </p:tav>
+                                        <p:tav tm="10000">
+                                          <p:val>
+                                            <p:strVal val="ppt_y-0.011"/>
+                                          </p:val>
+                                        </p:tav>
+                                        <p:tav tm="20000">
+                                          <p:val>
+                                            <p:strVal val="ppt_y-0.022"/>
+                                          </p:val>
+                                        </p:tav>
+                                        <p:tav tm="30000">
+                                          <p:val>
+                                            <p:strVal val="ppt_y-0.030"/>
+                                          </p:val>
+                                        </p:tav>
+                                        <p:tav tm="40000">
+                                          <p:val>
+                                            <p:strVal val="ppt_y-0.035"/>
+                                          </p:val>
+                                        </p:tav>
+                                        <p:tav tm="50000">
+                                          <p:val>
+                                            <p:strVal val="ppt_y-0.037"/>
+                                          </p:val>
+                                        </p:tav>
+                                        <p:tav tm="60000">
+                                          <p:val>
+                                            <p:strVal val="ppt_y-0.035"/>
+                                          </p:val>
+                                        </p:tav>
+                                        <p:tav tm="70000">
+                                          <p:val>
+                                            <p:strVal val="ppt_y-0.030"/>
+                                          </p:val>
+                                        </p:tav>
+                                        <p:tav tm="80000">
+                                          <p:val>
+                                            <p:strVal val="ppt_y-0.022"/>
+                                          </p:val>
+                                        </p:tav>
+                                        <p:tav tm="90000">
+                                          <p:val>
+                                            <p:strVal val="ppt_y-0.011"/>
+                                          </p:val>
+                                        </p:tav>
+                                        <p:tav tm="100000">
+                                          <p:val>
+                                            <p:strVal val="ppt_y"/>
+                                          </p:val>
+                                        </p:tav>
+                                      </p:tavLst>
+                                    </p:anim>
+                                    <p:anim calcmode="lin" valueType="num">
+                                      <p:cBhvr>
+                                        <p:cTn id="17" dur="164" tmFilter="0, 0; 0.125,0.2665; 0.25,0.4; 0.375,0.465; 0.5,0.5;  0.625,0.535; 0.75,0.6; 0.875,0.7335; 1,1">
+                                          <p:stCondLst>
+                                            <p:cond delay="1656"/>
+                                          </p:stCondLst>
+                                        </p:cTn>
+                                        <p:tgtEl>
+                                          <p:spTgt spid="6"/>
+                                        </p:tgtEl>
+                                        <p:attrNameLst>
+                                          <p:attrName>ppt_y</p:attrName>
+                                        </p:attrNameLst>
+                                      </p:cBhvr>
+                                      <p:tavLst>
+                                        <p:tav tm="0">
+                                          <p:val>
+                                            <p:strVal val="ppt_y"/>
+                                          </p:val>
+                                        </p:tav>
+                                        <p:tav tm="10000">
+                                          <p:val>
+                                            <p:strVal val="ppt_y-0.004"/>
+                                          </p:val>
+                                        </p:tav>
+                                        <p:tav tm="20000">
+                                          <p:val>
+                                            <p:strVal val="ppt_y-0.007"/>
+                                          </p:val>
+                                        </p:tav>
+                                        <p:tav tm="30000">
+                                          <p:val>
+                                            <p:strVal val="ppt_y-0.010"/>
+                                          </p:val>
+                                        </p:tav>
+                                        <p:tav tm="40000">
+                                          <p:val>
+                                            <p:strVal val="ppt_y-0.012"/>
+                                          </p:val>
+                                        </p:tav>
+                                        <p:tav tm="50000">
+                                          <p:val>
+                                            <p:strVal val="ppt_y-0.0123"/>
+                                          </p:val>
+                                        </p:tav>
+                                        <p:tav tm="60000">
+                                          <p:val>
+                                            <p:strVal val="ppt_y-0.012"/>
+                                          </p:val>
+                                        </p:tav>
+                                        <p:tav tm="70000">
+                                          <p:val>
+                                            <p:strVal val="ppt_y-0.010"/>
+                                          </p:val>
+                                        </p:tav>
+                                        <p:tav tm="80000">
+                                          <p:val>
+                                            <p:strVal val="ppt_y-0.007"/>
+                                          </p:val>
+                                        </p:tav>
+                                        <p:tav tm="90000">
+                                          <p:val>
+                                            <p:strVal val="ppt_y-0.004"/>
+                                          </p:val>
+                                        </p:tav>
+                                        <p:tav tm="100000">
+                                          <p:val>
+                                            <p:strVal val="ppt_y"/>
+                                          </p:val>
+                                        </p:tav>
+                                      </p:tavLst>
+                                    </p:anim>
+                                    <p:anim calcmode="lin" valueType="num">
+                                      <p:cBhvr>
+                                        <p:cTn id="18" dur="180" accel="50000">
+                                          <p:stCondLst>
+                                            <p:cond delay="1820"/>
+                                          </p:stCondLst>
+                                        </p:cTn>
+                                        <p:tgtEl>
+                                          <p:spTgt spid="6"/>
+                                        </p:tgtEl>
+                                        <p:attrNameLst>
+                                          <p:attrName>ppt_y</p:attrName>
+                                        </p:attrNameLst>
+                                      </p:cBhvr>
+                                      <p:tavLst>
+                                        <p:tav tm="0">
+                                          <p:val>
+                                            <p:strVal val="ppt_y"/>
+                                          </p:val>
+                                        </p:tav>
+                                        <p:tav tm="100000">
+                                          <p:val>
+                                            <p:strVal val="ppt_y+ppt_h"/>
+                                          </p:val>
+                                        </p:tav>
+                                      </p:tavLst>
+                                    </p:anim>
+                                    <p:animScale>
+                                      <p:cBhvr>
+                                        <p:cTn id="19" dur="26">
+                                          <p:stCondLst>
+                                            <p:cond delay="620"/>
+                                          </p:stCondLst>
+                                        </p:cTn>
+                                        <p:tgtEl>
+                                          <p:spTgt spid="6"/>
+                                        </p:tgtEl>
+                                      </p:cBhvr>
+                                      <p:to x="100000" y="60000"/>
+                                    </p:animScale>
+                                    <p:animScale>
+                                      <p:cBhvr>
+                                        <p:cTn id="20" dur="166" decel="50000">
+                                          <p:stCondLst>
+                                            <p:cond delay="646"/>
+                                          </p:stCondLst>
+                                        </p:cTn>
+                                        <p:tgtEl>
+                                          <p:spTgt spid="6"/>
+                                        </p:tgtEl>
+                                      </p:cBhvr>
+                                      <p:to x="100000" y="100000"/>
+                                    </p:animScale>
+                                    <p:animScale>
+                                      <p:cBhvr>
+                                        <p:cTn id="21" dur="26">
+                                          <p:stCondLst>
+                                            <p:cond delay="1312"/>
+                                          </p:stCondLst>
+                                        </p:cTn>
+                                        <p:tgtEl>
+                                          <p:spTgt spid="6"/>
+                                        </p:tgtEl>
+                                      </p:cBhvr>
+                                      <p:to x="100000" y="80000"/>
+                                    </p:animScale>
+                                    <p:animScale>
+                                      <p:cBhvr>
+                                        <p:cTn id="22" dur="166" decel="50000">
+                                          <p:stCondLst>
+                                            <p:cond delay="1338"/>
+                                          </p:stCondLst>
+                                        </p:cTn>
+                                        <p:tgtEl>
+                                          <p:spTgt spid="6"/>
+                                        </p:tgtEl>
+                                      </p:cBhvr>
+                                      <p:to x="100000" y="100000"/>
+                                    </p:animScale>
+                                    <p:animScale>
+                                      <p:cBhvr>
+                                        <p:cTn id="23" dur="26">
+                                          <p:stCondLst>
+                                            <p:cond delay="1642"/>
+                                          </p:stCondLst>
+                                        </p:cTn>
+                                        <p:tgtEl>
+                                          <p:spTgt spid="6"/>
+                                        </p:tgtEl>
+                                      </p:cBhvr>
+                                      <p:to x="100000" y="90000"/>
+                                    </p:animScale>
+                                    <p:animScale>
+                                      <p:cBhvr>
+                                        <p:cTn id="24" dur="166" decel="50000">
+                                          <p:stCondLst>
+                                            <p:cond delay="1668"/>
+                                          </p:stCondLst>
+                                        </p:cTn>
+                                        <p:tgtEl>
+                                          <p:spTgt spid="6"/>
+                                        </p:tgtEl>
+                                      </p:cBhvr>
+                                      <p:to x="100000" y="100000"/>
+                                    </p:animScale>
+                                    <p:animScale>
+                                      <p:cBhvr>
+                                        <p:cTn id="25" dur="26">
+                                          <p:stCondLst>
+                                            <p:cond delay="1808"/>
+                                          </p:stCondLst>
+                                        </p:cTn>
+                                        <p:tgtEl>
+                                          <p:spTgt spid="6"/>
+                                        </p:tgtEl>
+                                      </p:cBhvr>
+                                      <p:to x="100000" y="95000"/>
+                                    </p:animScale>
+                                    <p:animScale>
+                                      <p:cBhvr>
+                                        <p:cTn id="26" dur="166" decel="50000">
+                                          <p:stCondLst>
+                                            <p:cond delay="1834"/>
+                                          </p:stCondLst>
+                                        </p:cTn>
+                                        <p:tgtEl>
+                                          <p:spTgt spid="6"/>
+                                        </p:tgtEl>
+                                      </p:cBhvr>
+                                      <p:to x="100000" y="100000"/>
+                                    </p:animScale>
+                                    <p:set>
+                                      <p:cBhvr>
+                                        <p:cTn id="27" dur="1" fill="hold">
+                                          <p:stCondLst>
+                                            <p:cond delay="1999"/>
+                                          </p:stCondLst>
+                                        </p:cTn>
+                                        <p:tgtEl>
+                                          <p:spTgt spid="6"/>
+                                        </p:tgtEl>
+                                        <p:attrNameLst>
+                                          <p:attrName>style.visibility</p:attrName>
+                                        </p:attrNameLst>
+                                      </p:cBhvr>
+                                      <p:to>
+                                        <p:strVal val="hidden"/>
+                                      </p:to>
+                                    </p:set>
+                                  </p:childTnLst>
+                                </p:cTn>
+                              </p:par>
+                            </p:childTnLst>
+                          </p:cTn>
+                        </p:par>
+                      </p:childTnLst>
+                    </p:cTn>
+                  </p:par>
+                </p:childTnLst>
+              </p:cTn>
+              <p:prevCondLst>
+                <p:cond evt="onPrev" delay="0">
+                  <p:tgtEl>
+                    <p:sldTgt/>
+                  </p:tgtEl>
+                </p:cond>
+              </p:prevCondLst>
+              <p:nextCondLst>
+                <p:cond evt="onNext" delay="0">
+                  <p:tgtEl>
+                    <p:sldTgt/>
+                  </p:tgtEl>
+                </p:cond>
+              </p:nextCondLst>
+            </p:seq>
+          </p:childTnLst>
+        </p:cTn>
+      </p:par>
+    </p:tnLst>
+  </p:timing>
 </p:sld>
 </file>
 
@@ -4487,13 +7140,15 @@
                 <a:solidFill>
                   <a:srgbClr val="FFFFFF"/>
                 </a:solidFill>
-                <a:latin typeface="Barlow Medium" pitchFamily="34" charset="0"/>
+                <a:latin typeface="Segoe UI Semibold" panose="020B0702040204020203" pitchFamily="34" charset="0"/>
                 <a:ea typeface="Barlow Medium" pitchFamily="34" charset="-122"/>
                 <a:cs typeface="Barlow Medium" pitchFamily="34" charset="-120"/>
               </a:rPr>
               <a:t>Jelenlegi állapot</a:t>
             </a:r>
-            <a:endParaRPr lang="en-US" sz="3650" dirty="0"/>
+            <a:endParaRPr lang="en-US" sz="3650" dirty="0">
+              <a:latin typeface="Segoe UI Semibold" panose="020B0702040204020203" pitchFamily="34" charset="0"/>
+            </a:endParaRPr>
           </a:p>
         </p:txBody>
       </p:sp>
@@ -4602,13 +7257,15 @@
                 <a:solidFill>
                   <a:srgbClr val="E5E0DF"/>
                 </a:solidFill>
-                <a:latin typeface="Barlow Medium" pitchFamily="34" charset="0"/>
+                <a:latin typeface="Segoe UI Semibold" panose="020B0702040204020203" pitchFamily="34" charset="0"/>
                 <a:ea typeface="Barlow Medium" pitchFamily="34" charset="-122"/>
                 <a:cs typeface="Barlow Medium" pitchFamily="34" charset="-120"/>
               </a:rPr>
               <a:t>Kész</a:t>
             </a:r>
-            <a:endParaRPr lang="en-US" sz="1800" dirty="0"/>
+            <a:endParaRPr lang="en-US" sz="1800" dirty="0">
+              <a:latin typeface="Segoe UI Semibold" panose="020B0702040204020203" pitchFamily="34" charset="0"/>
+            </a:endParaRPr>
           </a:p>
         </p:txBody>
       </p:sp>
@@ -4646,13 +7303,15 @@
                 <a:solidFill>
                   <a:srgbClr val="E5E0DF"/>
                 </a:solidFill>
-                <a:latin typeface="Barlow" pitchFamily="34" charset="0"/>
+                <a:latin typeface="Segoe UI Semibold" panose="020B0702040204020203" pitchFamily="34" charset="0"/>
                 <a:ea typeface="Barlow" pitchFamily="34" charset="-122"/>
                 <a:cs typeface="Barlow" pitchFamily="34" charset="-120"/>
               </a:rPr>
               <a:t>Funkcionális specifikáció, oldalstruktúra, UI-koncepció, adatbázis-terv</a:t>
             </a:r>
-            <a:endParaRPr lang="en-US" sz="1650" dirty="0"/>
+            <a:endParaRPr lang="en-US" sz="1650" dirty="0">
+              <a:latin typeface="Segoe UI Semibold" panose="020B0702040204020203" pitchFamily="34" charset="0"/>
+            </a:endParaRPr>
           </a:p>
         </p:txBody>
       </p:sp>
@@ -4756,13 +7415,15 @@
                 <a:solidFill>
                   <a:srgbClr val="E5E0DF"/>
                 </a:solidFill>
-                <a:latin typeface="Barlow Medium" pitchFamily="34" charset="0"/>
+                <a:latin typeface="Segoe UI Semibold" panose="020B0702040204020203" pitchFamily="34" charset="0"/>
                 <a:ea typeface="Barlow Medium" pitchFamily="34" charset="-122"/>
                 <a:cs typeface="Barlow Medium" pitchFamily="34" charset="-120"/>
               </a:rPr>
               <a:t>Következő lépés</a:t>
             </a:r>
-            <a:endParaRPr lang="en-US" sz="1800" dirty="0"/>
+            <a:endParaRPr lang="en-US" sz="1800" dirty="0">
+              <a:latin typeface="Segoe UI Semibold" panose="020B0702040204020203" pitchFamily="34" charset="0"/>
+            </a:endParaRPr>
           </a:p>
         </p:txBody>
       </p:sp>
@@ -4774,8 +7435,8 @@
         </p:nvSpPr>
         <p:spPr>
           <a:xfrm>
-            <a:off x="6305591" y="3802955"/>
-            <a:ext cx="4929461" cy="335756"/>
+            <a:off x="6305591" y="3802954"/>
+            <a:ext cx="4929461" cy="671513"/>
           </a:xfrm>
           <a:prstGeom prst="rect">
             <a:avLst/>
@@ -4787,24 +7448,47 @@
           <a:bodyPr wrap="none" lIns="0" tIns="0" rIns="0" bIns="0" rtlCol="0" anchor="t"/>
           <a:lstStyle/>
           <a:p>
-            <a:pPr marL="0" indent="0" algn="l">
+            <a:pPr marL="342900" indent="-342900" algn="l">
               <a:lnSpc>
                 <a:spcPct val="133000"/>
               </a:lnSpc>
-              <a:buNone/>
+              <a:buFont typeface="+mj-lt"/>
+              <a:buAutoNum type="arabicPeriod"/>
+            </a:pPr>
+            <a:r>
+              <a:rPr lang="hu-HU" sz="1650" dirty="0">
+                <a:solidFill>
+                  <a:srgbClr val="E5E0DF"/>
+                </a:solidFill>
+                <a:latin typeface="Segoe UI Semibold" panose="020B0702040204020203" pitchFamily="34" charset="0"/>
+                <a:ea typeface="Barlow" pitchFamily="34" charset="-122"/>
+                <a:cs typeface="Barlow" pitchFamily="34" charset="-120"/>
+              </a:rPr>
+              <a:t>Adatbázis véglegesítése</a:t>
+            </a:r>
+          </a:p>
+          <a:p>
+            <a:pPr marL="342900" indent="-342900" algn="l">
+              <a:lnSpc>
+                <a:spcPct val="133000"/>
+              </a:lnSpc>
+              <a:buFont typeface="+mj-lt"/>
+              <a:buAutoNum type="arabicPeriod"/>
             </a:pPr>
             <a:r>
               <a:rPr lang="en-US" sz="1650" dirty="0">
                 <a:solidFill>
                   <a:srgbClr val="E5E0DF"/>
                 </a:solidFill>
-                <a:latin typeface="Barlow" pitchFamily="34" charset="0"/>
+                <a:latin typeface="Segoe UI Semibold" panose="020B0702040204020203" pitchFamily="34" charset="0"/>
                 <a:ea typeface="Barlow" pitchFamily="34" charset="-122"/>
                 <a:cs typeface="Barlow" pitchFamily="34" charset="-120"/>
               </a:rPr>
               <a:t>Frontend és backend fejlesztés</a:t>
             </a:r>
-            <a:endParaRPr lang="en-US" sz="1650" dirty="0"/>
+            <a:endParaRPr lang="en-US" sz="1650" dirty="0">
+              <a:latin typeface="Segoe UI Semibold" panose="020B0702040204020203" pitchFamily="34" charset="0"/>
+            </a:endParaRPr>
           </a:p>
         </p:txBody>
       </p:sp>
@@ -4873,6 +7557,347 @@
   <p:clrMapOvr>
     <a:masterClrMapping/>
   </p:clrMapOvr>
+  <mc:AlternateContent xmlns:mc="http://schemas.openxmlformats.org/markup-compatibility/2006">
+    <mc:Choice xmlns:p15="http://schemas.microsoft.com/office/powerpoint/2012/main" Requires="p15">
+      <p:transition xmlns:p14="http://schemas.microsoft.com/office/powerpoint/2010/main" spd="slow" p14:dur="2000">
+        <p15:prstTrans prst="fallOver"/>
+      </p:transition>
+    </mc:Choice>
+    <mc:Fallback>
+      <p:transition spd="slow">
+        <p:fade/>
+      </p:transition>
+    </mc:Fallback>
+  </mc:AlternateContent>
+  <p:timing>
+    <p:tnLst>
+      <p:par>
+        <p:cTn id="1" dur="indefinite" restart="never" nodeType="tmRoot">
+          <p:childTnLst>
+            <p:seq concurrent="1" nextAc="seek">
+              <p:cTn id="2" dur="indefinite" nodeType="mainSeq">
+                <p:childTnLst>
+                  <p:par>
+                    <p:cTn id="3" fill="hold">
+                      <p:stCondLst>
+                        <p:cond delay="indefinite"/>
+                        <p:cond evt="onBegin" delay="0">
+                          <p:tn val="2"/>
+                        </p:cond>
+                      </p:stCondLst>
+                      <p:childTnLst>
+                        <p:par>
+                          <p:cTn id="4" fill="hold">
+                            <p:stCondLst>
+                              <p:cond delay="0"/>
+                            </p:stCondLst>
+                            <p:childTnLst>
+                              <p:par>
+                                <p:cTn id="5" presetID="26" presetClass="entr" presetSubtype="0" fill="hold" nodeType="afterEffect">
+                                  <p:stCondLst>
+                                    <p:cond delay="0"/>
+                                  </p:stCondLst>
+                                  <p:childTnLst>
+                                    <p:set>
+                                      <p:cBhvr>
+                                        <p:cTn id="6" dur="1" fill="hold">
+                                          <p:stCondLst>
+                                            <p:cond delay="0"/>
+                                          </p:stCondLst>
+                                        </p:cTn>
+                                        <p:tgtEl>
+                                          <p:spTgt spid="13"/>
+                                        </p:tgtEl>
+                                        <p:attrNameLst>
+                                          <p:attrName>style.visibility</p:attrName>
+                                        </p:attrNameLst>
+                                      </p:cBhvr>
+                                      <p:to>
+                                        <p:strVal val="visible"/>
+                                      </p:to>
+                                    </p:set>
+                                    <p:animEffect transition="in" filter="wipe(down)">
+                                      <p:cBhvr>
+                                        <p:cTn id="7" dur="2900">
+                                          <p:stCondLst>
+                                            <p:cond delay="0"/>
+                                          </p:stCondLst>
+                                        </p:cTn>
+                                        <p:tgtEl>
+                                          <p:spTgt spid="13"/>
+                                        </p:tgtEl>
+                                      </p:cBhvr>
+                                    </p:animEffect>
+                                    <p:anim calcmode="lin" valueType="num">
+                                      <p:cBhvr>
+                                        <p:cTn id="8" dur="9110" tmFilter="0,0; 0.14,0.36; 0.43,0.73; 0.71,0.91; 1.0,1.0">
+                                          <p:stCondLst>
+                                            <p:cond delay="0"/>
+                                          </p:stCondLst>
+                                        </p:cTn>
+                                        <p:tgtEl>
+                                          <p:spTgt spid="13"/>
+                                        </p:tgtEl>
+                                        <p:attrNameLst>
+                                          <p:attrName>ppt_x</p:attrName>
+                                        </p:attrNameLst>
+                                      </p:cBhvr>
+                                      <p:tavLst>
+                                        <p:tav tm="0">
+                                          <p:val>
+                                            <p:strVal val="#ppt_x-0.25"/>
+                                          </p:val>
+                                        </p:tav>
+                                        <p:tav tm="100000">
+                                          <p:val>
+                                            <p:strVal val="#ppt_x"/>
+                                          </p:val>
+                                        </p:tav>
+                                      </p:tavLst>
+                                    </p:anim>
+                                    <p:anim calcmode="lin" valueType="num">
+                                      <p:cBhvr>
+                                        <p:cTn id="9" dur="3320" tmFilter="0.0,0.0; 0.25,0.07; 0.50,0.2; 0.75,0.467; 1.0,1.0">
+                                          <p:stCondLst>
+                                            <p:cond delay="0"/>
+                                          </p:stCondLst>
+                                        </p:cTn>
+                                        <p:tgtEl>
+                                          <p:spTgt spid="13"/>
+                                        </p:tgtEl>
+                                        <p:attrNameLst>
+                                          <p:attrName>ppt_y</p:attrName>
+                                        </p:attrNameLst>
+                                      </p:cBhvr>
+                                      <p:tavLst>
+                                        <p:tav tm="0" fmla="#ppt_y-sin(pi*$)/3">
+                                          <p:val>
+                                            <p:fltVal val="0.5"/>
+                                          </p:val>
+                                        </p:tav>
+                                        <p:tav tm="100000">
+                                          <p:val>
+                                            <p:fltVal val="1"/>
+                                          </p:val>
+                                        </p:tav>
+                                      </p:tavLst>
+                                    </p:anim>
+                                    <p:anim calcmode="lin" valueType="num">
+                                      <p:cBhvr>
+                                        <p:cTn id="10" dur="3320" tmFilter="0, 0; 0.125,0.2665; 0.25,0.4; 0.375,0.465; 0.5,0.5;  0.625,0.535; 0.75,0.6; 0.875,0.7335; 1,1">
+                                          <p:stCondLst>
+                                            <p:cond delay="3320"/>
+                                          </p:stCondLst>
+                                        </p:cTn>
+                                        <p:tgtEl>
+                                          <p:spTgt spid="13"/>
+                                        </p:tgtEl>
+                                        <p:attrNameLst>
+                                          <p:attrName>ppt_y</p:attrName>
+                                        </p:attrNameLst>
+                                      </p:cBhvr>
+                                      <p:tavLst>
+                                        <p:tav tm="0" fmla="#ppt_y-sin(pi*$)/9">
+                                          <p:val>
+                                            <p:fltVal val="0"/>
+                                          </p:val>
+                                        </p:tav>
+                                        <p:tav tm="100000">
+                                          <p:val>
+                                            <p:fltVal val="1"/>
+                                          </p:val>
+                                        </p:tav>
+                                      </p:tavLst>
+                                    </p:anim>
+                                    <p:anim calcmode="lin" valueType="num">
+                                      <p:cBhvr>
+                                        <p:cTn id="11" dur="1660" tmFilter="0, 0; 0.125,0.2665; 0.25,0.4; 0.375,0.465; 0.5,0.5;  0.625,0.535; 0.75,0.6; 0.875,0.7335; 1,1">
+                                          <p:stCondLst>
+                                            <p:cond delay="6620"/>
+                                          </p:stCondLst>
+                                        </p:cTn>
+                                        <p:tgtEl>
+                                          <p:spTgt spid="13"/>
+                                        </p:tgtEl>
+                                        <p:attrNameLst>
+                                          <p:attrName>ppt_y</p:attrName>
+                                        </p:attrNameLst>
+                                      </p:cBhvr>
+                                      <p:tavLst>
+                                        <p:tav tm="0" fmla="#ppt_y-sin(pi*$)/27">
+                                          <p:val>
+                                            <p:fltVal val="0"/>
+                                          </p:val>
+                                        </p:tav>
+                                        <p:tav tm="100000">
+                                          <p:val>
+                                            <p:fltVal val="1"/>
+                                          </p:val>
+                                        </p:tav>
+                                      </p:tavLst>
+                                    </p:anim>
+                                    <p:anim calcmode="lin" valueType="num">
+                                      <p:cBhvr>
+                                        <p:cTn id="12" dur="820" tmFilter="0, 0; 0.125,0.2665; 0.25,0.4; 0.375,0.465; 0.5,0.5;  0.625,0.535; 0.75,0.6; 0.875,0.7335; 1,1">
+                                          <p:stCondLst>
+                                            <p:cond delay="8280"/>
+                                          </p:stCondLst>
+                                        </p:cTn>
+                                        <p:tgtEl>
+                                          <p:spTgt spid="13"/>
+                                        </p:tgtEl>
+                                        <p:attrNameLst>
+                                          <p:attrName>ppt_y</p:attrName>
+                                        </p:attrNameLst>
+                                      </p:cBhvr>
+                                      <p:tavLst>
+                                        <p:tav tm="0" fmla="#ppt_y-sin(pi*$)/81">
+                                          <p:val>
+                                            <p:fltVal val="0"/>
+                                          </p:val>
+                                        </p:tav>
+                                        <p:tav tm="100000">
+                                          <p:val>
+                                            <p:fltVal val="1"/>
+                                          </p:val>
+                                        </p:tav>
+                                      </p:tavLst>
+                                    </p:anim>
+                                    <p:animScale>
+                                      <p:cBhvr>
+                                        <p:cTn id="13" dur="130">
+                                          <p:stCondLst>
+                                            <p:cond delay="3250"/>
+                                          </p:stCondLst>
+                                        </p:cTn>
+                                        <p:tgtEl>
+                                          <p:spTgt spid="13"/>
+                                        </p:tgtEl>
+                                      </p:cBhvr>
+                                      <p:to x="100000" y="60000"/>
+                                    </p:animScale>
+                                    <p:animScale>
+                                      <p:cBhvr>
+                                        <p:cTn id="14" dur="830" decel="50000">
+                                          <p:stCondLst>
+                                            <p:cond delay="3380"/>
+                                          </p:stCondLst>
+                                        </p:cTn>
+                                        <p:tgtEl>
+                                          <p:spTgt spid="13"/>
+                                        </p:tgtEl>
+                                      </p:cBhvr>
+                                      <p:to x="100000" y="100000"/>
+                                    </p:animScale>
+                                    <p:animScale>
+                                      <p:cBhvr>
+                                        <p:cTn id="15" dur="130">
+                                          <p:stCondLst>
+                                            <p:cond delay="6560"/>
+                                          </p:stCondLst>
+                                        </p:cTn>
+                                        <p:tgtEl>
+                                          <p:spTgt spid="13"/>
+                                        </p:tgtEl>
+                                      </p:cBhvr>
+                                      <p:to x="100000" y="80000"/>
+                                    </p:animScale>
+                                    <p:animScale>
+                                      <p:cBhvr>
+                                        <p:cTn id="16" dur="830" decel="50000">
+                                          <p:stCondLst>
+                                            <p:cond delay="6690"/>
+                                          </p:stCondLst>
+                                        </p:cTn>
+                                        <p:tgtEl>
+                                          <p:spTgt spid="13"/>
+                                        </p:tgtEl>
+                                      </p:cBhvr>
+                                      <p:to x="100000" y="100000"/>
+                                    </p:animScale>
+                                    <p:animScale>
+                                      <p:cBhvr>
+                                        <p:cTn id="17" dur="130">
+                                          <p:stCondLst>
+                                            <p:cond delay="8210"/>
+                                          </p:stCondLst>
+                                        </p:cTn>
+                                        <p:tgtEl>
+                                          <p:spTgt spid="13"/>
+                                        </p:tgtEl>
+                                      </p:cBhvr>
+                                      <p:to x="100000" y="90000"/>
+                                    </p:animScale>
+                                    <p:animScale>
+                                      <p:cBhvr>
+                                        <p:cTn id="18" dur="830" decel="50000">
+                                          <p:stCondLst>
+                                            <p:cond delay="8340"/>
+                                          </p:stCondLst>
+                                        </p:cTn>
+                                        <p:tgtEl>
+                                          <p:spTgt spid="13"/>
+                                        </p:tgtEl>
+                                      </p:cBhvr>
+                                      <p:to x="100000" y="100000"/>
+                                    </p:animScale>
+                                    <p:animScale>
+                                      <p:cBhvr>
+                                        <p:cTn id="19" dur="130">
+                                          <p:stCondLst>
+                                            <p:cond delay="9040"/>
+                                          </p:stCondLst>
+                                        </p:cTn>
+                                        <p:tgtEl>
+                                          <p:spTgt spid="13"/>
+                                        </p:tgtEl>
+                                      </p:cBhvr>
+                                      <p:to x="100000" y="95000"/>
+                                    </p:animScale>
+                                    <p:animScale>
+                                      <p:cBhvr>
+                                        <p:cTn id="20" dur="830" decel="50000">
+                                          <p:stCondLst>
+                                            <p:cond delay="9170"/>
+                                          </p:stCondLst>
+                                        </p:cTn>
+                                        <p:tgtEl>
+                                          <p:spTgt spid="13"/>
+                                        </p:tgtEl>
+                                      </p:cBhvr>
+                                      <p:to x="100000" y="100000"/>
+                                    </p:animScale>
+                                  </p:childTnLst>
+                                </p:cTn>
+                              </p:par>
+                            </p:childTnLst>
+                          </p:cTn>
+                        </p:par>
+                      </p:childTnLst>
+                    </p:cTn>
+                  </p:par>
+                </p:childTnLst>
+              </p:cTn>
+              <p:prevCondLst>
+                <p:cond evt="onPrev" delay="0">
+                  <p:tgtEl>
+                    <p:sldTgt/>
+                  </p:tgtEl>
+                </p:cond>
+              </p:prevCondLst>
+              <p:nextCondLst>
+                <p:cond evt="onNext" delay="0">
+                  <p:tgtEl>
+                    <p:sldTgt/>
+                  </p:tgtEl>
+                </p:cond>
+              </p:nextCondLst>
+            </p:seq>
+          </p:childTnLst>
+        </p:cTn>
+      </p:par>
+    </p:tnLst>
+  </p:timing>
 </p:sld>
 </file>
 
@@ -4901,7 +7926,7 @@
         </p:nvSpPr>
         <p:spPr>
           <a:xfrm>
-            <a:off x="734200" y="1547470"/>
+            <a:off x="858487" y="1113878"/>
             <a:ext cx="10723294" cy="582712"/>
           </a:xfrm>
           <a:prstGeom prst="rect">
@@ -4921,473 +7946,17 @@
               <a:buNone/>
             </a:pPr>
             <a:r>
-              <a:rPr lang="en-US" sz="3650" dirty="0">
+              <a:rPr lang="hu-HU" sz="3650" dirty="0">
                 <a:solidFill>
                   <a:srgbClr val="FFFFFF"/>
                 </a:solidFill>
-                <a:latin typeface="Barlow Medium" pitchFamily="34" charset="0"/>
-                <a:ea typeface="Barlow Medium" pitchFamily="34" charset="-122"/>
-                <a:cs typeface="Barlow Medium" pitchFamily="34" charset="-120"/>
+                <a:latin typeface="Segoe UI Semibold" panose="020B0702040204020203" pitchFamily="34" charset="0"/>
               </a:rPr>
-              <a:t>Fejlesztési ütemterv</a:t>
+              <a:t>Feladat felosztás</a:t>
             </a:r>
-            <a:endParaRPr lang="en-US" sz="3650" dirty="0"/>
-          </a:p>
-        </p:txBody>
-      </p:sp>
-      <p:pic>
-        <p:nvPicPr>
-          <p:cNvPr id="3" name="Image 0" descr="preencoded.png"/>
-          <p:cNvPicPr>
-            <a:picLocks noChangeAspect="1"/>
-          </p:cNvPicPr>
-          <p:nvPr/>
-        </p:nvPicPr>
-        <p:blipFill>
-          <a:blip r:embed="rId3"/>
-          <a:stretch>
-            <a:fillRect/>
-          </a:stretch>
-        </p:blipFill>
-        <p:spPr>
-          <a:xfrm>
-            <a:off x="734200" y="2511326"/>
-            <a:ext cx="10723294" cy="2837557"/>
-          </a:xfrm>
-          <a:prstGeom prst="rect">
-            <a:avLst/>
-          </a:prstGeom>
-        </p:spPr>
-      </p:pic>
-      <p:sp>
-        <p:nvSpPr>
-          <p:cNvPr id="4" name="Text 1"/>
-          <p:cNvSpPr/>
-          <p:nvPr/>
-        </p:nvSpPr>
-        <p:spPr>
-          <a:xfrm>
-            <a:off x="1561300" y="3470759"/>
-            <a:ext cx="1620949" cy="257991"/>
-          </a:xfrm>
-          <a:prstGeom prst="rect">
-            <a:avLst/>
-          </a:prstGeom>
-          <a:noFill/>
-          <a:ln/>
-        </p:spPr>
-        <p:txBody>
-          <a:bodyPr wrap="none" lIns="0" tIns="0" rIns="0" bIns="0" rtlCol="0" anchor="t"/>
-          <a:lstStyle/>
-          <a:p>
-            <a:pPr marL="0" indent="0" algn="ctr">
-              <a:lnSpc>
-                <a:spcPct val="104000"/>
-              </a:lnSpc>
-              <a:buNone/>
-            </a:pPr>
-            <a:r>
-              <a:rPr lang="en-US" sz="1600" dirty="0">
-                <a:solidFill>
-                  <a:srgbClr val="FFFFFF"/>
-                </a:solidFill>
-                <a:latin typeface="Barlow Medium" pitchFamily="34" charset="0"/>
-                <a:ea typeface="Barlow Medium" pitchFamily="34" charset="-122"/>
-                <a:cs typeface="Barlow Medium" pitchFamily="34" charset="-120"/>
-              </a:rPr>
-              <a:t>Oldalak</a:t>
-            </a:r>
-            <a:endParaRPr lang="en-US" sz="1600" dirty="0"/>
-          </a:p>
-        </p:txBody>
-      </p:sp>
-      <p:sp>
-        <p:nvSpPr>
-          <p:cNvPr id="5" name="Text 2"/>
-          <p:cNvSpPr/>
-          <p:nvPr/>
-        </p:nvSpPr>
-        <p:spPr>
-          <a:xfrm>
-            <a:off x="1561300" y="3811307"/>
-            <a:ext cx="1620949" cy="464384"/>
-          </a:xfrm>
-          <a:prstGeom prst="rect">
-            <a:avLst/>
-          </a:prstGeom>
-          <a:noFill/>
-          <a:ln/>
-        </p:spPr>
-        <p:txBody>
-          <a:bodyPr wrap="square" lIns="0" tIns="0" rIns="0" bIns="0" rtlCol="0" anchor="t">
-            <a:normAutofit/>
-          </a:bodyPr>
-          <a:lstStyle/>
-          <a:p>
-            <a:pPr marL="0" indent="0" algn="ctr">
-              <a:lnSpc>
-                <a:spcPct val="104000"/>
-              </a:lnSpc>
-              <a:buNone/>
-            </a:pPr>
-            <a:r>
-              <a:rPr lang="en-US" sz="1450" dirty="0">
-                <a:solidFill>
-                  <a:srgbClr val="E5E0DF"/>
-                </a:solidFill>
-                <a:latin typeface="Barlow" pitchFamily="34" charset="0"/>
-                <a:ea typeface="Barlow" pitchFamily="34" charset="-122"/>
-                <a:cs typeface="Barlow" pitchFamily="34" charset="-120"/>
-              </a:rPr>
-              <a:t>Weboldalak elkészítése</a:t>
-            </a:r>
-            <a:endParaRPr lang="en-US" sz="1450" dirty="0"/>
-          </a:p>
-        </p:txBody>
-      </p:sp>
-      <p:sp>
-        <p:nvSpPr>
-          <p:cNvPr id="6" name="Text 3"/>
-          <p:cNvSpPr/>
-          <p:nvPr/>
-        </p:nvSpPr>
-        <p:spPr>
-          <a:xfrm>
-            <a:off x="3418788" y="3584275"/>
-            <a:ext cx="1620949" cy="257991"/>
-          </a:xfrm>
-          <a:prstGeom prst="rect">
-            <a:avLst/>
-          </a:prstGeom>
-          <a:noFill/>
-          <a:ln/>
-        </p:spPr>
-        <p:txBody>
-          <a:bodyPr wrap="none" lIns="0" tIns="0" rIns="0" bIns="0" rtlCol="0" anchor="t"/>
-          <a:lstStyle/>
-          <a:p>
-            <a:pPr marL="0" indent="0" algn="ctr">
-              <a:lnSpc>
-                <a:spcPct val="104000"/>
-              </a:lnSpc>
-              <a:buNone/>
-            </a:pPr>
-            <a:r>
-              <a:rPr lang="en-US" sz="1600" dirty="0">
-                <a:solidFill>
-                  <a:srgbClr val="FFFFFF"/>
-                </a:solidFill>
-                <a:latin typeface="Barlow Medium" pitchFamily="34" charset="0"/>
-                <a:ea typeface="Barlow Medium" pitchFamily="34" charset="-122"/>
-                <a:cs typeface="Barlow Medium" pitchFamily="34" charset="-120"/>
-              </a:rPr>
-              <a:t>Adatbázis</a:t>
-            </a:r>
-            <a:endParaRPr lang="en-US" sz="1600" dirty="0"/>
-          </a:p>
-        </p:txBody>
-      </p:sp>
-      <p:sp>
-        <p:nvSpPr>
-          <p:cNvPr id="7" name="Text 4"/>
-          <p:cNvSpPr/>
-          <p:nvPr/>
-        </p:nvSpPr>
-        <p:spPr>
-          <a:xfrm>
-            <a:off x="3418788" y="3924823"/>
-            <a:ext cx="1620949" cy="464384"/>
-          </a:xfrm>
-          <a:prstGeom prst="rect">
-            <a:avLst/>
-          </a:prstGeom>
-          <a:noFill/>
-          <a:ln/>
-        </p:spPr>
-        <p:txBody>
-          <a:bodyPr wrap="square" lIns="0" tIns="0" rIns="0" bIns="0" rtlCol="0" anchor="t">
-            <a:normAutofit/>
-          </a:bodyPr>
-          <a:lstStyle/>
-          <a:p>
-            <a:pPr marL="0" indent="0" algn="ctr">
-              <a:lnSpc>
-                <a:spcPct val="104000"/>
-              </a:lnSpc>
-              <a:buNone/>
-            </a:pPr>
-            <a:r>
-              <a:rPr lang="en-US" sz="1450" dirty="0">
-                <a:solidFill>
-                  <a:srgbClr val="E5E0DF"/>
-                </a:solidFill>
-                <a:latin typeface="Barlow" pitchFamily="34" charset="0"/>
-                <a:ea typeface="Barlow" pitchFamily="34" charset="-122"/>
-                <a:cs typeface="Barlow" pitchFamily="34" charset="-120"/>
-              </a:rPr>
-              <a:t>Szerkezet és táblák kialakítása</a:t>
-            </a:r>
-            <a:endParaRPr lang="en-US" sz="1450" dirty="0"/>
-          </a:p>
-        </p:txBody>
-      </p:sp>
-      <p:sp>
-        <p:nvSpPr>
-          <p:cNvPr id="8" name="Text 5"/>
-          <p:cNvSpPr/>
-          <p:nvPr/>
-        </p:nvSpPr>
-        <p:spPr>
-          <a:xfrm>
-            <a:off x="5276277" y="3470759"/>
-            <a:ext cx="1620950" cy="515982"/>
-          </a:xfrm>
-          <a:prstGeom prst="rect">
-            <a:avLst/>
-          </a:prstGeom>
-          <a:noFill/>
-          <a:ln/>
-        </p:spPr>
-        <p:txBody>
-          <a:bodyPr wrap="square" lIns="0" tIns="0" rIns="0" bIns="0" rtlCol="0" anchor="t">
-            <a:normAutofit/>
-          </a:bodyPr>
-          <a:lstStyle/>
-          <a:p>
-            <a:pPr marL="0" indent="0" algn="ctr">
-              <a:lnSpc>
-                <a:spcPct val="104000"/>
-              </a:lnSpc>
-              <a:buNone/>
-            </a:pPr>
-            <a:r>
-              <a:rPr lang="en-US" sz="1600" dirty="0">
-                <a:solidFill>
-                  <a:srgbClr val="FFFFFF"/>
-                </a:solidFill>
-                <a:latin typeface="Barlow Medium" pitchFamily="34" charset="0"/>
-                <a:ea typeface="Barlow Medium" pitchFamily="34" charset="-122"/>
-                <a:cs typeface="Barlow Medium" pitchFamily="34" charset="-120"/>
-              </a:rPr>
-              <a:t>Felhasználói rendszer</a:t>
-            </a:r>
-            <a:endParaRPr lang="en-US" sz="1600" dirty="0"/>
-          </a:p>
-        </p:txBody>
-      </p:sp>
-      <p:sp>
-        <p:nvSpPr>
-          <p:cNvPr id="9" name="Text 6"/>
-          <p:cNvSpPr/>
-          <p:nvPr/>
-        </p:nvSpPr>
-        <p:spPr>
-          <a:xfrm>
-            <a:off x="5276277" y="4069299"/>
-            <a:ext cx="1620950" cy="464384"/>
-          </a:xfrm>
-          <a:prstGeom prst="rect">
-            <a:avLst/>
-          </a:prstGeom>
-          <a:noFill/>
-          <a:ln/>
-        </p:spPr>
-        <p:txBody>
-          <a:bodyPr wrap="square" lIns="0" tIns="0" rIns="0" bIns="0" rtlCol="0" anchor="t">
-            <a:normAutofit/>
-          </a:bodyPr>
-          <a:lstStyle/>
-          <a:p>
-            <a:pPr marL="0" indent="0" algn="ctr">
-              <a:lnSpc>
-                <a:spcPct val="104000"/>
-              </a:lnSpc>
-              <a:buNone/>
-            </a:pPr>
-            <a:r>
-              <a:rPr lang="en-US" sz="1450" dirty="0">
-                <a:solidFill>
-                  <a:srgbClr val="E5E0DF"/>
-                </a:solidFill>
-                <a:latin typeface="Barlow" pitchFamily="34" charset="0"/>
-                <a:ea typeface="Barlow" pitchFamily="34" charset="-122"/>
-                <a:cs typeface="Barlow" pitchFamily="34" charset="-120"/>
-              </a:rPr>
-              <a:t>Regisztráció és jogosultságok</a:t>
-            </a:r>
-            <a:endParaRPr lang="en-US" sz="1450" dirty="0"/>
-          </a:p>
-        </p:txBody>
-      </p:sp>
-      <p:sp>
-        <p:nvSpPr>
-          <p:cNvPr id="10" name="Text 7"/>
-          <p:cNvSpPr/>
-          <p:nvPr/>
-        </p:nvSpPr>
-        <p:spPr>
-          <a:xfrm>
-            <a:off x="7133766" y="3584275"/>
-            <a:ext cx="1620949" cy="257991"/>
-          </a:xfrm>
-          <a:prstGeom prst="rect">
-            <a:avLst/>
-          </a:prstGeom>
-          <a:noFill/>
-          <a:ln/>
-        </p:spPr>
-        <p:txBody>
-          <a:bodyPr wrap="none" lIns="0" tIns="0" rIns="0" bIns="0" rtlCol="0" anchor="t"/>
-          <a:lstStyle/>
-          <a:p>
-            <a:pPr marL="0" indent="0" algn="ctr">
-              <a:lnSpc>
-                <a:spcPct val="104000"/>
-              </a:lnSpc>
-              <a:buNone/>
-            </a:pPr>
-            <a:r>
-              <a:rPr lang="en-US" sz="1600" dirty="0">
-                <a:solidFill>
-                  <a:srgbClr val="FFFFFF"/>
-                </a:solidFill>
-                <a:latin typeface="Barlow Medium" pitchFamily="34" charset="0"/>
-                <a:ea typeface="Barlow Medium" pitchFamily="34" charset="-122"/>
-                <a:cs typeface="Barlow Medium" pitchFamily="34" charset="-120"/>
-              </a:rPr>
-              <a:t>Cikkkezelés</a:t>
-            </a:r>
-            <a:endParaRPr lang="en-US" sz="1600" dirty="0"/>
-          </a:p>
-        </p:txBody>
-      </p:sp>
-      <p:sp>
-        <p:nvSpPr>
-          <p:cNvPr id="11" name="Text 8"/>
-          <p:cNvSpPr/>
-          <p:nvPr/>
-        </p:nvSpPr>
-        <p:spPr>
-          <a:xfrm>
-            <a:off x="7133766" y="3924823"/>
-            <a:ext cx="1620949" cy="464384"/>
-          </a:xfrm>
-          <a:prstGeom prst="rect">
-            <a:avLst/>
-          </a:prstGeom>
-          <a:noFill/>
-          <a:ln/>
-        </p:spPr>
-        <p:txBody>
-          <a:bodyPr wrap="square" lIns="0" tIns="0" rIns="0" bIns="0" rtlCol="0" anchor="t">
-            <a:normAutofit/>
-          </a:bodyPr>
-          <a:lstStyle/>
-          <a:p>
-            <a:pPr marL="0" indent="0" algn="ctr">
-              <a:lnSpc>
-                <a:spcPct val="104000"/>
-              </a:lnSpc>
-              <a:buNone/>
-            </a:pPr>
-            <a:r>
-              <a:rPr lang="en-US" sz="1450" dirty="0">
-                <a:solidFill>
-                  <a:srgbClr val="E5E0DF"/>
-                </a:solidFill>
-                <a:latin typeface="Barlow" pitchFamily="34" charset="0"/>
-                <a:ea typeface="Barlow" pitchFamily="34" charset="-122"/>
-                <a:cs typeface="Barlow" pitchFamily="34" charset="-120"/>
-              </a:rPr>
-              <a:t>funkciók és szerkesztés</a:t>
-            </a:r>
-            <a:endParaRPr lang="en-US" sz="1450" dirty="0"/>
-          </a:p>
-        </p:txBody>
-      </p:sp>
-      <p:sp>
-        <p:nvSpPr>
-          <p:cNvPr id="12" name="Text 9"/>
-          <p:cNvSpPr/>
-          <p:nvPr/>
-        </p:nvSpPr>
-        <p:spPr>
-          <a:xfrm>
-            <a:off x="9001574" y="3470759"/>
-            <a:ext cx="1620949" cy="257991"/>
-          </a:xfrm>
-          <a:prstGeom prst="rect">
-            <a:avLst/>
-          </a:prstGeom>
-          <a:noFill/>
-          <a:ln/>
-        </p:spPr>
-        <p:txBody>
-          <a:bodyPr wrap="none" lIns="0" tIns="0" rIns="0" bIns="0" rtlCol="0" anchor="t"/>
-          <a:lstStyle/>
-          <a:p>
-            <a:pPr marL="0" indent="0" algn="ctr">
-              <a:lnSpc>
-                <a:spcPct val="104000"/>
-              </a:lnSpc>
-              <a:buNone/>
-            </a:pPr>
-            <a:r>
-              <a:rPr lang="en-US" sz="1600" dirty="0">
-                <a:solidFill>
-                  <a:srgbClr val="FFFFFF"/>
-                </a:solidFill>
-                <a:latin typeface="Barlow Medium" pitchFamily="34" charset="0"/>
-                <a:ea typeface="Barlow Medium" pitchFamily="34" charset="-122"/>
-                <a:cs typeface="Barlow Medium" pitchFamily="34" charset="-120"/>
-              </a:rPr>
-              <a:t>Tesztelés</a:t>
-            </a:r>
-            <a:endParaRPr lang="en-US" sz="1600" dirty="0"/>
-          </a:p>
-        </p:txBody>
-      </p:sp>
-      <p:sp>
-        <p:nvSpPr>
-          <p:cNvPr id="13" name="Text 10"/>
-          <p:cNvSpPr/>
-          <p:nvPr/>
-        </p:nvSpPr>
-        <p:spPr>
-          <a:xfrm>
-            <a:off x="9001574" y="3811307"/>
-            <a:ext cx="1620949" cy="464384"/>
-          </a:xfrm>
-          <a:prstGeom prst="rect">
-            <a:avLst/>
-          </a:prstGeom>
-          <a:noFill/>
-          <a:ln/>
-        </p:spPr>
-        <p:txBody>
-          <a:bodyPr wrap="square" lIns="0" tIns="0" rIns="0" bIns="0" rtlCol="0" anchor="t">
-            <a:normAutofit/>
-          </a:bodyPr>
-          <a:lstStyle/>
-          <a:p>
-            <a:pPr marL="0" indent="0" algn="ctr">
-              <a:lnSpc>
-                <a:spcPct val="104000"/>
-              </a:lnSpc>
-              <a:buNone/>
-            </a:pPr>
-            <a:r>
-              <a:rPr lang="en-US" sz="1450" dirty="0">
-                <a:solidFill>
-                  <a:srgbClr val="E5E0DF"/>
-                </a:solidFill>
-                <a:latin typeface="Barlow" pitchFamily="34" charset="0"/>
-                <a:ea typeface="Barlow" pitchFamily="34" charset="-122"/>
-                <a:cs typeface="Barlow" pitchFamily="34" charset="-120"/>
-              </a:rPr>
-              <a:t>Hibajavítás és végellenőrzés</a:t>
-            </a:r>
-            <a:endParaRPr lang="en-US" sz="1450" dirty="0"/>
+            <a:endParaRPr lang="en-US" sz="3650" dirty="0">
+              <a:latin typeface="Segoe UI Semibold" panose="020B0702040204020203" pitchFamily="34" charset="0"/>
+            </a:endParaRPr>
           </a:p>
         </p:txBody>
       </p:sp>
@@ -5406,7 +7975,7 @@
           <p:nvPr/>
         </p:nvPicPr>
         <p:blipFill>
-          <a:blip r:embed="rId4"/>
+          <a:blip r:embed="rId3"/>
           <a:stretch>
             <a:fillRect/>
           </a:stretch>
@@ -5436,7 +8005,7 @@
           <p:nvPr/>
         </p:nvPicPr>
         <p:blipFill>
-          <a:blip r:embed="rId5"/>
+          <a:blip r:embed="rId4"/>
           <a:stretch>
             <a:fillRect/>
           </a:stretch>
@@ -5451,11 +8020,552 @@
           </a:prstGeom>
         </p:spPr>
       </p:pic>
+      <p:sp>
+        <p:nvSpPr>
+          <p:cNvPr id="14" name="Szövegdoboz 13">
+            <a:extLst>
+              <a:ext uri="{FF2B5EF4-FFF2-40B4-BE49-F238E27FC236}">
+                <a16:creationId xmlns:a16="http://schemas.microsoft.com/office/drawing/2014/main" id="{E63657D5-1F53-4817-A7AB-B58975559789}"/>
+              </a:ext>
+            </a:extLst>
+          </p:cNvPr>
+          <p:cNvSpPr txBox="1"/>
+          <p:nvPr/>
+        </p:nvSpPr>
+        <p:spPr>
+          <a:xfrm>
+            <a:off x="858487" y="2219417"/>
+            <a:ext cx="6811820" cy="3089757"/>
+          </a:xfrm>
+          <a:prstGeom prst="rect">
+            <a:avLst/>
+          </a:prstGeom>
+          <a:noFill/>
+        </p:spPr>
+        <p:txBody>
+          <a:bodyPr wrap="square" rtlCol="0">
+            <a:spAutoFit/>
+          </a:bodyPr>
+          <a:lstStyle/>
+          <a:p>
+            <a:pPr marL="335280" indent="-335280">
+              <a:lnSpc>
+                <a:spcPct val="133000"/>
+              </a:lnSpc>
+              <a:buSzPct val="100000"/>
+              <a:buFont typeface="Wingdings" panose="05000000000000000000" pitchFamily="2" charset="2"/>
+              <a:buChar char="q"/>
+            </a:pPr>
+            <a:r>
+              <a:rPr lang="hu-HU" sz="1650" dirty="0">
+                <a:solidFill>
+                  <a:srgbClr val="E5E0DF"/>
+                </a:solidFill>
+                <a:latin typeface="Segoe UI Semibold" panose="020B0702040204020203" pitchFamily="34" charset="0"/>
+              </a:rPr>
+              <a:t>Zoltán:</a:t>
+            </a:r>
+          </a:p>
+          <a:p>
+            <a:pPr marL="792480" lvl="2" indent="-335280">
+              <a:lnSpc>
+                <a:spcPct val="133000"/>
+              </a:lnSpc>
+              <a:buSzPct val="100000"/>
+              <a:buFont typeface="Wingdings" panose="05000000000000000000" pitchFamily="2" charset="2"/>
+              <a:buChar char="q"/>
+            </a:pPr>
+            <a:r>
+              <a:rPr lang="hu-HU" sz="1650" dirty="0">
+                <a:solidFill>
+                  <a:srgbClr val="E5E0DF"/>
+                </a:solidFill>
+                <a:latin typeface="Segoe UI Semibold" panose="020B0702040204020203" pitchFamily="34" charset="0"/>
+              </a:rPr>
+              <a:t>Adatbázis</a:t>
+            </a:r>
+          </a:p>
+          <a:p>
+            <a:pPr marL="792480" lvl="2" indent="-335280">
+              <a:lnSpc>
+                <a:spcPct val="133000"/>
+              </a:lnSpc>
+              <a:buSzPct val="100000"/>
+              <a:buFont typeface="Wingdings" panose="05000000000000000000" pitchFamily="2" charset="2"/>
+              <a:buChar char="q"/>
+            </a:pPr>
+            <a:r>
+              <a:rPr lang="hu-HU" sz="1650" dirty="0">
+                <a:solidFill>
+                  <a:srgbClr val="E5E0DF"/>
+                </a:solidFill>
+                <a:latin typeface="Segoe UI Semibold" panose="020B0702040204020203" pitchFamily="34" charset="0"/>
+              </a:rPr>
+              <a:t>Frontend</a:t>
+            </a:r>
+          </a:p>
+          <a:p>
+            <a:pPr marL="335280" indent="-335280">
+              <a:lnSpc>
+                <a:spcPct val="133000"/>
+              </a:lnSpc>
+              <a:buSzPct val="100000"/>
+              <a:buFont typeface="Wingdings" panose="05000000000000000000" pitchFamily="2" charset="2"/>
+              <a:buChar char="q"/>
+            </a:pPr>
+            <a:r>
+              <a:rPr lang="hu-HU" sz="1650" dirty="0">
+                <a:solidFill>
+                  <a:srgbClr val="E5E0DF"/>
+                </a:solidFill>
+                <a:latin typeface="Segoe UI Semibold" panose="020B0702040204020203" pitchFamily="34" charset="0"/>
+              </a:rPr>
+              <a:t>Zsolt:</a:t>
+            </a:r>
+          </a:p>
+          <a:p>
+            <a:pPr marL="792480" lvl="2" indent="-335280">
+              <a:lnSpc>
+                <a:spcPct val="133000"/>
+              </a:lnSpc>
+              <a:buSzPct val="100000"/>
+              <a:buFont typeface="Wingdings" panose="05000000000000000000" pitchFamily="2" charset="2"/>
+              <a:buChar char="q"/>
+            </a:pPr>
+            <a:r>
+              <a:rPr lang="hu-HU" sz="1650" dirty="0">
+                <a:solidFill>
+                  <a:srgbClr val="E5E0DF"/>
+                </a:solidFill>
+                <a:latin typeface="Segoe UI Semibold" panose="020B0702040204020203" pitchFamily="34" charset="0"/>
+              </a:rPr>
+              <a:t>Backend</a:t>
+            </a:r>
+          </a:p>
+          <a:p>
+            <a:pPr marL="792480" lvl="2" indent="-335280">
+              <a:lnSpc>
+                <a:spcPct val="133000"/>
+              </a:lnSpc>
+              <a:buSzPct val="100000"/>
+              <a:buFont typeface="Wingdings" panose="05000000000000000000" pitchFamily="2" charset="2"/>
+              <a:buChar char="q"/>
+            </a:pPr>
+            <a:r>
+              <a:rPr lang="hu-HU" sz="1650" dirty="0">
+                <a:solidFill>
+                  <a:srgbClr val="E5E0DF"/>
+                </a:solidFill>
+                <a:latin typeface="Segoe UI Semibold" panose="020B0702040204020203" pitchFamily="34" charset="0"/>
+              </a:rPr>
+              <a:t>Frontend</a:t>
+            </a:r>
+          </a:p>
+          <a:p>
+            <a:pPr marL="335280" indent="-335280">
+              <a:lnSpc>
+                <a:spcPct val="133000"/>
+              </a:lnSpc>
+              <a:buSzPct val="100000"/>
+              <a:buFont typeface="Wingdings" panose="05000000000000000000" pitchFamily="2" charset="2"/>
+              <a:buChar char="q"/>
+            </a:pPr>
+            <a:r>
+              <a:rPr lang="hu-HU" sz="1650" dirty="0">
+                <a:solidFill>
+                  <a:srgbClr val="E5E0DF"/>
+                </a:solidFill>
+                <a:latin typeface="Segoe UI Semibold" panose="020B0702040204020203" pitchFamily="34" charset="0"/>
+              </a:rPr>
+              <a:t>Márton:</a:t>
+            </a:r>
+          </a:p>
+          <a:p>
+            <a:pPr marL="792480" lvl="2" indent="-335280">
+              <a:lnSpc>
+                <a:spcPct val="133000"/>
+              </a:lnSpc>
+              <a:buSzPct val="100000"/>
+              <a:buFont typeface="Wingdings" panose="05000000000000000000" pitchFamily="2" charset="2"/>
+              <a:buChar char="q"/>
+            </a:pPr>
+            <a:r>
+              <a:rPr lang="hu-HU" sz="1650" dirty="0">
+                <a:solidFill>
+                  <a:srgbClr val="E5E0DF"/>
+                </a:solidFill>
+                <a:latin typeface="Segoe UI Semibold" panose="020B0702040204020203" pitchFamily="34" charset="0"/>
+              </a:rPr>
+              <a:t>Frontend</a:t>
+            </a:r>
+          </a:p>
+          <a:p>
+            <a:pPr marL="792480" lvl="2" indent="-335280">
+              <a:lnSpc>
+                <a:spcPct val="133000"/>
+              </a:lnSpc>
+              <a:buSzPct val="100000"/>
+              <a:buFont typeface="Wingdings" panose="05000000000000000000" pitchFamily="2" charset="2"/>
+              <a:buChar char="q"/>
+            </a:pPr>
+            <a:r>
+              <a:rPr lang="hu-HU" sz="1650" dirty="0">
+                <a:solidFill>
+                  <a:srgbClr val="E5E0DF"/>
+                </a:solidFill>
+                <a:latin typeface="Segoe UI Semibold" panose="020B0702040204020203" pitchFamily="34" charset="0"/>
+              </a:rPr>
+              <a:t>Adatbázis</a:t>
+            </a:r>
+          </a:p>
+        </p:txBody>
+      </p:sp>
     </p:spTree>
   </p:cSld>
   <p:clrMapOvr>
     <a:masterClrMapping/>
   </p:clrMapOvr>
+  <mc:AlternateContent xmlns:mc="http://schemas.openxmlformats.org/markup-compatibility/2006">
+    <mc:Choice xmlns:p15="http://schemas.microsoft.com/office/powerpoint/2012/main" Requires="p15">
+      <p:transition xmlns:p14="http://schemas.microsoft.com/office/powerpoint/2010/main" spd="slow" p14:dur="2000">
+        <p15:prstTrans prst="fallOver"/>
+      </p:transition>
+    </mc:Choice>
+    <mc:Fallback>
+      <p:transition spd="slow">
+        <p:fade/>
+      </p:transition>
+    </mc:Fallback>
+  </mc:AlternateContent>
+  <p:timing>
+    <p:tnLst>
+      <p:par>
+        <p:cTn id="1" dur="indefinite" restart="never" nodeType="tmRoot">
+          <p:childTnLst>
+            <p:seq concurrent="1" nextAc="seek">
+              <p:cTn id="2" dur="indefinite" nodeType="mainSeq">
+                <p:childTnLst>
+                  <p:par>
+                    <p:cTn id="3" fill="hold">
+                      <p:stCondLst>
+                        <p:cond delay="indefinite"/>
+                        <p:cond evt="onBegin" delay="0">
+                          <p:tn val="2"/>
+                        </p:cond>
+                      </p:stCondLst>
+                      <p:childTnLst>
+                        <p:par>
+                          <p:cTn id="4" fill="hold">
+                            <p:stCondLst>
+                              <p:cond delay="0"/>
+                            </p:stCondLst>
+                            <p:childTnLst>
+                              <p:par>
+                                <p:cTn id="5" presetID="26" presetClass="entr" presetSubtype="0" fill="hold" nodeType="afterEffect">
+                                  <p:stCondLst>
+                                    <p:cond delay="0"/>
+                                  </p:stCondLst>
+                                  <p:childTnLst>
+                                    <p:set>
+                                      <p:cBhvr>
+                                        <p:cTn id="6" dur="1" fill="hold">
+                                          <p:stCondLst>
+                                            <p:cond delay="0"/>
+                                          </p:stCondLst>
+                                        </p:cTn>
+                                        <p:tgtEl>
+                                          <p:spTgt spid="16"/>
+                                        </p:tgtEl>
+                                        <p:attrNameLst>
+                                          <p:attrName>style.visibility</p:attrName>
+                                        </p:attrNameLst>
+                                      </p:cBhvr>
+                                      <p:to>
+                                        <p:strVal val="visible"/>
+                                      </p:to>
+                                    </p:set>
+                                    <p:animEffect transition="in" filter="wipe(down)">
+                                      <p:cBhvr>
+                                        <p:cTn id="7" dur="2900">
+                                          <p:stCondLst>
+                                            <p:cond delay="0"/>
+                                          </p:stCondLst>
+                                        </p:cTn>
+                                        <p:tgtEl>
+                                          <p:spTgt spid="16"/>
+                                        </p:tgtEl>
+                                      </p:cBhvr>
+                                    </p:animEffect>
+                                    <p:anim calcmode="lin" valueType="num">
+                                      <p:cBhvr>
+                                        <p:cTn id="8" dur="9110" tmFilter="0,0; 0.14,0.36; 0.43,0.73; 0.71,0.91; 1.0,1.0">
+                                          <p:stCondLst>
+                                            <p:cond delay="0"/>
+                                          </p:stCondLst>
+                                        </p:cTn>
+                                        <p:tgtEl>
+                                          <p:spTgt spid="16"/>
+                                        </p:tgtEl>
+                                        <p:attrNameLst>
+                                          <p:attrName>ppt_x</p:attrName>
+                                        </p:attrNameLst>
+                                      </p:cBhvr>
+                                      <p:tavLst>
+                                        <p:tav tm="0">
+                                          <p:val>
+                                            <p:strVal val="#ppt_x-0.25"/>
+                                          </p:val>
+                                        </p:tav>
+                                        <p:tav tm="100000">
+                                          <p:val>
+                                            <p:strVal val="#ppt_x"/>
+                                          </p:val>
+                                        </p:tav>
+                                      </p:tavLst>
+                                    </p:anim>
+                                    <p:anim calcmode="lin" valueType="num">
+                                      <p:cBhvr>
+                                        <p:cTn id="9" dur="3320" tmFilter="0.0,0.0; 0.25,0.07; 0.50,0.2; 0.75,0.467; 1.0,1.0">
+                                          <p:stCondLst>
+                                            <p:cond delay="0"/>
+                                          </p:stCondLst>
+                                        </p:cTn>
+                                        <p:tgtEl>
+                                          <p:spTgt spid="16"/>
+                                        </p:tgtEl>
+                                        <p:attrNameLst>
+                                          <p:attrName>ppt_y</p:attrName>
+                                        </p:attrNameLst>
+                                      </p:cBhvr>
+                                      <p:tavLst>
+                                        <p:tav tm="0" fmla="#ppt_y-sin(pi*$)/3">
+                                          <p:val>
+                                            <p:fltVal val="0.5"/>
+                                          </p:val>
+                                        </p:tav>
+                                        <p:tav tm="100000">
+                                          <p:val>
+                                            <p:fltVal val="1"/>
+                                          </p:val>
+                                        </p:tav>
+                                      </p:tavLst>
+                                    </p:anim>
+                                    <p:anim calcmode="lin" valueType="num">
+                                      <p:cBhvr>
+                                        <p:cTn id="10" dur="3320" tmFilter="0, 0; 0.125,0.2665; 0.25,0.4; 0.375,0.465; 0.5,0.5;  0.625,0.535; 0.75,0.6; 0.875,0.7335; 1,1">
+                                          <p:stCondLst>
+                                            <p:cond delay="3320"/>
+                                          </p:stCondLst>
+                                        </p:cTn>
+                                        <p:tgtEl>
+                                          <p:spTgt spid="16"/>
+                                        </p:tgtEl>
+                                        <p:attrNameLst>
+                                          <p:attrName>ppt_y</p:attrName>
+                                        </p:attrNameLst>
+                                      </p:cBhvr>
+                                      <p:tavLst>
+                                        <p:tav tm="0" fmla="#ppt_y-sin(pi*$)/9">
+                                          <p:val>
+                                            <p:fltVal val="0"/>
+                                          </p:val>
+                                        </p:tav>
+                                        <p:tav tm="100000">
+                                          <p:val>
+                                            <p:fltVal val="1"/>
+                                          </p:val>
+                                        </p:tav>
+                                      </p:tavLst>
+                                    </p:anim>
+                                    <p:anim calcmode="lin" valueType="num">
+                                      <p:cBhvr>
+                                        <p:cTn id="11" dur="1660" tmFilter="0, 0; 0.125,0.2665; 0.25,0.4; 0.375,0.465; 0.5,0.5;  0.625,0.535; 0.75,0.6; 0.875,0.7335; 1,1">
+                                          <p:stCondLst>
+                                            <p:cond delay="6620"/>
+                                          </p:stCondLst>
+                                        </p:cTn>
+                                        <p:tgtEl>
+                                          <p:spTgt spid="16"/>
+                                        </p:tgtEl>
+                                        <p:attrNameLst>
+                                          <p:attrName>ppt_y</p:attrName>
+                                        </p:attrNameLst>
+                                      </p:cBhvr>
+                                      <p:tavLst>
+                                        <p:tav tm="0" fmla="#ppt_y-sin(pi*$)/27">
+                                          <p:val>
+                                            <p:fltVal val="0"/>
+                                          </p:val>
+                                        </p:tav>
+                                        <p:tav tm="100000">
+                                          <p:val>
+                                            <p:fltVal val="1"/>
+                                          </p:val>
+                                        </p:tav>
+                                      </p:tavLst>
+                                    </p:anim>
+                                    <p:anim calcmode="lin" valueType="num">
+                                      <p:cBhvr>
+                                        <p:cTn id="12" dur="820" tmFilter="0, 0; 0.125,0.2665; 0.25,0.4; 0.375,0.465; 0.5,0.5;  0.625,0.535; 0.75,0.6; 0.875,0.7335; 1,1">
+                                          <p:stCondLst>
+                                            <p:cond delay="8280"/>
+                                          </p:stCondLst>
+                                        </p:cTn>
+                                        <p:tgtEl>
+                                          <p:spTgt spid="16"/>
+                                        </p:tgtEl>
+                                        <p:attrNameLst>
+                                          <p:attrName>ppt_y</p:attrName>
+                                        </p:attrNameLst>
+                                      </p:cBhvr>
+                                      <p:tavLst>
+                                        <p:tav tm="0" fmla="#ppt_y-sin(pi*$)/81">
+                                          <p:val>
+                                            <p:fltVal val="0"/>
+                                          </p:val>
+                                        </p:tav>
+                                        <p:tav tm="100000">
+                                          <p:val>
+                                            <p:fltVal val="1"/>
+                                          </p:val>
+                                        </p:tav>
+                                      </p:tavLst>
+                                    </p:anim>
+                                    <p:animScale>
+                                      <p:cBhvr>
+                                        <p:cTn id="13" dur="130">
+                                          <p:stCondLst>
+                                            <p:cond delay="3250"/>
+                                          </p:stCondLst>
+                                        </p:cTn>
+                                        <p:tgtEl>
+                                          <p:spTgt spid="16"/>
+                                        </p:tgtEl>
+                                      </p:cBhvr>
+                                      <p:to x="100000" y="60000"/>
+                                    </p:animScale>
+                                    <p:animScale>
+                                      <p:cBhvr>
+                                        <p:cTn id="14" dur="830" decel="50000">
+                                          <p:stCondLst>
+                                            <p:cond delay="3380"/>
+                                          </p:stCondLst>
+                                        </p:cTn>
+                                        <p:tgtEl>
+                                          <p:spTgt spid="16"/>
+                                        </p:tgtEl>
+                                      </p:cBhvr>
+                                      <p:to x="100000" y="100000"/>
+                                    </p:animScale>
+                                    <p:animScale>
+                                      <p:cBhvr>
+                                        <p:cTn id="15" dur="130">
+                                          <p:stCondLst>
+                                            <p:cond delay="6560"/>
+                                          </p:stCondLst>
+                                        </p:cTn>
+                                        <p:tgtEl>
+                                          <p:spTgt spid="16"/>
+                                        </p:tgtEl>
+                                      </p:cBhvr>
+                                      <p:to x="100000" y="80000"/>
+                                    </p:animScale>
+                                    <p:animScale>
+                                      <p:cBhvr>
+                                        <p:cTn id="16" dur="830" decel="50000">
+                                          <p:stCondLst>
+                                            <p:cond delay="6690"/>
+                                          </p:stCondLst>
+                                        </p:cTn>
+                                        <p:tgtEl>
+                                          <p:spTgt spid="16"/>
+                                        </p:tgtEl>
+                                      </p:cBhvr>
+                                      <p:to x="100000" y="100000"/>
+                                    </p:animScale>
+                                    <p:animScale>
+                                      <p:cBhvr>
+                                        <p:cTn id="17" dur="130">
+                                          <p:stCondLst>
+                                            <p:cond delay="8210"/>
+                                          </p:stCondLst>
+                                        </p:cTn>
+                                        <p:tgtEl>
+                                          <p:spTgt spid="16"/>
+                                        </p:tgtEl>
+                                      </p:cBhvr>
+                                      <p:to x="100000" y="90000"/>
+                                    </p:animScale>
+                                    <p:animScale>
+                                      <p:cBhvr>
+                                        <p:cTn id="18" dur="830" decel="50000">
+                                          <p:stCondLst>
+                                            <p:cond delay="8340"/>
+                                          </p:stCondLst>
+                                        </p:cTn>
+                                        <p:tgtEl>
+                                          <p:spTgt spid="16"/>
+                                        </p:tgtEl>
+                                      </p:cBhvr>
+                                      <p:to x="100000" y="100000"/>
+                                    </p:animScale>
+                                    <p:animScale>
+                                      <p:cBhvr>
+                                        <p:cTn id="19" dur="130">
+                                          <p:stCondLst>
+                                            <p:cond delay="9040"/>
+                                          </p:stCondLst>
+                                        </p:cTn>
+                                        <p:tgtEl>
+                                          <p:spTgt spid="16"/>
+                                        </p:tgtEl>
+                                      </p:cBhvr>
+                                      <p:to x="100000" y="95000"/>
+                                    </p:animScale>
+                                    <p:animScale>
+                                      <p:cBhvr>
+                                        <p:cTn id="20" dur="830" decel="50000">
+                                          <p:stCondLst>
+                                            <p:cond delay="9170"/>
+                                          </p:stCondLst>
+                                        </p:cTn>
+                                        <p:tgtEl>
+                                          <p:spTgt spid="16"/>
+                                        </p:tgtEl>
+                                      </p:cBhvr>
+                                      <p:to x="100000" y="100000"/>
+                                    </p:animScale>
+                                  </p:childTnLst>
+                                </p:cTn>
+                              </p:par>
+                            </p:childTnLst>
+                          </p:cTn>
+                        </p:par>
+                      </p:childTnLst>
+                    </p:cTn>
+                  </p:par>
+                </p:childTnLst>
+              </p:cTn>
+              <p:prevCondLst>
+                <p:cond evt="onPrev" delay="0">
+                  <p:tgtEl>
+                    <p:sldTgt/>
+                  </p:tgtEl>
+                </p:cond>
+              </p:prevCondLst>
+              <p:nextCondLst>
+                <p:cond evt="onNext" delay="0">
+                  <p:tgtEl>
+                    <p:sldTgt/>
+                  </p:tgtEl>
+                </p:cond>
+              </p:nextCondLst>
+            </p:seq>
+          </p:childTnLst>
+        </p:cTn>
+      </p:par>
+    </p:tnLst>
+  </p:timing>
 </p:sld>
 </file>
 
